--- a/protected-downloads/praesentation/M04.pptx
+++ b/protected-downloads/praesentation/M04.pptx
@@ -8,13 +8,13 @@
     <p:sldId id="256" r:id="rId7"/>
     <p:sldId id="257" r:id="rId8"/>
     <p:sldId id="258" r:id="rId9"/>
-    <p:sldId id="259" r:id="rId10"/>
-    <p:sldId id="260" r:id="rId11"/>
-    <p:sldId id="261" r:id="rId12"/>
-    <p:sldId id="262" r:id="rId13"/>
-    <p:sldId id="263" r:id="rId14"/>
-    <p:sldId id="264" r:id="rId15"/>
-    <p:sldId id="265" r:id="rId16"/>
+    <p:sldId id="259" r:id="rId11"/>
+    <p:sldId id="260" r:id="rId12"/>
+    <p:sldId id="261" r:id="rId13"/>
+    <p:sldId id="262" r:id="rId14"/>
+    <p:sldId id="263" r:id="rId15"/>
+    <p:sldId id="264" r:id="rId16"/>
+    <p:sldId id="265" r:id="rId17"/>
   </p:sldIdLst>
   <p:sldSz cx="12188952" cy="6858000" type="screen4x3"/>
   <p:notesSz cx="6858000" cy="9144000"/>
@@ -114,6 +114,826 @@
     </a:lvl9pPr>
   </p:defaultTextStyle>
 </p:presentation>
+</file>
+
+<file path=ppt/notesMasters/notesMaster1.xml><?xml version="1.0" encoding="utf-8"?>
+<p:notesMaster xmlns:a="http://schemas.openxmlformats.org/drawingml/2006/main" xmlns:p="http://schemas.openxmlformats.org/presentationml/2006/main" xmlns:r="http://schemas.openxmlformats.org/officeDocument/2006/relationships">
+  <p:cSld>
+    <p:bg>
+      <p:bgRef idx="1001">
+        <a:schemeClr val="bg1"/>
+      </p:bgRef>
+    </p:bg>
+    <p:spTree>
+      <p:nvGrpSpPr>
+        <p:cNvPr id="1" name=""/>
+        <p:cNvGrpSpPr/>
+        <p:nvPr/>
+      </p:nvGrpSpPr>
+      <p:grpSpPr>
+        <a:xfrm>
+          <a:off x="0" y="0"/>
+          <a:ext cx="0" cy="0"/>
+          <a:chOff x="0" y="0"/>
+          <a:chExt cx="0" cy="0"/>
+        </a:xfrm>
+      </p:grpSpPr>
+      <p:sp>
+        <p:nvSpPr>
+          <p:cNvPr id="2" name="Header Placeholder 1"/>
+          <p:cNvSpPr>
+            <a:spLocks noGrp="1"/>
+          </p:cNvSpPr>
+          <p:nvPr>
+            <p:ph type="hdr" sz="quarter"/>
+          </p:nvPr>
+        </p:nvSpPr>
+        <p:spPr>
+          <a:xfrm>
+            <a:off x="0" y="0"/>
+            <a:ext cx="2971800" cy="457200"/>
+          </a:xfrm>
+          <a:prstGeom prst="rect">
+            <a:avLst/>
+          </a:prstGeom>
+        </p:spPr>
+        <p:txBody>
+          <a:bodyPr vert="horz" lIns="91440" tIns="45720" rIns="91440" bIns="45720" rtlCol="0"/>
+          <a:lstStyle>
+            <a:lvl1pPr algn="l">
+              <a:defRPr sz="1200"/>
+            </a:lvl1pPr>
+          </a:lstStyle>
+          <a:p>
+            <a:endParaRPr lang="en-US"/>
+          </a:p>
+        </p:txBody>
+      </p:sp>
+      <p:sp>
+        <p:nvSpPr>
+          <p:cNvPr id="3" name="Date Placeholder 2"/>
+          <p:cNvSpPr>
+            <a:spLocks noGrp="1"/>
+          </p:cNvSpPr>
+          <p:nvPr>
+            <p:ph type="dt" idx="1"/>
+          </p:nvPr>
+        </p:nvSpPr>
+        <p:spPr>
+          <a:xfrm>
+            <a:off x="3884613" y="0"/>
+            <a:ext cx="2971800" cy="457200"/>
+          </a:xfrm>
+          <a:prstGeom prst="rect">
+            <a:avLst/>
+          </a:prstGeom>
+        </p:spPr>
+        <p:txBody>
+          <a:bodyPr vert="horz" lIns="91440" tIns="45720" rIns="91440" bIns="45720" rtlCol="0"/>
+          <a:lstStyle>
+            <a:lvl1pPr algn="r">
+              <a:defRPr sz="1200"/>
+            </a:lvl1pPr>
+          </a:lstStyle>
+          <a:p>
+            <a:fld id="{0F89C1C7-3DCD-1040-A9CF-14679D8B5DDD}" type="datetimeFigureOut">
+              <a:rPr lang="en-US" smtClean="0"/>
+              <a:t>10/17/16</a:t>
+            </a:fld>
+            <a:endParaRPr lang="en-US"/>
+          </a:p>
+        </p:txBody>
+      </p:sp>
+      <p:sp>
+        <p:nvSpPr>
+          <p:cNvPr id="4" name="Slide Image Placeholder 3"/>
+          <p:cNvSpPr>
+            <a:spLocks noGrp="1" noRot="1" noChangeAspect="1"/>
+          </p:cNvSpPr>
+          <p:nvPr>
+            <p:ph type="sldImg" idx="2"/>
+          </p:nvPr>
+        </p:nvSpPr>
+        <p:spPr>
+          <a:xfrm>
+            <a:off x="1143000" y="685800"/>
+            <a:ext cx="4572000" cy="3429000"/>
+          </a:xfrm>
+          <a:prstGeom prst="rect">
+            <a:avLst/>
+          </a:prstGeom>
+          <a:noFill/>
+          <a:ln w="12700">
+            <a:solidFill>
+              <a:prstClr val="black"/>
+            </a:solidFill>
+          </a:ln>
+        </p:spPr>
+        <p:txBody>
+          <a:bodyPr vert="horz" lIns="91440" tIns="45720" rIns="91440" bIns="45720" rtlCol="0" anchor="ctr"/>
+          <a:lstStyle/>
+          <a:p>
+            <a:endParaRPr lang="en-US"/>
+          </a:p>
+        </p:txBody>
+      </p:sp>
+      <p:sp>
+        <p:nvSpPr>
+          <p:cNvPr id="5" name="Notes Placeholder 4"/>
+          <p:cNvSpPr>
+            <a:spLocks noGrp="1"/>
+          </p:cNvSpPr>
+          <p:nvPr>
+            <p:ph type="body" sz="quarter" idx="3"/>
+          </p:nvPr>
+        </p:nvSpPr>
+        <p:spPr>
+          <a:xfrm>
+            <a:off x="685800" y="4343400"/>
+            <a:ext cx="5486400" cy="4114800"/>
+          </a:xfrm>
+          <a:prstGeom prst="rect">
+            <a:avLst/>
+          </a:prstGeom>
+        </p:spPr>
+        <p:txBody>
+          <a:bodyPr vert="horz" lIns="91440" tIns="45720" rIns="91440" bIns="45720" rtlCol="0"/>
+          <a:lstStyle/>
+          <a:p>
+            <a:pPr lvl="0"/>
+            <a:r>
+              <a:rPr lang="en-US" smtClean="0"/>
+              <a:t>Click to edit Master text styles</a:t>
+            </a:r>
+          </a:p>
+          <a:p>
+            <a:pPr lvl="1"/>
+            <a:r>
+              <a:rPr lang="en-US" smtClean="0"/>
+              <a:t>Second level</a:t>
+            </a:r>
+          </a:p>
+          <a:p>
+            <a:pPr lvl="2"/>
+            <a:r>
+              <a:rPr lang="en-US" smtClean="0"/>
+              <a:t>Third level</a:t>
+            </a:r>
+          </a:p>
+          <a:p>
+            <a:pPr lvl="3"/>
+            <a:r>
+              <a:rPr lang="en-US" smtClean="0"/>
+              <a:t>Fourth level</a:t>
+            </a:r>
+          </a:p>
+          <a:p>
+            <a:pPr lvl="4"/>
+            <a:r>
+              <a:rPr lang="en-US" smtClean="0"/>
+              <a:t>Fifth level</a:t>
+            </a:r>
+            <a:endParaRPr lang="en-US"/>
+          </a:p>
+        </p:txBody>
+      </p:sp>
+      <p:sp>
+        <p:nvSpPr>
+          <p:cNvPr id="6" name="Footer Placeholder 5"/>
+          <p:cNvSpPr>
+            <a:spLocks noGrp="1"/>
+          </p:cNvSpPr>
+          <p:nvPr>
+            <p:ph type="ftr" sz="quarter" idx="4"/>
+          </p:nvPr>
+        </p:nvSpPr>
+        <p:spPr>
+          <a:xfrm>
+            <a:off x="0" y="8685213"/>
+            <a:ext cx="2971800" cy="457200"/>
+          </a:xfrm>
+          <a:prstGeom prst="rect">
+            <a:avLst/>
+          </a:prstGeom>
+        </p:spPr>
+        <p:txBody>
+          <a:bodyPr vert="horz" lIns="91440" tIns="45720" rIns="91440" bIns="45720" rtlCol="0" anchor="b"/>
+          <a:lstStyle>
+            <a:lvl1pPr algn="l">
+              <a:defRPr sz="1200"/>
+            </a:lvl1pPr>
+          </a:lstStyle>
+          <a:p>
+            <a:endParaRPr lang="en-US"/>
+          </a:p>
+        </p:txBody>
+      </p:sp>
+      <p:sp>
+        <p:nvSpPr>
+          <p:cNvPr id="7" name="Slide Number Placeholder 6"/>
+          <p:cNvSpPr>
+            <a:spLocks noGrp="1"/>
+          </p:cNvSpPr>
+          <p:nvPr>
+            <p:ph type="sldNum" sz="quarter" idx="5"/>
+          </p:nvPr>
+        </p:nvSpPr>
+        <p:spPr>
+          <a:xfrm>
+            <a:off x="3884613" y="8685213"/>
+            <a:ext cx="2971800" cy="457200"/>
+          </a:xfrm>
+          <a:prstGeom prst="rect">
+            <a:avLst/>
+          </a:prstGeom>
+        </p:spPr>
+        <p:txBody>
+          <a:bodyPr vert="horz" lIns="91440" tIns="45720" rIns="91440" bIns="45720" rtlCol="0" anchor="b"/>
+          <a:lstStyle>
+            <a:lvl1pPr algn="r">
+              <a:defRPr sz="1200"/>
+            </a:lvl1pPr>
+          </a:lstStyle>
+          <a:p>
+            <a:fld id="{BB5E49A5-4136-284D-997B-48E1D791AD67}" type="slidenum">
+              <a:rPr lang="en-US" smtClean="0"/>
+              <a:t>‹#›</a:t>
+            </a:fld>
+            <a:endParaRPr lang="en-US"/>
+          </a:p>
+        </p:txBody>
+      </p:sp>
+    </p:spTree>
+    <p:extLst>
+      <p:ext uri="{BB962C8B-B14F-4D97-AF65-F5344CB8AC3E}">
+        <p14:creationId xmlns:p14="http://schemas.microsoft.com/office/powerpoint/2010/main" val="2623252185"/>
+      </p:ext>
+    </p:extLst>
+  </p:cSld>
+  <p:clrMap bg1="lt1" tx1="dk1" bg2="lt2" tx2="dk2" accent1="accent1" accent2="accent2" accent3="accent3" accent4="accent4" accent5="accent5" accent6="accent6" hlink="hlink" folHlink="folHlink"/>
+  <p:notesStyle>
+    <a:lvl1pPr marL="0" algn="l" defTabSz="457200" rtl="0" eaLnBrk="1" latinLnBrk="0" hangingPunct="1">
+      <a:defRPr sz="1200" kern="1200">
+        <a:solidFill>
+          <a:schemeClr val="tx1"/>
+        </a:solidFill>
+        <a:latin typeface="+mn-lt"/>
+        <a:ea typeface="+mn-ea"/>
+        <a:cs typeface="+mn-cs"/>
+      </a:defRPr>
+    </a:lvl1pPr>
+    <a:lvl2pPr marL="457200" algn="l" defTabSz="457200" rtl="0" eaLnBrk="1" latinLnBrk="0" hangingPunct="1">
+      <a:defRPr sz="1200" kern="1200">
+        <a:solidFill>
+          <a:schemeClr val="tx1"/>
+        </a:solidFill>
+        <a:latin typeface="+mn-lt"/>
+        <a:ea typeface="+mn-ea"/>
+        <a:cs typeface="+mn-cs"/>
+      </a:defRPr>
+    </a:lvl2pPr>
+    <a:lvl3pPr marL="914400" algn="l" defTabSz="457200" rtl="0" eaLnBrk="1" latinLnBrk="0" hangingPunct="1">
+      <a:defRPr sz="1200" kern="1200">
+        <a:solidFill>
+          <a:schemeClr val="tx1"/>
+        </a:solidFill>
+        <a:latin typeface="+mn-lt"/>
+        <a:ea typeface="+mn-ea"/>
+        <a:cs typeface="+mn-cs"/>
+      </a:defRPr>
+    </a:lvl3pPr>
+    <a:lvl4pPr marL="1371600" algn="l" defTabSz="457200" rtl="0" eaLnBrk="1" latinLnBrk="0" hangingPunct="1">
+      <a:defRPr sz="1200" kern="1200">
+        <a:solidFill>
+          <a:schemeClr val="tx1"/>
+        </a:solidFill>
+        <a:latin typeface="+mn-lt"/>
+        <a:ea typeface="+mn-ea"/>
+        <a:cs typeface="+mn-cs"/>
+      </a:defRPr>
+    </a:lvl4pPr>
+    <a:lvl5pPr marL="1828800" algn="l" defTabSz="457200" rtl="0" eaLnBrk="1" latinLnBrk="0" hangingPunct="1">
+      <a:defRPr sz="1200" kern="1200">
+        <a:solidFill>
+          <a:schemeClr val="tx1"/>
+        </a:solidFill>
+        <a:latin typeface="+mn-lt"/>
+        <a:ea typeface="+mn-ea"/>
+        <a:cs typeface="+mn-cs"/>
+      </a:defRPr>
+    </a:lvl5pPr>
+    <a:lvl6pPr marL="2286000" algn="l" defTabSz="457200" rtl="0" eaLnBrk="1" latinLnBrk="0" hangingPunct="1">
+      <a:defRPr sz="1200" kern="1200">
+        <a:solidFill>
+          <a:schemeClr val="tx1"/>
+        </a:solidFill>
+        <a:latin typeface="+mn-lt"/>
+        <a:ea typeface="+mn-ea"/>
+        <a:cs typeface="+mn-cs"/>
+      </a:defRPr>
+    </a:lvl6pPr>
+    <a:lvl7pPr marL="2743200" algn="l" defTabSz="457200" rtl="0" eaLnBrk="1" latinLnBrk="0" hangingPunct="1">
+      <a:defRPr sz="1200" kern="1200">
+        <a:solidFill>
+          <a:schemeClr val="tx1"/>
+        </a:solidFill>
+        <a:latin typeface="+mn-lt"/>
+        <a:ea typeface="+mn-ea"/>
+        <a:cs typeface="+mn-cs"/>
+      </a:defRPr>
+    </a:lvl7pPr>
+    <a:lvl8pPr marL="3200400" algn="l" defTabSz="457200" rtl="0" eaLnBrk="1" latinLnBrk="0" hangingPunct="1">
+      <a:defRPr sz="1200" kern="1200">
+        <a:solidFill>
+          <a:schemeClr val="tx1"/>
+        </a:solidFill>
+        <a:latin typeface="+mn-lt"/>
+        <a:ea typeface="+mn-ea"/>
+        <a:cs typeface="+mn-cs"/>
+      </a:defRPr>
+    </a:lvl8pPr>
+    <a:lvl9pPr marL="3657600" algn="l" defTabSz="457200" rtl="0" eaLnBrk="1" latinLnBrk="0" hangingPunct="1">
+      <a:defRPr sz="1200" kern="1200">
+        <a:solidFill>
+          <a:schemeClr val="tx1"/>
+        </a:solidFill>
+        <a:latin typeface="+mn-lt"/>
+        <a:ea typeface="+mn-ea"/>
+        <a:cs typeface="+mn-cs"/>
+      </a:defRPr>
+    </a:lvl9pPr>
+  </p:notesStyle>
+</p:notesMaster>
+</file>
+
+<file path=ppt/notesSlides/notesSlide1.xml><?xml version="1.0" encoding="utf-8"?>
+<p:notes xmlns:a="http://schemas.openxmlformats.org/drawingml/2006/main" xmlns:p="http://schemas.openxmlformats.org/presentationml/2006/main" xmlns:r="http://schemas.openxmlformats.org/officeDocument/2006/relationships">
+  <p:cSld>
+    <p:spTree>
+      <p:nvGrpSpPr>
+        <p:cNvPr id="1" name=""/>
+        <p:cNvGrpSpPr/>
+        <p:nvPr/>
+      </p:nvGrpSpPr>
+      <p:grpSpPr>
+        <a:xfrm>
+          <a:off x="0" y="0"/>
+          <a:ext cx="0" cy="0"/>
+          <a:chOff x="0" y="0"/>
+          <a:chExt cx="0" cy="0"/>
+        </a:xfrm>
+      </p:grpSpPr>
+      <p:sp>
+        <p:nvSpPr>
+          <p:cNvPr id="2" name="Slide Image Placeholder 1"/>
+          <p:cNvSpPr>
+            <a:spLocks noGrp="1"/>
+          </p:cNvSpPr>
+          <p:nvPr>
+            <p:ph type="sldImg" idx="2"/>
+          </p:nvPr>
+        </p:nvSpPr>
+        <p:spPr/>
+      </p:sp>
+      <p:sp>
+        <p:nvSpPr>
+          <p:cNvPr id="3" name="Notes Placeholder 2"/>
+          <p:cNvSpPr>
+            <a:spLocks noGrp="1"/>
+          </p:cNvSpPr>
+          <p:nvPr>
+            <p:ph type="body" idx="3" sz="quarter"/>
+          </p:nvPr>
+        </p:nvSpPr>
+        <p:spPr/>
+        <p:txBody>
+          <a:bodyPr/>
+          <a:lstStyle/>
+          <a:p>
+            <a:r>
+              <a:t>Siehe Trainerhandbuch (Sektion 3) für Moderationshinweise, Timing und erwartete Teilnehmerreaktionen.</a:t>
+            </a:r>
+          </a:p>
+        </p:txBody>
+      </p:sp>
+      <p:sp>
+        <p:nvSpPr>
+          <p:cNvPr id="4" name="Slide Number Placeholder 3"/>
+          <p:cNvSpPr>
+            <a:spLocks noGrp="1"/>
+          </p:cNvSpPr>
+          <p:nvPr>
+            <p:ph type="sldNum" idx="5" sz="quarter"/>
+          </p:nvPr>
+        </p:nvSpPr>
+        <p:spPr/>
+      </p:sp>
+    </p:spTree>
+  </p:cSld>
+  <p:clrMapOvr>
+    <a:masterClrMapping/>
+  </p:clrMapOvr>
+</p:notes>
+</file>
+
+<file path=ppt/notesSlides/notesSlide2.xml><?xml version="1.0" encoding="utf-8"?>
+<p:notes xmlns:a="http://schemas.openxmlformats.org/drawingml/2006/main" xmlns:p="http://schemas.openxmlformats.org/presentationml/2006/main" xmlns:r="http://schemas.openxmlformats.org/officeDocument/2006/relationships">
+  <p:cSld>
+    <p:spTree>
+      <p:nvGrpSpPr>
+        <p:cNvPr id="1" name=""/>
+        <p:cNvGrpSpPr/>
+        <p:nvPr/>
+      </p:nvGrpSpPr>
+      <p:grpSpPr>
+        <a:xfrm>
+          <a:off x="0" y="0"/>
+          <a:ext cx="0" cy="0"/>
+          <a:chOff x="0" y="0"/>
+          <a:chExt cx="0" cy="0"/>
+        </a:xfrm>
+      </p:grpSpPr>
+      <p:sp>
+        <p:nvSpPr>
+          <p:cNvPr id="2" name="Slide Image Placeholder 1"/>
+          <p:cNvSpPr>
+            <a:spLocks noGrp="1"/>
+          </p:cNvSpPr>
+          <p:nvPr>
+            <p:ph type="sldImg" idx="2"/>
+          </p:nvPr>
+        </p:nvSpPr>
+        <p:spPr/>
+      </p:sp>
+      <p:sp>
+        <p:nvSpPr>
+          <p:cNvPr id="3" name="Notes Placeholder 2"/>
+          <p:cNvSpPr>
+            <a:spLocks noGrp="1"/>
+          </p:cNvSpPr>
+          <p:nvPr>
+            <p:ph type="body" idx="3" sz="quarter"/>
+          </p:nvPr>
+        </p:nvSpPr>
+        <p:spPr/>
+        <p:txBody>
+          <a:bodyPr/>
+          <a:lstStyle/>
+          <a:p>
+            <a:r>
+              <a:t>Siehe Trainerhandbuch (Sektion 3) für Moderationshinweise, Timing und erwartete Teilnehmerreaktionen.</a:t>
+            </a:r>
+          </a:p>
+        </p:txBody>
+      </p:sp>
+      <p:sp>
+        <p:nvSpPr>
+          <p:cNvPr id="4" name="Slide Number Placeholder 3"/>
+          <p:cNvSpPr>
+            <a:spLocks noGrp="1"/>
+          </p:cNvSpPr>
+          <p:nvPr>
+            <p:ph type="sldNum" idx="5" sz="quarter"/>
+          </p:nvPr>
+        </p:nvSpPr>
+        <p:spPr/>
+      </p:sp>
+    </p:spTree>
+  </p:cSld>
+  <p:clrMapOvr>
+    <a:masterClrMapping/>
+  </p:clrMapOvr>
+</p:notes>
+</file>
+
+<file path=ppt/notesSlides/notesSlide3.xml><?xml version="1.0" encoding="utf-8"?>
+<p:notes xmlns:a="http://schemas.openxmlformats.org/drawingml/2006/main" xmlns:p="http://schemas.openxmlformats.org/presentationml/2006/main" xmlns:r="http://schemas.openxmlformats.org/officeDocument/2006/relationships">
+  <p:cSld>
+    <p:spTree>
+      <p:nvGrpSpPr>
+        <p:cNvPr id="1" name=""/>
+        <p:cNvGrpSpPr/>
+        <p:nvPr/>
+      </p:nvGrpSpPr>
+      <p:grpSpPr>
+        <a:xfrm>
+          <a:off x="0" y="0"/>
+          <a:ext cx="0" cy="0"/>
+          <a:chOff x="0" y="0"/>
+          <a:chExt cx="0" cy="0"/>
+        </a:xfrm>
+      </p:grpSpPr>
+      <p:sp>
+        <p:nvSpPr>
+          <p:cNvPr id="2" name="Slide Image Placeholder 1"/>
+          <p:cNvSpPr>
+            <a:spLocks noGrp="1"/>
+          </p:cNvSpPr>
+          <p:nvPr>
+            <p:ph type="sldImg" idx="2"/>
+          </p:nvPr>
+        </p:nvSpPr>
+        <p:spPr/>
+      </p:sp>
+      <p:sp>
+        <p:nvSpPr>
+          <p:cNvPr id="3" name="Notes Placeholder 2"/>
+          <p:cNvSpPr>
+            <a:spLocks noGrp="1"/>
+          </p:cNvSpPr>
+          <p:nvPr>
+            <p:ph type="body" idx="3" sz="quarter"/>
+          </p:nvPr>
+        </p:nvSpPr>
+        <p:spPr/>
+        <p:txBody>
+          <a:bodyPr/>
+          <a:lstStyle/>
+          <a:p>
+            <a:r>
+              <a:t>Siehe Trainerhandbuch (Sektion 3) für Moderationshinweise, Timing und erwartete Teilnehmerreaktionen.</a:t>
+            </a:r>
+          </a:p>
+        </p:txBody>
+      </p:sp>
+      <p:sp>
+        <p:nvSpPr>
+          <p:cNvPr id="4" name="Slide Number Placeholder 3"/>
+          <p:cNvSpPr>
+            <a:spLocks noGrp="1"/>
+          </p:cNvSpPr>
+          <p:nvPr>
+            <p:ph type="sldNum" idx="5" sz="quarter"/>
+          </p:nvPr>
+        </p:nvSpPr>
+        <p:spPr/>
+      </p:sp>
+    </p:spTree>
+  </p:cSld>
+  <p:clrMapOvr>
+    <a:masterClrMapping/>
+  </p:clrMapOvr>
+</p:notes>
+</file>
+
+<file path=ppt/notesSlides/notesSlide4.xml><?xml version="1.0" encoding="utf-8"?>
+<p:notes xmlns:a="http://schemas.openxmlformats.org/drawingml/2006/main" xmlns:p="http://schemas.openxmlformats.org/presentationml/2006/main" xmlns:r="http://schemas.openxmlformats.org/officeDocument/2006/relationships">
+  <p:cSld>
+    <p:spTree>
+      <p:nvGrpSpPr>
+        <p:cNvPr id="1" name=""/>
+        <p:cNvGrpSpPr/>
+        <p:nvPr/>
+      </p:nvGrpSpPr>
+      <p:grpSpPr>
+        <a:xfrm>
+          <a:off x="0" y="0"/>
+          <a:ext cx="0" cy="0"/>
+          <a:chOff x="0" y="0"/>
+          <a:chExt cx="0" cy="0"/>
+        </a:xfrm>
+      </p:grpSpPr>
+      <p:sp>
+        <p:nvSpPr>
+          <p:cNvPr id="2" name="Slide Image Placeholder 1"/>
+          <p:cNvSpPr>
+            <a:spLocks noGrp="1"/>
+          </p:cNvSpPr>
+          <p:nvPr>
+            <p:ph type="sldImg" idx="2"/>
+          </p:nvPr>
+        </p:nvSpPr>
+        <p:spPr/>
+      </p:sp>
+      <p:sp>
+        <p:nvSpPr>
+          <p:cNvPr id="3" name="Notes Placeholder 2"/>
+          <p:cNvSpPr>
+            <a:spLocks noGrp="1"/>
+          </p:cNvSpPr>
+          <p:nvPr>
+            <p:ph type="body" idx="3" sz="quarter"/>
+          </p:nvPr>
+        </p:nvSpPr>
+        <p:spPr/>
+        <p:txBody>
+          <a:bodyPr/>
+          <a:lstStyle/>
+          <a:p>
+            <a:r>
+              <a:t>Siehe Trainerhandbuch (Sektion 3) für Moderationshinweise, Timing und erwartete Teilnehmerreaktionen.</a:t>
+            </a:r>
+          </a:p>
+        </p:txBody>
+      </p:sp>
+      <p:sp>
+        <p:nvSpPr>
+          <p:cNvPr id="4" name="Slide Number Placeholder 3"/>
+          <p:cNvSpPr>
+            <a:spLocks noGrp="1"/>
+          </p:cNvSpPr>
+          <p:nvPr>
+            <p:ph type="sldNum" idx="5" sz="quarter"/>
+          </p:nvPr>
+        </p:nvSpPr>
+        <p:spPr/>
+      </p:sp>
+    </p:spTree>
+  </p:cSld>
+  <p:clrMapOvr>
+    <a:masterClrMapping/>
+  </p:clrMapOvr>
+</p:notes>
+</file>
+
+<file path=ppt/notesSlides/notesSlide5.xml><?xml version="1.0" encoding="utf-8"?>
+<p:notes xmlns:a="http://schemas.openxmlformats.org/drawingml/2006/main" xmlns:p="http://schemas.openxmlformats.org/presentationml/2006/main" xmlns:r="http://schemas.openxmlformats.org/officeDocument/2006/relationships">
+  <p:cSld>
+    <p:spTree>
+      <p:nvGrpSpPr>
+        <p:cNvPr id="1" name=""/>
+        <p:cNvGrpSpPr/>
+        <p:nvPr/>
+      </p:nvGrpSpPr>
+      <p:grpSpPr>
+        <a:xfrm>
+          <a:off x="0" y="0"/>
+          <a:ext cx="0" cy="0"/>
+          <a:chOff x="0" y="0"/>
+          <a:chExt cx="0" cy="0"/>
+        </a:xfrm>
+      </p:grpSpPr>
+      <p:sp>
+        <p:nvSpPr>
+          <p:cNvPr id="2" name="Slide Image Placeholder 1"/>
+          <p:cNvSpPr>
+            <a:spLocks noGrp="1"/>
+          </p:cNvSpPr>
+          <p:nvPr>
+            <p:ph type="sldImg" idx="2"/>
+          </p:nvPr>
+        </p:nvSpPr>
+        <p:spPr/>
+      </p:sp>
+      <p:sp>
+        <p:nvSpPr>
+          <p:cNvPr id="3" name="Notes Placeholder 2"/>
+          <p:cNvSpPr>
+            <a:spLocks noGrp="1"/>
+          </p:cNvSpPr>
+          <p:nvPr>
+            <p:ph type="body" idx="3" sz="quarter"/>
+          </p:nvPr>
+        </p:nvSpPr>
+        <p:spPr/>
+        <p:txBody>
+          <a:bodyPr/>
+          <a:lstStyle/>
+          <a:p>
+            <a:r>
+              <a:t>Siehe Trainerhandbuch (Sektion 3) für Moderationshinweise, Timing und erwartete Teilnehmerreaktionen.</a:t>
+            </a:r>
+          </a:p>
+        </p:txBody>
+      </p:sp>
+      <p:sp>
+        <p:nvSpPr>
+          <p:cNvPr id="4" name="Slide Number Placeholder 3"/>
+          <p:cNvSpPr>
+            <a:spLocks noGrp="1"/>
+          </p:cNvSpPr>
+          <p:nvPr>
+            <p:ph type="sldNum" idx="5" sz="quarter"/>
+          </p:nvPr>
+        </p:nvSpPr>
+        <p:spPr/>
+      </p:sp>
+    </p:spTree>
+  </p:cSld>
+  <p:clrMapOvr>
+    <a:masterClrMapping/>
+  </p:clrMapOvr>
+</p:notes>
+</file>
+
+<file path=ppt/notesSlides/notesSlide6.xml><?xml version="1.0" encoding="utf-8"?>
+<p:notes xmlns:a="http://schemas.openxmlformats.org/drawingml/2006/main" xmlns:p="http://schemas.openxmlformats.org/presentationml/2006/main" xmlns:r="http://schemas.openxmlformats.org/officeDocument/2006/relationships">
+  <p:cSld>
+    <p:spTree>
+      <p:nvGrpSpPr>
+        <p:cNvPr id="1" name=""/>
+        <p:cNvGrpSpPr/>
+        <p:nvPr/>
+      </p:nvGrpSpPr>
+      <p:grpSpPr>
+        <a:xfrm>
+          <a:off x="0" y="0"/>
+          <a:ext cx="0" cy="0"/>
+          <a:chOff x="0" y="0"/>
+          <a:chExt cx="0" cy="0"/>
+        </a:xfrm>
+      </p:grpSpPr>
+      <p:sp>
+        <p:nvSpPr>
+          <p:cNvPr id="2" name="Slide Image Placeholder 1"/>
+          <p:cNvSpPr>
+            <a:spLocks noGrp="1"/>
+          </p:cNvSpPr>
+          <p:nvPr>
+            <p:ph type="sldImg" idx="2"/>
+          </p:nvPr>
+        </p:nvSpPr>
+        <p:spPr/>
+      </p:sp>
+      <p:sp>
+        <p:nvSpPr>
+          <p:cNvPr id="3" name="Notes Placeholder 2"/>
+          <p:cNvSpPr>
+            <a:spLocks noGrp="1"/>
+          </p:cNvSpPr>
+          <p:nvPr>
+            <p:ph type="body" idx="3" sz="quarter"/>
+          </p:nvPr>
+        </p:nvSpPr>
+        <p:spPr/>
+        <p:txBody>
+          <a:bodyPr/>
+          <a:lstStyle/>
+          <a:p>
+            <a:r>
+              <a:t>Musterlösung (Trainer-Version)</a:t>
+            </a:r>
+          </a:p>
+          <a:p>
+            <a:r>
+              <a:t>AB-1 Ergebnisse:</a:t>
+            </a:r>
+          </a:p>
+          <a:p>
+            <a:r>
+              <a:t>Gesamtpunktzahl: mindestens 13–15 / 20 → Rot-Einstufung</a:t>
+            </a:r>
+          </a:p>
+          <a:p>
+            <a:r>
+              <a:t>AB-2 Musterlösung:</a:t>
+            </a:r>
+          </a:p>
+          <a:p>
+            <a:r>
+              <a:t>Krisenphase 2 (Latente Krise): Krise ist vorhanden (Leverage 5,4x, KK 91 %, fallende EBITDA-Marge über 3 Jahre), aber noch kein Zahlungsausfall. Übergang zu Phase 3 droht ohne Gegenmaßnahmen.</a:t>
+            </a:r>
+          </a:p>
+          <a:p>
+            <a:r>
+              <a:t>Dominantes Signal: Leverage 5,4x bei fallendem EBITDA — der Schuldendienst ist gefährdet. Ergänzend: KK-Inanspruchnahme 91 % = Liquiditätspuffer nahezu aufgebraucht.</a:t>
+            </a:r>
+          </a:p>
+          <a:p>
+            <a:r>
+              <a:t>Eskalation Rot: Sofortige Meldung an Teamleiter (&lt; 48 Stunden). Keine eigenständigen Zusagen oder Linienerhöhungen. Marktfolge zur Sicherheitenbewertung einschalten.</a:t>
+            </a:r>
+          </a:p>
+          <a:p>
+            <a:r>
+              <a:t>Musterformulierungen Aufgabe A4:</a:t>
+            </a:r>
+          </a:p>
+          <a:p>
+            <a:r>
+              <a:t>1. „Wie entwickelt sich der Auftragsbestand bei Ihrem Hauptkunden — haben Sie Aufträge für die nächsten 6 Monate gesichert?"</a:t>
+            </a:r>
+          </a:p>
+          <a:p>
+            <a:r>
+              <a:t>2. „Ihr Jahresabschluss liegt uns noch nicht vor. Können wir Ihren Steuerberater direkt kontaktieren?"</a:t>
+            </a:r>
+          </a:p>
+          <a:p>
+            <a:r>
+              <a:t>3. „Wie haben Sie die langfristige Führung des Unternehmens geregelt — haben Sie schon konkrete Überlegungen zur Nachfolge?"</a:t>
+            </a:r>
+          </a:p>
+        </p:txBody>
+      </p:sp>
+      <p:sp>
+        <p:nvSpPr>
+          <p:cNvPr id="4" name="Slide Number Placeholder 3"/>
+          <p:cNvSpPr>
+            <a:spLocks noGrp="1"/>
+          </p:cNvSpPr>
+          <p:nvPr>
+            <p:ph type="sldNum" idx="5" sz="quarter"/>
+          </p:nvPr>
+        </p:nvSpPr>
+        <p:spPr/>
+      </p:sp>
+    </p:spTree>
+  </p:cSld>
+  <p:clrMapOvr>
+    <a:masterClrMapping/>
+  </p:clrMapOvr>
+</p:notes>
 </file>
 
 <file path=ppt/slideLayouts/slideLayout1.xml><?xml version="1.0" encoding="utf-8"?>
@@ -3788,7 +4608,7 @@
                 </a:solidFill>
                 <a:latin typeface="JetBrains Mono"/>
               </a:rPr>
-              <a:t>M04  ·  INHALT</a:t>
+              <a:t>M04  ·  ARBEITSBLATT</a:t>
             </a:r>
           </a:p>
         </p:txBody>
@@ -3922,8 +4742,8 @@
         </p:nvSpPr>
         <p:spPr>
           <a:xfrm>
-            <a:off x="685800" y="1417320"/>
-            <a:ext cx="10817352" cy="5029200"/>
+            <a:off x="685800" y="1554480"/>
+            <a:ext cx="10817352" cy="3840480"/>
           </a:xfrm>
           <a:prstGeom prst="rect">
             <a:avLst/>
@@ -3945,13 +4765,13 @@
               </a:spcAft>
             </a:pPr>
             <a:r>
-              <a:rPr sz="1200">
+              <a:rPr sz="1400">
                 <a:solidFill>
                   <a:srgbClr val="3D5466"/>
                 </a:solidFill>
                 <a:latin typeface="Arial"/>
               </a:rPr>
-              <a:t>Unternehmensprofil:</a:t>
+              <a:t>▸  Unternehmensprofil:</a:t>
             </a:r>
           </a:p>
           <a:p>
@@ -3964,13 +4784,13 @@
               </a:spcAft>
             </a:pPr>
             <a:r>
-              <a:rPr sz="1200">
+              <a:rPr sz="1400">
                 <a:solidFill>
                   <a:srgbClr val="3D5466"/>
                 </a:solidFill>
                 <a:latin typeface="Arial"/>
               </a:rPr>
-              <a:t>Finanzkennzahlen (letzte 3 Perioden):</a:t>
+              <a:t>▸  Finanzkennzahlen (letzte 3 Perioden):</a:t>
             </a:r>
           </a:p>
           <a:p>
@@ -3983,32 +4803,13 @@
               </a:spcAft>
             </a:pPr>
             <a:r>
-              <a:rPr sz="1200">
+              <a:rPr sz="1400">
                 <a:solidFill>
                   <a:srgbClr val="3D5466"/>
                 </a:solidFill>
                 <a:latin typeface="Arial"/>
               </a:rPr>
-              <a:t>Zusatzinformationen aus dem letzten Gespräch (vor 6 Wochen):</a:t>
-            </a:r>
-          </a:p>
-          <a:p>
-            <a:pPr>
-              <a:spcBef>
-                <a:spcPts val="1000"/>
-              </a:spcBef>
-              <a:spcAft>
-                <a:spcPts val="200"/>
-              </a:spcAft>
-            </a:pPr>
-            <a:r>
-              <a:rPr sz="800" b="1">
-                <a:solidFill>
-                  <a:srgbClr val="78808C"/>
-                </a:solidFill>
-                <a:latin typeface="JetBrains Mono"/>
-              </a:rPr>
-              <a:t>AMPEL-CHECKLISTE AUSFÜLLEN</a:t>
+              <a:t>▸  Zusatzinformationen aus dem letzten Gespräch (vor 6 Wochen):</a:t>
             </a:r>
           </a:p>
           <a:p>
@@ -4021,13 +4822,13 @@
               </a:spcAft>
             </a:pPr>
             <a:r>
-              <a:rPr sz="1200">
+              <a:rPr sz="1400">
                 <a:solidFill>
                   <a:srgbClr val="3D5466"/>
                 </a:solidFill>
                 <a:latin typeface="Arial"/>
               </a:rPr>
-              <a:t>Füllen Sie die Ampel-Checkliste für die Renner Metallverarbeitung GmbH (Berichtsjahr aktuell) vollständig aus.</a:t>
+              <a:t>▸  Ampel-Checkliste ausfüllen</a:t>
             </a:r>
           </a:p>
           <a:p>
@@ -4040,134 +4841,98 @@
               </a:spcAft>
             </a:pPr>
             <a:r>
-              <a:rPr sz="1200">
+              <a:rPr sz="1400">
                 <a:solidFill>
                   <a:srgbClr val="3D5466"/>
                 </a:solidFill>
                 <a:latin typeface="Arial"/>
               </a:rPr>
-              <a:t>Quantitative Indikatoren:</a:t>
-            </a:r>
-          </a:p>
-          <a:p>
-            <a:pPr>
-              <a:spcBef>
-                <a:spcPts val="400"/>
-              </a:spcBef>
-              <a:spcAft>
-                <a:spcPts val="200"/>
-              </a:spcAft>
-            </a:pPr>
-            <a:r>
-              <a:rPr sz="1200">
+              <a:t>▸  Füllen Sie die Ampel-Checkliste für die Renner Metallverarbeitung GmbH (Berichtsjahr aktuell) vollständig aus.</a:t>
+            </a:r>
+          </a:p>
+        </p:txBody>
+      </p:sp>
+      <p:sp>
+        <p:nvSpPr>
+          <p:cNvPr id="9" name="Rectangle 8"/>
+          <p:cNvSpPr/>
+          <p:nvPr/>
+        </p:nvSpPr>
+        <p:spPr>
+          <a:xfrm>
+            <a:off x="685800" y="5486400"/>
+            <a:ext cx="10817352" cy="640080"/>
+          </a:xfrm>
+          <a:prstGeom prst="rect">
+            <a:avLst/>
+          </a:prstGeom>
+          <a:solidFill>
+            <a:srgbClr val="1F2C56"/>
+          </a:solidFill>
+          <a:ln>
+            <a:noFill/>
+          </a:ln>
+        </p:spPr>
+        <p:style>
+          <a:lnRef idx="1">
+            <a:schemeClr val="accent1"/>
+          </a:lnRef>
+          <a:fillRef idx="3">
+            <a:schemeClr val="accent1"/>
+          </a:fillRef>
+          <a:effectRef idx="2">
+            <a:schemeClr val="accent1"/>
+          </a:effectRef>
+          <a:fontRef idx="minor">
+            <a:schemeClr val="lt1"/>
+          </a:fontRef>
+        </p:style>
+        <p:txBody>
+          <a:bodyPr rtlCol="0" anchor="ctr"/>
+          <a:lstStyle/>
+          <a:p>
+            <a:pPr algn="ctr"/>
+          </a:p>
+        </p:txBody>
+      </p:sp>
+      <p:sp>
+        <p:nvSpPr>
+          <p:cNvPr id="10" name="TextBox 9"/>
+          <p:cNvSpPr txBox="1"/>
+          <p:nvPr/>
+        </p:nvSpPr>
+        <p:spPr>
+          <a:xfrm>
+            <a:off x="868680" y="5596128"/>
+            <a:ext cx="10451592" cy="457200"/>
+          </a:xfrm>
+          <a:prstGeom prst="rect">
+            <a:avLst/>
+          </a:prstGeom>
+          <a:noFill/>
+        </p:spPr>
+        <p:txBody>
+          <a:bodyPr wrap="square">
+            <a:spAutoFit/>
+          </a:bodyPr>
+          <a:lstStyle/>
+          <a:p>
+            <a:pPr algn="l"/>
+            <a:r>
+              <a:rPr sz="1300" b="1" i="0">
                 <a:solidFill>
-                  <a:srgbClr val="3D5466"/>
+                  <a:srgbClr val="FFFFFF"/>
                 </a:solidFill>
                 <a:latin typeface="Arial"/>
               </a:rPr>
-              <a:t>EBITDA-Marge: ______ %  → Bewertung Q1: ______</a:t>
-            </a:r>
-          </a:p>
-          <a:p>
-            <a:pPr>
-              <a:spcBef>
-                <a:spcPts val="400"/>
-              </a:spcBef>
-              <a:spcAft>
-                <a:spcPts val="200"/>
-              </a:spcAft>
-            </a:pPr>
-            <a:r>
-              <a:rPr sz="1200">
-                <a:solidFill>
-                  <a:srgbClr val="3D5466"/>
-                </a:solidFill>
-                <a:latin typeface="Arial"/>
-              </a:rPr>
-              <a:t>Leverage (NFK/EBITDA): ______x  → Bewertung Q2: ______</a:t>
-            </a:r>
-          </a:p>
-          <a:p>
-            <a:pPr>
-              <a:spcBef>
-                <a:spcPts val="400"/>
-              </a:spcBef>
-              <a:spcAft>
-                <a:spcPts val="200"/>
-              </a:spcAft>
-            </a:pPr>
-            <a:r>
-              <a:rPr sz="1200">
-                <a:solidFill>
-                  <a:srgbClr val="3D5466"/>
-                </a:solidFill>
-                <a:latin typeface="Arial"/>
-              </a:rPr>
-              <a:t>Eigenkapitalquote: ______ %  → Bewertung Q3: ______</a:t>
-            </a:r>
-          </a:p>
-          <a:p>
-            <a:pPr>
-              <a:spcBef>
-                <a:spcPts val="400"/>
-              </a:spcBef>
-              <a:spcAft>
-                <a:spcPts val="200"/>
-              </a:spcAft>
-            </a:pPr>
-            <a:r>
-              <a:rPr sz="1200">
-                <a:solidFill>
-                  <a:srgbClr val="3D5466"/>
-                </a:solidFill>
-                <a:latin typeface="Arial"/>
-              </a:rPr>
-              <a:t>KK-Inanspruchnahme: ______ %  → Bewertung Q4: ______</a:t>
-            </a:r>
-          </a:p>
-          <a:p>
-            <a:pPr>
-              <a:spcBef>
-                <a:spcPts val="400"/>
-              </a:spcBef>
-              <a:spcAft>
-                <a:spcPts val="200"/>
-              </a:spcAft>
-            </a:pPr>
-            <a:r>
-              <a:rPr sz="1200">
-                <a:solidFill>
-                  <a:srgbClr val="3D5466"/>
-                </a:solidFill>
-                <a:latin typeface="Arial"/>
-              </a:rPr>
-              <a:t>Jahresabschluss-Vorlage: ______ Monate nach JE  → Bewertung Q5: ______</a:t>
-            </a:r>
-          </a:p>
-          <a:p>
-            <a:pPr>
-              <a:spcBef>
-                <a:spcPts val="400"/>
-              </a:spcBef>
-              <a:spcAft>
-                <a:spcPts val="200"/>
-              </a:spcAft>
-            </a:pPr>
-            <a:r>
-              <a:rPr sz="1200">
-                <a:solidFill>
-                  <a:srgbClr val="3D5466"/>
-                </a:solidFill>
-                <a:latin typeface="Arial"/>
-              </a:rPr>
-              <a:t>Teilpunktzahl quantitativ: ______ / 10</a:t>
-            </a:r>
-          </a:p>
-        </p:txBody>
-      </p:sp>
-      <p:sp>
-        <p:nvSpPr>
-          <p:cNvPr id="9" name="Rectangle 8"/>
+              <a:t>→  Bearbeitung im Teilnehmer-Workbook (Arbeitsblatt mit Ausfüllfeldern)</a:t>
+            </a:r>
+          </a:p>
+        </p:txBody>
+      </p:sp>
+      <p:sp>
+        <p:nvSpPr>
+          <p:cNvPr id="11" name="Rectangle 10"/>
           <p:cNvSpPr/>
           <p:nvPr/>
         </p:nvSpPr>
@@ -4210,7 +4975,7 @@
       </p:sp>
       <p:sp>
         <p:nvSpPr>
-          <p:cNvPr id="10" name="TextBox 9"/>
+          <p:cNvPr id="12" name="TextBox 11"/>
           <p:cNvSpPr txBox="1"/>
           <p:nvPr/>
         </p:nvSpPr>
@@ -7704,4 +8469,324 @@
   </a:objectDefaults>
   <a:extraClrSchemeLst/>
 </a:theme>
+</file>
+
+<file path=ppt/theme/theme2.xml><?xml version="1.0" encoding="utf-8"?>
+<a:theme xmlns:a="http://schemas.openxmlformats.org/drawingml/2006/main" name="Office Theme">
+  <a:themeElements>
+    <a:clrScheme name="Office">
+      <a:dk1>
+        <a:sysClr val="windowText" lastClr="000000"/>
+      </a:dk1>
+      <a:lt1>
+        <a:sysClr val="window" lastClr="FFFFFF"/>
+      </a:lt1>
+      <a:dk2>
+        <a:srgbClr val="1F497D"/>
+      </a:dk2>
+      <a:lt2>
+        <a:srgbClr val="EEECE1"/>
+      </a:lt2>
+      <a:accent1>
+        <a:srgbClr val="4F81BD"/>
+      </a:accent1>
+      <a:accent2>
+        <a:srgbClr val="C0504D"/>
+      </a:accent2>
+      <a:accent3>
+        <a:srgbClr val="9BBB59"/>
+      </a:accent3>
+      <a:accent4>
+        <a:srgbClr val="8064A2"/>
+      </a:accent4>
+      <a:accent5>
+        <a:srgbClr val="4BACC6"/>
+      </a:accent5>
+      <a:accent6>
+        <a:srgbClr val="F79646"/>
+      </a:accent6>
+      <a:hlink>
+        <a:srgbClr val="0000FF"/>
+      </a:hlink>
+      <a:folHlink>
+        <a:srgbClr val="800080"/>
+      </a:folHlink>
+    </a:clrScheme>
+    <a:fontScheme name="Office">
+      <a:majorFont>
+        <a:latin typeface="Calibri"/>
+        <a:ea typeface=""/>
+        <a:cs typeface=""/>
+        <a:font script="Jpan" typeface="ＭＳ Ｐゴシック"/>
+        <a:font script="Hang" typeface="맑은 고딕"/>
+        <a:font script="Hans" typeface="宋体"/>
+        <a:font script="Hant" typeface="新細明體"/>
+        <a:font script="Arab" typeface="Times New Roman"/>
+        <a:font script="Hebr" typeface="Times New Roman"/>
+        <a:font script="Thai" typeface="Angsana New"/>
+        <a:font script="Ethi" typeface="Nyala"/>
+        <a:font script="Beng" typeface="Vrinda"/>
+        <a:font script="Gujr" typeface="Shruti"/>
+        <a:font script="Khmr" typeface="MoolBoran"/>
+        <a:font script="Knda" typeface="Tunga"/>
+        <a:font script="Guru" typeface="Raavi"/>
+        <a:font script="Cans" typeface="Euphemia"/>
+        <a:font script="Cher" typeface="Plantagenet Cherokee"/>
+        <a:font script="Yiii" typeface="Microsoft Yi Baiti"/>
+        <a:font script="Tibt" typeface="Microsoft Himalaya"/>
+        <a:font script="Thaa" typeface="MV Boli"/>
+        <a:font script="Deva" typeface="Mangal"/>
+        <a:font script="Telu" typeface="Gautami"/>
+        <a:font script="Taml" typeface="Latha"/>
+        <a:font script="Syrc" typeface="Estrangelo Edessa"/>
+        <a:font script="Orya" typeface="Kalinga"/>
+        <a:font script="Mlym" typeface="Kartika"/>
+        <a:font script="Laoo" typeface="DokChampa"/>
+        <a:font script="Sinh" typeface="Iskoola Pota"/>
+        <a:font script="Mong" typeface="Mongolian Baiti"/>
+        <a:font script="Viet" typeface="Times New Roman"/>
+        <a:font script="Uigh" typeface="Microsoft Uighur"/>
+        <a:font script="Geor" typeface="Sylfaen"/>
+      </a:majorFont>
+      <a:minorFont>
+        <a:latin typeface="Calibri"/>
+        <a:ea typeface=""/>
+        <a:cs typeface=""/>
+        <a:font script="Jpan" typeface="ＭＳ Ｐゴシック"/>
+        <a:font script="Hang" typeface="맑은 고딕"/>
+        <a:font script="Hans" typeface="宋体"/>
+        <a:font script="Hant" typeface="新細明體"/>
+        <a:font script="Arab" typeface="Arial"/>
+        <a:font script="Hebr" typeface="Arial"/>
+        <a:font script="Thai" typeface="Cordia New"/>
+        <a:font script="Ethi" typeface="Nyala"/>
+        <a:font script="Beng" typeface="Vrinda"/>
+        <a:font script="Gujr" typeface="Shruti"/>
+        <a:font script="Khmr" typeface="DaunPenh"/>
+        <a:font script="Knda" typeface="Tunga"/>
+        <a:font script="Guru" typeface="Raavi"/>
+        <a:font script="Cans" typeface="Euphemia"/>
+        <a:font script="Cher" typeface="Plantagenet Cherokee"/>
+        <a:font script="Yiii" typeface="Microsoft Yi Baiti"/>
+        <a:font script="Tibt" typeface="Microsoft Himalaya"/>
+        <a:font script="Thaa" typeface="MV Boli"/>
+        <a:font script="Deva" typeface="Mangal"/>
+        <a:font script="Telu" typeface="Gautami"/>
+        <a:font script="Taml" typeface="Latha"/>
+        <a:font script="Syrc" typeface="Estrangelo Edessa"/>
+        <a:font script="Orya" typeface="Kalinga"/>
+        <a:font script="Mlym" typeface="Kartika"/>
+        <a:font script="Laoo" typeface="DokChampa"/>
+        <a:font script="Sinh" typeface="Iskoola Pota"/>
+        <a:font script="Mong" typeface="Mongolian Baiti"/>
+        <a:font script="Viet" typeface="Arial"/>
+        <a:font script="Uigh" typeface="Microsoft Uighur"/>
+        <a:font script="Geor" typeface="Sylfaen"/>
+      </a:minorFont>
+    </a:fontScheme>
+    <a:fmtScheme name="Office">
+      <a:fillStyleLst>
+        <a:solidFill>
+          <a:schemeClr val="phClr"/>
+        </a:solidFill>
+        <a:gradFill rotWithShape="1">
+          <a:gsLst>
+            <a:gs pos="0">
+              <a:schemeClr val="phClr">
+                <a:tint val="50000"/>
+                <a:satMod val="300000"/>
+              </a:schemeClr>
+            </a:gs>
+            <a:gs pos="35000">
+              <a:schemeClr val="phClr">
+                <a:tint val="37000"/>
+                <a:satMod val="300000"/>
+              </a:schemeClr>
+            </a:gs>
+            <a:gs pos="100000">
+              <a:schemeClr val="phClr">
+                <a:tint val="15000"/>
+                <a:satMod val="350000"/>
+              </a:schemeClr>
+            </a:gs>
+          </a:gsLst>
+          <a:lin ang="16200000" scaled="1"/>
+        </a:gradFill>
+        <a:gradFill rotWithShape="1">
+          <a:gsLst>
+            <a:gs pos="0">
+              <a:schemeClr val="phClr">
+                <a:tint val="100000"/>
+                <a:shade val="100000"/>
+                <a:satMod val="130000"/>
+              </a:schemeClr>
+            </a:gs>
+            <a:gs pos="100000">
+              <a:schemeClr val="phClr">
+                <a:tint val="50000"/>
+                <a:shade val="100000"/>
+                <a:satMod val="350000"/>
+              </a:schemeClr>
+            </a:gs>
+          </a:gsLst>
+          <a:lin ang="16200000" scaled="0"/>
+        </a:gradFill>
+      </a:fillStyleLst>
+      <a:lnStyleLst>
+        <a:ln w="9525" cap="flat" cmpd="sng" algn="ctr">
+          <a:solidFill>
+            <a:schemeClr val="phClr">
+              <a:shade val="95000"/>
+              <a:satMod val="105000"/>
+            </a:schemeClr>
+          </a:solidFill>
+          <a:prstDash val="solid"/>
+        </a:ln>
+        <a:ln w="25400" cap="flat" cmpd="sng" algn="ctr">
+          <a:solidFill>
+            <a:schemeClr val="phClr"/>
+          </a:solidFill>
+          <a:prstDash val="solid"/>
+        </a:ln>
+        <a:ln w="38100" cap="flat" cmpd="sng" algn="ctr">
+          <a:solidFill>
+            <a:schemeClr val="phClr"/>
+          </a:solidFill>
+          <a:prstDash val="solid"/>
+        </a:ln>
+      </a:lnStyleLst>
+      <a:effectStyleLst>
+        <a:effectStyle>
+          <a:effectLst>
+            <a:outerShdw blurRad="40000" dist="20000" dir="5400000" rotWithShape="0">
+              <a:srgbClr val="000000">
+                <a:alpha val="38000"/>
+              </a:srgbClr>
+            </a:outerShdw>
+          </a:effectLst>
+        </a:effectStyle>
+        <a:effectStyle>
+          <a:effectLst>
+            <a:outerShdw blurRad="40000" dist="23000" dir="5400000" rotWithShape="0">
+              <a:srgbClr val="000000">
+                <a:alpha val="35000"/>
+              </a:srgbClr>
+            </a:outerShdw>
+          </a:effectLst>
+        </a:effectStyle>
+        <a:effectStyle>
+          <a:effectLst>
+            <a:outerShdw blurRad="40000" dist="23000" dir="5400000" rotWithShape="0">
+              <a:srgbClr val="000000">
+                <a:alpha val="35000"/>
+              </a:srgbClr>
+            </a:outerShdw>
+          </a:effectLst>
+          <a:scene3d>
+            <a:camera prst="orthographicFront">
+              <a:rot lat="0" lon="0" rev="0"/>
+            </a:camera>
+            <a:lightRig rig="threePt" dir="t">
+              <a:rot lat="0" lon="0" rev="1200000"/>
+            </a:lightRig>
+          </a:scene3d>
+          <a:sp3d>
+            <a:bevelT w="63500" h="25400"/>
+          </a:sp3d>
+        </a:effectStyle>
+      </a:effectStyleLst>
+      <a:bgFillStyleLst>
+        <a:solidFill>
+          <a:schemeClr val="phClr"/>
+        </a:solidFill>
+        <a:gradFill rotWithShape="1">
+          <a:gsLst>
+            <a:gs pos="0">
+              <a:schemeClr val="phClr">
+                <a:tint val="40000"/>
+                <a:satMod val="350000"/>
+              </a:schemeClr>
+            </a:gs>
+            <a:gs pos="40000">
+              <a:schemeClr val="phClr">
+                <a:tint val="45000"/>
+                <a:shade val="99000"/>
+                <a:satMod val="350000"/>
+              </a:schemeClr>
+            </a:gs>
+            <a:gs pos="100000">
+              <a:schemeClr val="phClr">
+                <a:shade val="20000"/>
+                <a:satMod val="255000"/>
+              </a:schemeClr>
+            </a:gs>
+          </a:gsLst>
+          <a:path path="circle">
+            <a:fillToRect l="50000" t="-80000" r="50000" b="180000"/>
+          </a:path>
+        </a:gradFill>
+        <a:gradFill rotWithShape="1">
+          <a:gsLst>
+            <a:gs pos="0">
+              <a:schemeClr val="phClr">
+                <a:tint val="80000"/>
+                <a:satMod val="300000"/>
+              </a:schemeClr>
+            </a:gs>
+            <a:gs pos="100000">
+              <a:schemeClr val="phClr">
+                <a:shade val="30000"/>
+                <a:satMod val="200000"/>
+              </a:schemeClr>
+            </a:gs>
+          </a:gsLst>
+          <a:path path="circle">
+            <a:fillToRect l="50000" t="50000" r="50000" b="50000"/>
+          </a:path>
+        </a:gradFill>
+      </a:bgFillStyleLst>
+    </a:fmtScheme>
+  </a:themeElements>
+  <a:objectDefaults>
+    <a:spDef>
+      <a:spPr/>
+      <a:bodyPr/>
+      <a:lstStyle/>
+      <a:style>
+        <a:lnRef idx="1">
+          <a:schemeClr val="accent1"/>
+        </a:lnRef>
+        <a:fillRef idx="3">
+          <a:schemeClr val="accent1"/>
+        </a:fillRef>
+        <a:effectRef idx="2">
+          <a:schemeClr val="accent1"/>
+        </a:effectRef>
+        <a:fontRef idx="minor">
+          <a:schemeClr val="lt1"/>
+        </a:fontRef>
+      </a:style>
+    </a:spDef>
+    <a:lnDef>
+      <a:spPr/>
+      <a:bodyPr/>
+      <a:lstStyle/>
+      <a:style>
+        <a:lnRef idx="2">
+          <a:schemeClr val="accent1"/>
+        </a:lnRef>
+        <a:fillRef idx="0">
+          <a:schemeClr val="accent1"/>
+        </a:fillRef>
+        <a:effectRef idx="1">
+          <a:schemeClr val="accent1"/>
+        </a:effectRef>
+        <a:fontRef idx="minor">
+          <a:schemeClr val="tx1"/>
+        </a:fontRef>
+      </a:style>
+    </a:lnDef>
+  </a:objectDefaults>
+  <a:extraClrSchemeLst/>
+</a:theme>
 </file>
--- a/protected-downloads/praesentation/M04.pptx
+++ b/protected-downloads/praesentation/M04.pptx
@@ -8,13 +8,14 @@
     <p:sldId id="256" r:id="rId7"/>
     <p:sldId id="257" r:id="rId8"/>
     <p:sldId id="258" r:id="rId9"/>
-    <p:sldId id="259" r:id="rId11"/>
+    <p:sldId id="259" r:id="rId10"/>
     <p:sldId id="260" r:id="rId12"/>
     <p:sldId id="261" r:id="rId13"/>
     <p:sldId id="262" r:id="rId14"/>
     <p:sldId id="263" r:id="rId15"/>
     <p:sldId id="264" r:id="rId16"/>
     <p:sldId id="265" r:id="rId17"/>
+    <p:sldId id="266" r:id="rId18"/>
   </p:sldIdLst>
   <p:sldSz cx="12188952" cy="6858000" type="screen4x3"/>
   <p:notesSz cx="6858000" cy="9144000"/>
@@ -4507,6 +4508,360 @@
             <a:avLst/>
           </a:prstGeom>
           <a:solidFill>
+            <a:srgbClr val="FFFFFF"/>
+          </a:solidFill>
+          <a:ln>
+            <a:noFill/>
+          </a:ln>
+        </p:spPr>
+        <p:style>
+          <a:lnRef idx="1">
+            <a:schemeClr val="accent1"/>
+          </a:lnRef>
+          <a:fillRef idx="3">
+            <a:schemeClr val="accent1"/>
+          </a:fillRef>
+          <a:effectRef idx="2">
+            <a:schemeClr val="accent1"/>
+          </a:effectRef>
+          <a:fontRef idx="minor">
+            <a:schemeClr val="lt1"/>
+          </a:fontRef>
+        </p:style>
+        <p:txBody>
+          <a:bodyPr rtlCol="0" anchor="ctr"/>
+          <a:lstStyle/>
+          <a:p>
+            <a:pPr algn="ctr"/>
+          </a:p>
+        </p:txBody>
+      </p:sp>
+      <p:sp>
+        <p:nvSpPr>
+          <p:cNvPr id="3" name="Rectangle 2"/>
+          <p:cNvSpPr/>
+          <p:nvPr/>
+        </p:nvSpPr>
+        <p:spPr>
+          <a:xfrm>
+            <a:off x="0" y="0"/>
+            <a:ext cx="12188952" cy="50292"/>
+          </a:xfrm>
+          <a:prstGeom prst="rect">
+            <a:avLst/>
+          </a:prstGeom>
+          <a:solidFill>
+            <a:srgbClr val="1F2C56"/>
+          </a:solidFill>
+          <a:ln>
+            <a:noFill/>
+          </a:ln>
+        </p:spPr>
+        <p:style>
+          <a:lnRef idx="1">
+            <a:schemeClr val="accent1"/>
+          </a:lnRef>
+          <a:fillRef idx="3">
+            <a:schemeClr val="accent1"/>
+          </a:fillRef>
+          <a:effectRef idx="2">
+            <a:schemeClr val="accent1"/>
+          </a:effectRef>
+          <a:fontRef idx="minor">
+            <a:schemeClr val="lt1"/>
+          </a:fontRef>
+        </p:style>
+        <p:txBody>
+          <a:bodyPr rtlCol="0" anchor="ctr"/>
+          <a:lstStyle/>
+          <a:p>
+            <a:pPr algn="ctr"/>
+          </a:p>
+        </p:txBody>
+      </p:sp>
+      <p:sp>
+        <p:nvSpPr>
+          <p:cNvPr id="4" name="TextBox 3"/>
+          <p:cNvSpPr txBox="1"/>
+          <p:nvPr/>
+        </p:nvSpPr>
+        <p:spPr>
+          <a:xfrm>
+            <a:off x="685800" y="109728"/>
+            <a:ext cx="10817352" cy="228600"/>
+          </a:xfrm>
+          <a:prstGeom prst="rect">
+            <a:avLst/>
+          </a:prstGeom>
+          <a:noFill/>
+        </p:spPr>
+        <p:txBody>
+          <a:bodyPr wrap="none">
+            <a:spAutoFit/>
+          </a:bodyPr>
+          <a:lstStyle/>
+          <a:p>
+            <a:pPr algn="l"/>
+            <a:r>
+              <a:rPr sz="750">
+                <a:solidFill>
+                  <a:srgbClr val="78808C"/>
+                </a:solidFill>
+                <a:latin typeface="JetBrains Mono"/>
+              </a:rPr>
+              <a:t>M04  ·  SCHAUBILD</a:t>
+            </a:r>
+          </a:p>
+        </p:txBody>
+      </p:sp>
+      <p:sp>
+        <p:nvSpPr>
+          <p:cNvPr id="5" name="TextBox 4"/>
+          <p:cNvSpPr txBox="1"/>
+          <p:nvPr/>
+        </p:nvSpPr>
+        <p:spPr>
+          <a:xfrm>
+            <a:off x="685800" y="502920"/>
+            <a:ext cx="10817352" cy="594360"/>
+          </a:xfrm>
+          <a:prstGeom prst="rect">
+            <a:avLst/>
+          </a:prstGeom>
+          <a:noFill/>
+        </p:spPr>
+        <p:txBody>
+          <a:bodyPr wrap="square">
+            <a:spAutoFit/>
+          </a:bodyPr>
+          <a:lstStyle/>
+          <a:p>
+            <a:pPr algn="l"/>
+            <a:r>
+              <a:rPr sz="2000" b="1" i="0">
+                <a:solidFill>
+                  <a:srgbClr val="1F2C56"/>
+                </a:solidFill>
+                <a:latin typeface="Source Serif 4"/>
+              </a:rPr>
+              <a:t>Handlungsempfehlung Wenn-Dann</a:t>
+            </a:r>
+          </a:p>
+        </p:txBody>
+      </p:sp>
+      <p:sp>
+        <p:nvSpPr>
+          <p:cNvPr id="6" name="Rectangle 5"/>
+          <p:cNvSpPr/>
+          <p:nvPr/>
+        </p:nvSpPr>
+        <p:spPr>
+          <a:xfrm>
+            <a:off x="685800" y="1143000"/>
+            <a:ext cx="10817352" cy="25400"/>
+          </a:xfrm>
+          <a:prstGeom prst="rect">
+            <a:avLst/>
+          </a:prstGeom>
+          <a:solidFill>
+            <a:srgbClr val="D9C089"/>
+          </a:solidFill>
+          <a:ln>
+            <a:noFill/>
+          </a:ln>
+        </p:spPr>
+        <p:style>
+          <a:lnRef idx="1">
+            <a:schemeClr val="accent1"/>
+          </a:lnRef>
+          <a:fillRef idx="3">
+            <a:schemeClr val="accent1"/>
+          </a:fillRef>
+          <a:effectRef idx="2">
+            <a:schemeClr val="accent1"/>
+          </a:effectRef>
+          <a:fontRef idx="minor">
+            <a:schemeClr val="lt1"/>
+          </a:fontRef>
+        </p:style>
+        <p:txBody>
+          <a:bodyPr rtlCol="0" anchor="ctr"/>
+          <a:lstStyle/>
+          <a:p>
+            <a:pPr algn="ctr"/>
+          </a:p>
+        </p:txBody>
+      </p:sp>
+      <p:pic>
+        <p:nvPicPr>
+          <p:cNvPr id="7" name="Picture 6" descr="image.png"/>
+          <p:cNvPicPr>
+            <a:picLocks noChangeAspect="1"/>
+          </p:cNvPicPr>
+          <p:nvPr/>
+        </p:nvPicPr>
+        <p:blipFill>
+          <a:blip r:embed="rId2"/>
+          <a:stretch>
+            <a:fillRect/>
+          </a:stretch>
+        </p:blipFill>
+        <p:spPr>
+          <a:xfrm>
+            <a:off x="2303489" y="1325880"/>
+            <a:ext cx="7581973" cy="4937760"/>
+          </a:xfrm>
+          <a:prstGeom prst="rect">
+            <a:avLst/>
+          </a:prstGeom>
+        </p:spPr>
+      </p:pic>
+      <p:sp>
+        <p:nvSpPr>
+          <p:cNvPr id="8" name="Rectangle 7"/>
+          <p:cNvSpPr/>
+          <p:nvPr/>
+        </p:nvSpPr>
+        <p:spPr>
+          <a:xfrm>
+            <a:off x="0" y="6510528"/>
+            <a:ext cx="12188952" cy="347472"/>
+          </a:xfrm>
+          <a:prstGeom prst="rect">
+            <a:avLst/>
+          </a:prstGeom>
+          <a:solidFill>
+            <a:srgbClr val="0A1937"/>
+          </a:solidFill>
+          <a:ln>
+            <a:noFill/>
+          </a:ln>
+        </p:spPr>
+        <p:style>
+          <a:lnRef idx="1">
+            <a:schemeClr val="accent1"/>
+          </a:lnRef>
+          <a:fillRef idx="3">
+            <a:schemeClr val="accent1"/>
+          </a:fillRef>
+          <a:effectRef idx="2">
+            <a:schemeClr val="accent1"/>
+          </a:effectRef>
+          <a:fontRef idx="minor">
+            <a:schemeClr val="lt1"/>
+          </a:fontRef>
+        </p:style>
+        <p:txBody>
+          <a:bodyPr rtlCol="0" anchor="ctr"/>
+          <a:lstStyle/>
+          <a:p>
+            <a:pPr algn="ctr"/>
+          </a:p>
+        </p:txBody>
+      </p:sp>
+      <p:sp>
+        <p:nvSpPr>
+          <p:cNvPr id="9" name="TextBox 8"/>
+          <p:cNvSpPr txBox="1"/>
+          <p:nvPr/>
+        </p:nvSpPr>
+        <p:spPr>
+          <a:xfrm>
+            <a:off x="685800" y="6583680"/>
+            <a:ext cx="6490411" cy="256032"/>
+          </a:xfrm>
+          <a:prstGeom prst="rect">
+            <a:avLst/>
+          </a:prstGeom>
+          <a:noFill/>
+        </p:spPr>
+        <p:txBody>
+          <a:bodyPr wrap="none">
+            <a:spAutoFit/>
+          </a:bodyPr>
+          <a:lstStyle/>
+          <a:p>
+            <a:pPr algn="l"/>
+            <a:r>
+              <a:rPr sz="700">
+                <a:solidFill>
+                  <a:srgbClr val="A0B4D2"/>
+                </a:solidFill>
+                <a:latin typeface="JetBrains Mono"/>
+              </a:rPr>
+              <a:t>Benedikt Zoller Coaching  ·  FKB Campus  ·  M04</a:t>
+            </a:r>
+          </a:p>
+        </p:txBody>
+      </p:sp>
+      <p:sp>
+        <p:nvSpPr>
+          <p:cNvPr id="10" name="TextBox 9"/>
+          <p:cNvSpPr txBox="1"/>
+          <p:nvPr/>
+        </p:nvSpPr>
+        <p:spPr>
+          <a:xfrm>
+            <a:off x="7176211" y="6583680"/>
+            <a:ext cx="4326940" cy="256032"/>
+          </a:xfrm>
+          <a:prstGeom prst="rect">
+            <a:avLst/>
+          </a:prstGeom>
+          <a:noFill/>
+        </p:spPr>
+        <p:txBody>
+          <a:bodyPr wrap="none">
+            <a:spAutoFit/>
+          </a:bodyPr>
+          <a:lstStyle/>
+          <a:p>
+            <a:pPr algn="r"/>
+            <a:r>
+              <a:rPr sz="700">
+                <a:solidFill>
+                  <a:srgbClr val="A0B4D2"/>
+                </a:solidFill>
+                <a:latin typeface="JetBrains Mono"/>
+              </a:rPr>
+              <a:t>Schaubild</a:t>
+            </a:r>
+          </a:p>
+        </p:txBody>
+      </p:sp>
+    </p:spTree>
+  </p:cSld>
+  <p:clrMapOvr>
+    <a:masterClrMapping/>
+  </p:clrMapOvr>
+</p:sld>
+</file>
+
+<file path=ppt/slides/slide11.xml><?xml version="1.0" encoding="utf-8"?>
+<p:sld xmlns:a="http://schemas.openxmlformats.org/drawingml/2006/main" xmlns:p="http://schemas.openxmlformats.org/presentationml/2006/main" xmlns:r="http://schemas.openxmlformats.org/officeDocument/2006/relationships">
+  <p:cSld>
+    <p:spTree>
+      <p:nvGrpSpPr>
+        <p:cNvPr id="1" name=""/>
+        <p:cNvGrpSpPr/>
+        <p:nvPr/>
+      </p:nvGrpSpPr>
+      <p:grpSpPr/>
+      <p:sp>
+        <p:nvSpPr>
+          <p:cNvPr id="2" name="Rectangle 1"/>
+          <p:cNvSpPr/>
+          <p:nvPr/>
+        </p:nvSpPr>
+        <p:spPr>
+          <a:xfrm>
+            <a:off x="0" y="0"/>
+            <a:ext cx="12188952" cy="6858000"/>
+          </a:xfrm>
+          <a:prstGeom prst="rect">
+            <a:avLst/>
+          </a:prstGeom>
+          <a:solidFill>
             <a:srgbClr val="EDEDF3"/>
           </a:solidFill>
           <a:ln>
@@ -5142,7 +5497,7 @@
                 </a:solidFill>
                 <a:latin typeface="JetBrains Mono"/>
               </a:rPr>
-              <a:t>LERNZIELE  ·  M04</a:t>
+              <a:t>ÜBERBLICK  ·  M04</a:t>
             </a:r>
           </a:p>
         </p:txBody>
@@ -5220,7 +5575,7 @@
                 </a:solidFill>
                 <a:latin typeface="Source Serif 4"/>
               </a:rPr>
-              <a:t>Was Sie heute mitnehmen</a:t>
+              <a:t>Worum geht es heute</a:t>
             </a:r>
           </a:p>
         </p:txBody>
@@ -5233,8 +5588,8 @@
         </p:nvSpPr>
         <p:spPr>
           <a:xfrm>
-            <a:off x="685800" y="1371600"/>
-            <a:ext cx="10817352" cy="5120640"/>
+            <a:off x="685800" y="1737360"/>
+            <a:ext cx="9720072" cy="4206240"/>
           </a:xfrm>
           <a:prstGeom prst="rect">
             <a:avLst/>
@@ -5248,78 +5603,50 @@
           <a:lstStyle/>
           <a:p>
             <a:pPr>
-              <a:spcBef>
-                <a:spcPts val="800"/>
-              </a:spcBef>
               <a:spcAft>
-                <a:spcPts val="200"/>
+                <a:spcPts val="1200"/>
               </a:spcAft>
             </a:pPr>
             <a:r>
-              <a:rPr sz="1400">
+              <a:rPr sz="1700">
                 <a:solidFill>
                   <a:srgbClr val="3D5466"/>
                 </a:solidFill>
                 <a:latin typeface="Arial"/>
               </a:rPr>
-              <a:t>▸  Die drei Kreditrisikoarten (Ausfall, Migration, Konzentration) benennen und Praxisbeispiele nennen</a:t>
+              <a:t>Kreditausfälle kündigen sich an – oft Monate vorher, in Zahlen und Verhalten.</a:t>
             </a:r>
           </a:p>
           <a:p>
             <a:pPr>
-              <a:spcBef>
-                <a:spcPts val="800"/>
-              </a:spcBef>
               <a:spcAft>
-                <a:spcPts val="200"/>
+                <a:spcPts val="1200"/>
               </a:spcAft>
             </a:pPr>
             <a:r>
-              <a:rPr sz="1400">
+              <a:rPr sz="1700">
                 <a:solidFill>
                   <a:srgbClr val="3D5466"/>
                 </a:solidFill>
                 <a:latin typeface="Arial"/>
               </a:rPr>
-              <a:t>▸  Quantitative und qualitative Frühwarnindikatoren unterscheiden und konkreten Signalen zuordnen</a:t>
+              <a:t>Sie lernen die wichtigsten Frühwarnsignale systematisch zu erkennen und mit einer Ampellogik zu bewerten.</a:t>
             </a:r>
           </a:p>
           <a:p>
             <a:pPr>
-              <a:spcBef>
-                <a:spcPts val="800"/>
-              </a:spcBef>
               <a:spcAft>
-                <a:spcPts val="200"/>
+                <a:spcPts val="1200"/>
               </a:spcAft>
             </a:pPr>
             <a:r>
-              <a:rPr sz="1400">
+              <a:rPr sz="1700">
                 <a:solidFill>
                   <a:srgbClr val="3D5466"/>
                 </a:solidFill>
                 <a:latin typeface="Arial"/>
               </a:rPr>
-              <a:t>▸  Die Ampel-Checkliste auf einen Praxisfall anwenden und den Kunden einer Risikoklasse zuordnen</a:t>
-            </a:r>
-          </a:p>
-          <a:p>
-            <a:pPr>
-              <a:spcBef>
-                <a:spcPts val="800"/>
-              </a:spcBef>
-              <a:spcAft>
-                <a:spcPts val="200"/>
-              </a:spcAft>
-            </a:pPr>
-            <a:r>
-              <a:rPr sz="1400">
-                <a:solidFill>
-                  <a:srgbClr val="3D5466"/>
-                </a:solidFill>
-                <a:latin typeface="Arial"/>
-              </a:rPr>
-              <a:t>▸  Kontokorrentbewegungen und Kennzahlenentwicklungen analysieren und das dominante Risikosignal sowie den Eskalationspfad identifizieren</a:t>
+              <a:t>Danach identifizieren Sie gefährdete Engagements frühzeitig und dokumentieren Ihre Einschätzung MaRisk-konform.</a:t>
             </a:r>
           </a:p>
         </p:txBody>
@@ -5536,7 +5863,7 @@
                 </a:solidFill>
                 <a:latin typeface="JetBrains Mono"/>
               </a:rPr>
-              <a:t>M04  ·  INHALT</a:t>
+              <a:t>LERNZIELE  ·  M04</a:t>
             </a:r>
           </a:p>
         </p:txBody>
@@ -5586,57 +5913,14 @@
       </p:sp>
       <p:sp>
         <p:nvSpPr>
-          <p:cNvPr id="6" name="Rectangle 5"/>
-          <p:cNvSpPr/>
+          <p:cNvPr id="6" name="TextBox 5"/>
+          <p:cNvSpPr txBox="1"/>
           <p:nvPr/>
         </p:nvSpPr>
         <p:spPr>
           <a:xfrm>
             <a:off x="685800" y="502920"/>
-            <a:ext cx="36576" cy="658368"/>
-          </a:xfrm>
-          <a:prstGeom prst="rect">
-            <a:avLst/>
-          </a:prstGeom>
-          <a:solidFill>
-            <a:srgbClr val="D9C089"/>
-          </a:solidFill>
-          <a:ln>
-            <a:noFill/>
-          </a:ln>
-        </p:spPr>
-        <p:style>
-          <a:lnRef idx="1">
-            <a:schemeClr val="accent1"/>
-          </a:lnRef>
-          <a:fillRef idx="3">
-            <a:schemeClr val="accent1"/>
-          </a:fillRef>
-          <a:effectRef idx="2">
-            <a:schemeClr val="accent1"/>
-          </a:effectRef>
-          <a:fontRef idx="minor">
-            <a:schemeClr val="lt1"/>
-          </a:fontRef>
-        </p:style>
-        <p:txBody>
-          <a:bodyPr rtlCol="0" anchor="ctr"/>
-          <a:lstStyle/>
-          <a:p>
-            <a:pPr algn="ctr"/>
-          </a:p>
-        </p:txBody>
-      </p:sp>
-      <p:sp>
-        <p:nvSpPr>
-          <p:cNvPr id="7" name="TextBox 6"/>
-          <p:cNvSpPr txBox="1"/>
-          <p:nvPr/>
-        </p:nvSpPr>
-        <p:spPr>
-          <a:xfrm>
-            <a:off x="813816" y="502920"/>
-            <a:ext cx="10634472" cy="685800"/>
+            <a:ext cx="10817352" cy="658368"/>
           </a:xfrm>
           <a:prstGeom prst="rect">
             <a:avLst/>
@@ -5651,27 +5935,27 @@
           <a:p>
             <a:pPr algn="l"/>
             <a:r>
-              <a:rPr sz="2400" b="1" i="0">
+              <a:rPr sz="2600" b="1" i="0">
                 <a:solidFill>
                   <a:srgbClr val="1F2C56"/>
                 </a:solidFill>
                 <a:latin typeface="Source Serif 4"/>
               </a:rPr>
-              <a:t>Kreditrisiko – Grundbegriffe und Bedeutung für den Berater</a:t>
-            </a:r>
-          </a:p>
-        </p:txBody>
-      </p:sp>
-      <p:sp>
-        <p:nvSpPr>
-          <p:cNvPr id="8" name="TextBox 7"/>
+              <a:t>Was Sie heute mitnehmen</a:t>
+            </a:r>
+          </a:p>
+        </p:txBody>
+      </p:sp>
+      <p:sp>
+        <p:nvSpPr>
+          <p:cNvPr id="7" name="TextBox 6"/>
           <p:cNvSpPr txBox="1"/>
           <p:nvPr/>
         </p:nvSpPr>
         <p:spPr>
           <a:xfrm>
-            <a:off x="685800" y="1417320"/>
-            <a:ext cx="10817352" cy="5029200"/>
+            <a:off x="685800" y="1371600"/>
+            <a:ext cx="10817352" cy="5120640"/>
           </a:xfrm>
           <a:prstGeom prst="rect">
             <a:avLst/>
@@ -5686,27 +5970,84 @@
           <a:p>
             <a:pPr>
               <a:spcBef>
-                <a:spcPts val="400"/>
+                <a:spcPts val="800"/>
               </a:spcBef>
               <a:spcAft>
                 <a:spcPts val="200"/>
               </a:spcAft>
             </a:pPr>
             <a:r>
-              <a:rPr sz="1200">
+              <a:rPr sz="1400">
                 <a:solidFill>
                   <a:srgbClr val="3D5466"/>
                 </a:solidFill>
                 <a:latin typeface="Arial"/>
               </a:rPr>
-              <a:t>Die drei Kreditrisikoarten:</a:t>
-            </a:r>
-          </a:p>
-        </p:txBody>
-      </p:sp>
-      <p:sp>
-        <p:nvSpPr>
-          <p:cNvPr id="9" name="Rectangle 8"/>
+              <a:t>▸  Die drei Kreditrisikoarten (Ausfall, Migration, Konzentration) benennen und Praxisbeispiele nennen</a:t>
+            </a:r>
+          </a:p>
+          <a:p>
+            <a:pPr>
+              <a:spcBef>
+                <a:spcPts val="800"/>
+              </a:spcBef>
+              <a:spcAft>
+                <a:spcPts val="200"/>
+              </a:spcAft>
+            </a:pPr>
+            <a:r>
+              <a:rPr sz="1400">
+                <a:solidFill>
+                  <a:srgbClr val="3D5466"/>
+                </a:solidFill>
+                <a:latin typeface="Arial"/>
+              </a:rPr>
+              <a:t>▸  Quantitative und qualitative Frühwarnindikatoren unterscheiden und konkreten Signalen zuordnen</a:t>
+            </a:r>
+          </a:p>
+          <a:p>
+            <a:pPr>
+              <a:spcBef>
+                <a:spcPts val="800"/>
+              </a:spcBef>
+              <a:spcAft>
+                <a:spcPts val="200"/>
+              </a:spcAft>
+            </a:pPr>
+            <a:r>
+              <a:rPr sz="1400">
+                <a:solidFill>
+                  <a:srgbClr val="3D5466"/>
+                </a:solidFill>
+                <a:latin typeface="Arial"/>
+              </a:rPr>
+              <a:t>▸  Die Ampel-Checkliste auf einen Praxisfall anwenden und den Kunden einer Risikoklasse zuordnen</a:t>
+            </a:r>
+          </a:p>
+          <a:p>
+            <a:pPr>
+              <a:spcBef>
+                <a:spcPts val="800"/>
+              </a:spcBef>
+              <a:spcAft>
+                <a:spcPts val="200"/>
+              </a:spcAft>
+            </a:pPr>
+            <a:r>
+              <a:rPr sz="1400">
+                <a:solidFill>
+                  <a:srgbClr val="3D5466"/>
+                </a:solidFill>
+                <a:latin typeface="Arial"/>
+              </a:rPr>
+              <a:t>▸  Kontokorrentbewegungen und Kennzahlenentwicklungen analysieren und das dominante Risikosignal sowie den Eskalationspfad identifizieren</a:t>
+            </a:r>
+          </a:p>
+        </p:txBody>
+      </p:sp>
+      <p:sp>
+        <p:nvSpPr>
+          <p:cNvPr id="8" name="Rectangle 7"/>
           <p:cNvSpPr/>
           <p:nvPr/>
         </p:nvSpPr>
@@ -5749,7 +6090,7 @@
       </p:sp>
       <p:sp>
         <p:nvSpPr>
-          <p:cNvPr id="10" name="TextBox 9"/>
+          <p:cNvPr id="9" name="TextBox 8"/>
           <p:cNvSpPr txBox="1"/>
           <p:nvPr/>
         </p:nvSpPr>
@@ -6037,7 +6378,7 @@
                 </a:solidFill>
                 <a:latin typeface="Source Serif 4"/>
               </a:rPr>
-              <a:t>Die vier Krisenphasen [Q-099]</a:t>
+              <a:t>Kreditrisiko – Grundbegriffe und Bedeutung für den Berater</a:t>
             </a:r>
           </a:p>
         </p:txBody>
@@ -6079,26 +6420,7 @@
                 </a:solidFill>
                 <a:latin typeface="Arial"/>
               </a:rPr>
-              <a:t>Nicht jede rote Ampel hat dieselbe Dringlichkeit. Das Krisenphasen-Modell hilft einzuordnen, wie weit ein Unternehmen bereits in die Krise gerutscht ist:</a:t>
-            </a:r>
-          </a:p>
-          <a:p>
-            <a:pPr>
-              <a:spcBef>
-                <a:spcPts val="600"/>
-              </a:spcBef>
-              <a:spcAft>
-                <a:spcPts val="200"/>
-              </a:spcAft>
-            </a:pPr>
-            <a:r>
-              <a:rPr sz="1200" i="1">
-                <a:solidFill>
-                  <a:srgbClr val="3D5466"/>
-                </a:solidFill>
-                <a:latin typeface="Arial"/>
-              </a:rPr>
-              <a:t>→  Merksatz: Die Ampel-Checkliste zeigt, wo das Signal liegt. Die Krisenphase zeigt, wie dringend gehandelt werden muss.</a:t>
+              <a:t>Die drei Kreditrisikoarten:</a:t>
             </a:r>
           </a:p>
         </p:txBody>
@@ -6436,7 +6758,7 @@
                 </a:solidFill>
                 <a:latin typeface="Source Serif 4"/>
               </a:rPr>
-              <a:t>Frühwarnindikatoren – Quantitativ und Qualitativ</a:t>
+              <a:t>Die vier Krisenphasen [Q-099]</a:t>
             </a:r>
           </a:p>
         </p:txBody>
@@ -6478,64 +6800,7 @@
                 </a:solidFill>
                 <a:latin typeface="Arial"/>
               </a:rPr>
-              <a:t>Frühwarnindikatoren lassen sich in zwei komplementäre Kategorien einteilen :</a:t>
-            </a:r>
-          </a:p>
-          <a:p>
-            <a:pPr>
-              <a:spcBef>
-                <a:spcPts val="400"/>
-              </a:spcBef>
-              <a:spcAft>
-                <a:spcPts val="200"/>
-              </a:spcAft>
-            </a:pPr>
-            <a:r>
-              <a:rPr sz="1200">
-                <a:solidFill>
-                  <a:srgbClr val="3D5466"/>
-                </a:solidFill>
-                <a:latin typeface="Arial"/>
-              </a:rPr>
-              <a:t>Quantitative Indikatoren (aus Jahresabschluss und BWA):</a:t>
-            </a:r>
-          </a:p>
-          <a:p>
-            <a:pPr>
-              <a:spcBef>
-                <a:spcPts val="400"/>
-              </a:spcBef>
-              <a:spcAft>
-                <a:spcPts val="200"/>
-              </a:spcAft>
-            </a:pPr>
-            <a:r>
-              <a:rPr sz="1200">
-                <a:solidFill>
-                  <a:srgbClr val="3D5466"/>
-                </a:solidFill>
-                <a:latin typeface="Arial"/>
-              </a:rPr>
-              <a:t>NFK = verzinsliches Fremdkapital abzüglich liquide Mittel</a:t>
-            </a:r>
-          </a:p>
-          <a:p>
-            <a:pPr>
-              <a:spcBef>
-                <a:spcPts val="400"/>
-              </a:spcBef>
-              <a:spcAft>
-                <a:spcPts val="200"/>
-              </a:spcAft>
-            </a:pPr>
-            <a:r>
-              <a:rPr sz="1200">
-                <a:solidFill>
-                  <a:srgbClr val="3D5466"/>
-                </a:solidFill>
-                <a:latin typeface="Arial"/>
-              </a:rPr>
-              <a:t>Qualitative Indikatoren (aus Kundengespräch und Marktbeobachtung):</a:t>
+              <a:t>Nicht jede rote Ampel hat dieselbe Dringlichkeit. Das Krisenphasen-Modell hilft einzuordnen, wie weit ein Unternehmen bereits in die Krise gerutscht ist:</a:t>
             </a:r>
           </a:p>
           <a:p>
@@ -6554,7 +6819,7 @@
                 </a:solidFill>
                 <a:latin typeface="Arial"/>
               </a:rPr>
-              <a:t>→  Merksatz: Qualitative Signale gehen quantitativen häufig 6–12 Monate voraus . Wer nur auf Zahlen wartet, reagiert zu spät.</a:t>
+              <a:t>→  Merksatz: Die Ampel-Checkliste zeigt, wo das Signal liegt. Die Krisenphase zeigt, wie dringend gehandelt werden muss.</a:t>
             </a:r>
           </a:p>
         </p:txBody>
@@ -6892,7 +7157,7 @@
                 </a:solidFill>
                 <a:latin typeface="Source Serif 4"/>
               </a:rPr>
-              <a:t>Ampel-Checkliste: Gesamtbewertung Kreditrisiko</a:t>
+              <a:t>Frühwarnindikatoren – Quantitativ und Qualitativ</a:t>
             </a:r>
           </a:p>
         </p:txBody>
@@ -6934,7 +7199,64 @@
                 </a:solidFill>
                 <a:latin typeface="Arial"/>
               </a:rPr>
-              <a:t>Anleitung: Bewerten Sie jeden Indikator mit Grün (0 Punkte), Gelb (1 Punkt) oder Rot (2 Punkte).</a:t>
+              <a:t>Frühwarnindikatoren lassen sich in zwei komplementäre Kategorien einteilen :</a:t>
+            </a:r>
+          </a:p>
+          <a:p>
+            <a:pPr>
+              <a:spcBef>
+                <a:spcPts val="400"/>
+              </a:spcBef>
+              <a:spcAft>
+                <a:spcPts val="200"/>
+              </a:spcAft>
+            </a:pPr>
+            <a:r>
+              <a:rPr sz="1200">
+                <a:solidFill>
+                  <a:srgbClr val="3D5466"/>
+                </a:solidFill>
+                <a:latin typeface="Arial"/>
+              </a:rPr>
+              <a:t>Quantitative Indikatoren (aus Jahresabschluss und BWA):</a:t>
+            </a:r>
+          </a:p>
+          <a:p>
+            <a:pPr>
+              <a:spcBef>
+                <a:spcPts val="400"/>
+              </a:spcBef>
+              <a:spcAft>
+                <a:spcPts val="200"/>
+              </a:spcAft>
+            </a:pPr>
+            <a:r>
+              <a:rPr sz="1200">
+                <a:solidFill>
+                  <a:srgbClr val="3D5466"/>
+                </a:solidFill>
+                <a:latin typeface="Arial"/>
+              </a:rPr>
+              <a:t>NFK = verzinsliches Fremdkapital abzüglich liquide Mittel</a:t>
+            </a:r>
+          </a:p>
+          <a:p>
+            <a:pPr>
+              <a:spcBef>
+                <a:spcPts val="400"/>
+              </a:spcBef>
+              <a:spcAft>
+                <a:spcPts val="200"/>
+              </a:spcAft>
+            </a:pPr>
+            <a:r>
+              <a:rPr sz="1200">
+                <a:solidFill>
+                  <a:srgbClr val="3D5466"/>
+                </a:solidFill>
+                <a:latin typeface="Arial"/>
+              </a:rPr>
+              <a:t>Qualitative Indikatoren (aus Kundengespräch und Marktbeobachtung):</a:t>
             </a:r>
           </a:p>
           <a:p>
@@ -6953,7 +7275,7 @@
                 </a:solidFill>
                 <a:latin typeface="Arial"/>
               </a:rPr>
-              <a:t>→  Einzel-Rot-Trigger: Bei Jahresabschluss-Verweigerung, laufendem Zinsverzug oder Kenntnis eines Insolvenzantrags → unabhängig vom Gesamtscore sofort eskalieren.</a:t>
+              <a:t>→  Merksatz: Qualitative Signale gehen quantitativen häufig 6–12 Monate voraus . Wer nur auf Zahlen wartet, reagiert zu spät.</a:t>
             </a:r>
           </a:p>
         </p:txBody>
@@ -7069,7 +7391,7 @@
             <a:avLst/>
           </a:prstGeom>
           <a:solidFill>
-            <a:srgbClr val="FFFFFF"/>
+            <a:srgbClr val="EDEDF3"/>
           </a:solidFill>
           <a:ln>
             <a:noFill/>
@@ -7170,43 +7492,51 @@
                 </a:solidFill>
                 <a:latin typeface="JetBrains Mono"/>
               </a:rPr>
-              <a:t>M04  ·  SCHAUBILD</a:t>
-            </a:r>
-          </a:p>
-        </p:txBody>
-      </p:sp>
-      <p:sp>
-        <p:nvSpPr>
-          <p:cNvPr id="5" name="TextBox 4"/>
-          <p:cNvSpPr txBox="1"/>
-          <p:nvPr/>
-        </p:nvSpPr>
-        <p:spPr>
-          <a:xfrm>
-            <a:off x="685800" y="502920"/>
-            <a:ext cx="10817352" cy="594360"/>
-          </a:xfrm>
-          <a:prstGeom prst="rect">
-            <a:avLst/>
-          </a:prstGeom>
-          <a:noFill/>
-        </p:spPr>
-        <p:txBody>
-          <a:bodyPr wrap="square">
-            <a:spAutoFit/>
-          </a:bodyPr>
-          <a:lstStyle/>
-          <a:p>
-            <a:pPr algn="l"/>
-            <a:r>
-              <a:rPr sz="2000" b="1" i="0">
-                <a:solidFill>
-                  <a:srgbClr val="1F2C56"/>
-                </a:solidFill>
-                <a:latin typeface="Source Serif 4"/>
-              </a:rPr>
-              <a:t>Frühwarn-Ampelkarte</a:t>
-            </a:r>
+              <a:t>M04  ·  INHALT</a:t>
+            </a:r>
+          </a:p>
+        </p:txBody>
+      </p:sp>
+      <p:sp>
+        <p:nvSpPr>
+          <p:cNvPr id="5" name="Rectangle 4"/>
+          <p:cNvSpPr/>
+          <p:nvPr/>
+        </p:nvSpPr>
+        <p:spPr>
+          <a:xfrm>
+            <a:off x="0" y="1234440"/>
+            <a:ext cx="12188952" cy="12700"/>
+          </a:xfrm>
+          <a:prstGeom prst="rect">
+            <a:avLst/>
+          </a:prstGeom>
+          <a:solidFill>
+            <a:srgbClr val="D8DFE4"/>
+          </a:solidFill>
+          <a:ln>
+            <a:noFill/>
+          </a:ln>
+        </p:spPr>
+        <p:style>
+          <a:lnRef idx="1">
+            <a:schemeClr val="accent1"/>
+          </a:lnRef>
+          <a:fillRef idx="3">
+            <a:schemeClr val="accent1"/>
+          </a:fillRef>
+          <a:effectRef idx="2">
+            <a:schemeClr val="accent1"/>
+          </a:effectRef>
+          <a:fontRef idx="minor">
+            <a:schemeClr val="lt1"/>
+          </a:fontRef>
+        </p:style>
+        <p:txBody>
+          <a:bodyPr rtlCol="0" anchor="ctr"/>
+          <a:lstStyle/>
+          <a:p>
+            <a:pPr algn="ctr"/>
           </a:p>
         </p:txBody>
       </p:sp>
@@ -7218,8 +7548,8 @@
         </p:nvSpPr>
         <p:spPr>
           <a:xfrm>
-            <a:off x="685800" y="1143000"/>
-            <a:ext cx="10817352" cy="25400"/>
+            <a:off x="685800" y="502920"/>
+            <a:ext cx="36576" cy="658368"/>
           </a:xfrm>
           <a:prstGeom prst="rect">
             <a:avLst/>
@@ -7253,33 +7583,105 @@
           </a:p>
         </p:txBody>
       </p:sp>
-      <p:pic>
-        <p:nvPicPr>
-          <p:cNvPr id="7" name="Picture 6" descr="image.png"/>
-          <p:cNvPicPr>
-            <a:picLocks noChangeAspect="1"/>
-          </p:cNvPicPr>
-          <p:nvPr/>
-        </p:nvPicPr>
-        <p:blipFill>
-          <a:blip r:embed="rId2"/>
-          <a:stretch>
-            <a:fillRect/>
-          </a:stretch>
-        </p:blipFill>
-        <p:spPr>
-          <a:xfrm>
-            <a:off x="2163921" y="1325880"/>
-            <a:ext cx="7861110" cy="4937760"/>
-          </a:xfrm>
-          <a:prstGeom prst="rect">
-            <a:avLst/>
-          </a:prstGeom>
-        </p:spPr>
-      </p:pic>
-      <p:sp>
-        <p:nvSpPr>
-          <p:cNvPr id="8" name="Rectangle 7"/>
+      <p:sp>
+        <p:nvSpPr>
+          <p:cNvPr id="7" name="TextBox 6"/>
+          <p:cNvSpPr txBox="1"/>
+          <p:nvPr/>
+        </p:nvSpPr>
+        <p:spPr>
+          <a:xfrm>
+            <a:off x="813816" y="502920"/>
+            <a:ext cx="10634472" cy="685800"/>
+          </a:xfrm>
+          <a:prstGeom prst="rect">
+            <a:avLst/>
+          </a:prstGeom>
+          <a:noFill/>
+        </p:spPr>
+        <p:txBody>
+          <a:bodyPr wrap="square">
+            <a:spAutoFit/>
+          </a:bodyPr>
+          <a:lstStyle/>
+          <a:p>
+            <a:pPr algn="l"/>
+            <a:r>
+              <a:rPr sz="2400" b="1" i="0">
+                <a:solidFill>
+                  <a:srgbClr val="1F2C56"/>
+                </a:solidFill>
+                <a:latin typeface="Source Serif 4"/>
+              </a:rPr>
+              <a:t>Ampel-Checkliste: Gesamtbewertung Kreditrisiko</a:t>
+            </a:r>
+          </a:p>
+        </p:txBody>
+      </p:sp>
+      <p:sp>
+        <p:nvSpPr>
+          <p:cNvPr id="8" name="TextBox 7"/>
+          <p:cNvSpPr txBox="1"/>
+          <p:nvPr/>
+        </p:nvSpPr>
+        <p:spPr>
+          <a:xfrm>
+            <a:off x="685800" y="1417320"/>
+            <a:ext cx="10817352" cy="5029200"/>
+          </a:xfrm>
+          <a:prstGeom prst="rect">
+            <a:avLst/>
+          </a:prstGeom>
+          <a:noFill/>
+        </p:spPr>
+        <p:txBody>
+          <a:bodyPr wrap="square">
+            <a:spAutoFit/>
+          </a:bodyPr>
+          <a:lstStyle/>
+          <a:p>
+            <a:pPr>
+              <a:spcBef>
+                <a:spcPts val="400"/>
+              </a:spcBef>
+              <a:spcAft>
+                <a:spcPts val="200"/>
+              </a:spcAft>
+            </a:pPr>
+            <a:r>
+              <a:rPr sz="1200">
+                <a:solidFill>
+                  <a:srgbClr val="3D5466"/>
+                </a:solidFill>
+                <a:latin typeface="Arial"/>
+              </a:rPr>
+              <a:t>Anleitung: Bewerten Sie jeden Indikator mit Grün (0 Punkte), Gelb (1 Punkt) oder Rot (2 Punkte).</a:t>
+            </a:r>
+          </a:p>
+          <a:p>
+            <a:pPr>
+              <a:spcBef>
+                <a:spcPts val="600"/>
+              </a:spcBef>
+              <a:spcAft>
+                <a:spcPts val="200"/>
+              </a:spcAft>
+            </a:pPr>
+            <a:r>
+              <a:rPr sz="1200" i="1">
+                <a:solidFill>
+                  <a:srgbClr val="3D5466"/>
+                </a:solidFill>
+                <a:latin typeface="Arial"/>
+              </a:rPr>
+              <a:t>→  Einzel-Rot-Trigger: Bei Jahresabschluss-Verweigerung, laufendem Zinsverzug oder Kenntnis eines Insolvenzantrags → unabhängig vom Gesamtscore sofort eskalieren.</a:t>
+            </a:r>
+          </a:p>
+        </p:txBody>
+      </p:sp>
+      <p:sp>
+        <p:nvSpPr>
+          <p:cNvPr id="9" name="Rectangle 8"/>
           <p:cNvSpPr/>
           <p:nvPr/>
         </p:nvSpPr>
@@ -7322,7 +7724,7 @@
       </p:sp>
       <p:sp>
         <p:nvSpPr>
-          <p:cNvPr id="9" name="TextBox 8"/>
+          <p:cNvPr id="10" name="TextBox 9"/>
           <p:cNvSpPr txBox="1"/>
           <p:nvPr/>
         </p:nvSpPr>
@@ -7351,41 +7753,6 @@
                 <a:latin typeface="JetBrains Mono"/>
               </a:rPr>
               <a:t>Benedikt Zoller Coaching  ·  FKB Campus  ·  M04</a:t>
-            </a:r>
-          </a:p>
-        </p:txBody>
-      </p:sp>
-      <p:sp>
-        <p:nvSpPr>
-          <p:cNvPr id="10" name="TextBox 9"/>
-          <p:cNvSpPr txBox="1"/>
-          <p:nvPr/>
-        </p:nvSpPr>
-        <p:spPr>
-          <a:xfrm>
-            <a:off x="7176211" y="6583680"/>
-            <a:ext cx="4326940" cy="256032"/>
-          </a:xfrm>
-          <a:prstGeom prst="rect">
-            <a:avLst/>
-          </a:prstGeom>
-          <a:noFill/>
-        </p:spPr>
-        <p:txBody>
-          <a:bodyPr wrap="none">
-            <a:spAutoFit/>
-          </a:bodyPr>
-          <a:lstStyle/>
-          <a:p>
-            <a:pPr algn="r"/>
-            <a:r>
-              <a:rPr sz="700">
-                <a:solidFill>
-                  <a:srgbClr val="A0B4D2"/>
-                </a:solidFill>
-                <a:latin typeface="JetBrains Mono"/>
-              </a:rPr>
-              <a:t>Schaubild</a:t>
             </a:r>
           </a:p>
         </p:txBody>
@@ -7423,7 +7790,7 @@
             <a:avLst/>
           </a:prstGeom>
           <a:solidFill>
-            <a:srgbClr val="EDEDF3"/>
+            <a:srgbClr val="FFFFFF"/>
           </a:solidFill>
           <a:ln>
             <a:noFill/>
@@ -7524,51 +7891,43 @@
                 </a:solidFill>
                 <a:latin typeface="JetBrains Mono"/>
               </a:rPr>
-              <a:t>M04  ·  INHALT</a:t>
-            </a:r>
-          </a:p>
-        </p:txBody>
-      </p:sp>
-      <p:sp>
-        <p:nvSpPr>
-          <p:cNvPr id="5" name="Rectangle 4"/>
-          <p:cNvSpPr/>
-          <p:nvPr/>
-        </p:nvSpPr>
-        <p:spPr>
-          <a:xfrm>
-            <a:off x="0" y="1234440"/>
-            <a:ext cx="12188952" cy="12700"/>
-          </a:xfrm>
-          <a:prstGeom prst="rect">
-            <a:avLst/>
-          </a:prstGeom>
-          <a:solidFill>
-            <a:srgbClr val="D8DFE4"/>
-          </a:solidFill>
-          <a:ln>
-            <a:noFill/>
-          </a:ln>
-        </p:spPr>
-        <p:style>
-          <a:lnRef idx="1">
-            <a:schemeClr val="accent1"/>
-          </a:lnRef>
-          <a:fillRef idx="3">
-            <a:schemeClr val="accent1"/>
-          </a:fillRef>
-          <a:effectRef idx="2">
-            <a:schemeClr val="accent1"/>
-          </a:effectRef>
-          <a:fontRef idx="minor">
-            <a:schemeClr val="lt1"/>
-          </a:fontRef>
-        </p:style>
-        <p:txBody>
-          <a:bodyPr rtlCol="0" anchor="ctr"/>
-          <a:lstStyle/>
-          <a:p>
-            <a:pPr algn="ctr"/>
+              <a:t>M04  ·  SCHAUBILD</a:t>
+            </a:r>
+          </a:p>
+        </p:txBody>
+      </p:sp>
+      <p:sp>
+        <p:nvSpPr>
+          <p:cNvPr id="5" name="TextBox 4"/>
+          <p:cNvSpPr txBox="1"/>
+          <p:nvPr/>
+        </p:nvSpPr>
+        <p:spPr>
+          <a:xfrm>
+            <a:off x="685800" y="502920"/>
+            <a:ext cx="10817352" cy="594360"/>
+          </a:xfrm>
+          <a:prstGeom prst="rect">
+            <a:avLst/>
+          </a:prstGeom>
+          <a:noFill/>
+        </p:spPr>
+        <p:txBody>
+          <a:bodyPr wrap="square">
+            <a:spAutoFit/>
+          </a:bodyPr>
+          <a:lstStyle/>
+          <a:p>
+            <a:pPr algn="l"/>
+            <a:r>
+              <a:rPr sz="2000" b="1" i="0">
+                <a:solidFill>
+                  <a:srgbClr val="1F2C56"/>
+                </a:solidFill>
+                <a:latin typeface="Source Serif 4"/>
+              </a:rPr>
+              <a:t>Frühwarn-Ampelkarte</a:t>
+            </a:r>
           </a:p>
         </p:txBody>
       </p:sp>
@@ -7580,8 +7939,8 @@
         </p:nvSpPr>
         <p:spPr>
           <a:xfrm>
-            <a:off x="685800" y="502920"/>
-            <a:ext cx="36576" cy="658368"/>
+            <a:off x="685800" y="1143000"/>
+            <a:ext cx="10817352" cy="25400"/>
           </a:xfrm>
           <a:prstGeom prst="rect">
             <a:avLst/>
@@ -7615,105 +7974,33 @@
           </a:p>
         </p:txBody>
       </p:sp>
-      <p:sp>
-        <p:nvSpPr>
-          <p:cNvPr id="7" name="TextBox 6"/>
-          <p:cNvSpPr txBox="1"/>
-          <p:nvPr/>
-        </p:nvSpPr>
-        <p:spPr>
-          <a:xfrm>
-            <a:off x="813816" y="502920"/>
-            <a:ext cx="10634472" cy="685800"/>
-          </a:xfrm>
-          <a:prstGeom prst="rect">
-            <a:avLst/>
-          </a:prstGeom>
-          <a:noFill/>
-        </p:spPr>
-        <p:txBody>
-          <a:bodyPr wrap="square">
-            <a:spAutoFit/>
-          </a:bodyPr>
-          <a:lstStyle/>
-          <a:p>
-            <a:pPr algn="l"/>
-            <a:r>
-              <a:rPr sz="2400" b="1" i="0">
-                <a:solidFill>
-                  <a:srgbClr val="1F2C56"/>
-                </a:solidFill>
-                <a:latin typeface="Source Serif 4"/>
-              </a:rPr>
-              <a:t>Eskalationspfade – Wer handelt wann?</a:t>
-            </a:r>
-          </a:p>
-        </p:txBody>
-      </p:sp>
-      <p:sp>
-        <p:nvSpPr>
-          <p:cNvPr id="8" name="TextBox 7"/>
-          <p:cNvSpPr txBox="1"/>
-          <p:nvPr/>
-        </p:nvSpPr>
-        <p:spPr>
-          <a:xfrm>
-            <a:off x="685800" y="1417320"/>
-            <a:ext cx="10817352" cy="5029200"/>
-          </a:xfrm>
-          <a:prstGeom prst="rect">
-            <a:avLst/>
-          </a:prstGeom>
-          <a:noFill/>
-        </p:spPr>
-        <p:txBody>
-          <a:bodyPr wrap="square">
-            <a:spAutoFit/>
-          </a:bodyPr>
-          <a:lstStyle/>
-          <a:p>
-            <a:pPr>
-              <a:spcBef>
-                <a:spcPts val="600"/>
-              </a:spcBef>
-              <a:spcAft>
-                <a:spcPts val="200"/>
-              </a:spcAft>
-            </a:pPr>
-            <a:r>
-              <a:rPr sz="1200" i="1">
-                <a:solidFill>
-                  <a:srgbClr val="3D5466"/>
-                </a:solidFill>
-                <a:latin typeface="Arial"/>
-              </a:rPr>
-              <a:t>→  Dokumentation in agree: Jeder Gelb- oder Rot-Befund wird im Risikovermerk dokumentiert: Datum, Indikator, Bewertung, nächste Maßnahme, Verantwortlicher. Das ist Revisionspflicht .</a:t>
-            </a:r>
-          </a:p>
-          <a:p>
-            <a:pPr>
-              <a:spcBef>
-                <a:spcPts val="400"/>
-              </a:spcBef>
-              <a:spcAft>
-                <a:spcPts val="200"/>
-              </a:spcAft>
-            </a:pPr>
-            <a:r>
-              <a:rPr sz="1200">
-                <a:solidFill>
-                  <a:srgbClr val="3D5466"/>
-                </a:solidFill>
-                <a:latin typeface="Arial"/>
-              </a:rPr>
-              <a:t>Die folgende Karte verknüpft die erkannten Risikosignale direkt mit konkreten Handlungsschritten und zeigt, wann welche Maßnahme angemessen ist.</a:t>
-            </a:r>
-          </a:p>
-        </p:txBody>
-      </p:sp>
-      <p:sp>
-        <p:nvSpPr>
-          <p:cNvPr id="9" name="Rectangle 8"/>
+      <p:pic>
+        <p:nvPicPr>
+          <p:cNvPr id="7" name="Picture 6" descr="image.png"/>
+          <p:cNvPicPr>
+            <a:picLocks noChangeAspect="1"/>
+          </p:cNvPicPr>
+          <p:nvPr/>
+        </p:nvPicPr>
+        <p:blipFill>
+          <a:blip r:embed="rId2"/>
+          <a:stretch>
+            <a:fillRect/>
+          </a:stretch>
+        </p:blipFill>
+        <p:spPr>
+          <a:xfrm>
+            <a:off x="2163921" y="1325880"/>
+            <a:ext cx="7861110" cy="4937760"/>
+          </a:xfrm>
+          <a:prstGeom prst="rect">
+            <a:avLst/>
+          </a:prstGeom>
+        </p:spPr>
+      </p:pic>
+      <p:sp>
+        <p:nvSpPr>
+          <p:cNvPr id="8" name="Rectangle 7"/>
           <p:cNvSpPr/>
           <p:nvPr/>
         </p:nvSpPr>
@@ -7756,7 +8043,7 @@
       </p:sp>
       <p:sp>
         <p:nvSpPr>
-          <p:cNvPr id="10" name="TextBox 9"/>
+          <p:cNvPr id="9" name="TextBox 8"/>
           <p:cNvSpPr txBox="1"/>
           <p:nvPr/>
         </p:nvSpPr>
@@ -7785,6 +8072,41 @@
                 <a:latin typeface="JetBrains Mono"/>
               </a:rPr>
               <a:t>Benedikt Zoller Coaching  ·  FKB Campus  ·  M04</a:t>
+            </a:r>
+          </a:p>
+        </p:txBody>
+      </p:sp>
+      <p:sp>
+        <p:nvSpPr>
+          <p:cNvPr id="10" name="TextBox 9"/>
+          <p:cNvSpPr txBox="1"/>
+          <p:nvPr/>
+        </p:nvSpPr>
+        <p:spPr>
+          <a:xfrm>
+            <a:off x="7176211" y="6583680"/>
+            <a:ext cx="4326940" cy="256032"/>
+          </a:xfrm>
+          <a:prstGeom prst="rect">
+            <a:avLst/>
+          </a:prstGeom>
+          <a:noFill/>
+        </p:spPr>
+        <p:txBody>
+          <a:bodyPr wrap="none">
+            <a:spAutoFit/>
+          </a:bodyPr>
+          <a:lstStyle/>
+          <a:p>
+            <a:pPr algn="r"/>
+            <a:r>
+              <a:rPr sz="700">
+                <a:solidFill>
+                  <a:srgbClr val="A0B4D2"/>
+                </a:solidFill>
+                <a:latin typeface="JetBrains Mono"/>
+              </a:rPr>
+              <a:t>Schaubild</a:t>
             </a:r>
           </a:p>
         </p:txBody>
@@ -7822,7 +8144,7 @@
             <a:avLst/>
           </a:prstGeom>
           <a:solidFill>
-            <a:srgbClr val="FFFFFF"/>
+            <a:srgbClr val="EDEDF3"/>
           </a:solidFill>
           <a:ln>
             <a:noFill/>
@@ -7923,43 +8245,51 @@
                 </a:solidFill>
                 <a:latin typeface="JetBrains Mono"/>
               </a:rPr>
-              <a:t>M04  ·  SCHAUBILD</a:t>
-            </a:r>
-          </a:p>
-        </p:txBody>
-      </p:sp>
-      <p:sp>
-        <p:nvSpPr>
-          <p:cNvPr id="5" name="TextBox 4"/>
-          <p:cNvSpPr txBox="1"/>
-          <p:nvPr/>
-        </p:nvSpPr>
-        <p:spPr>
-          <a:xfrm>
-            <a:off x="685800" y="502920"/>
-            <a:ext cx="10817352" cy="594360"/>
-          </a:xfrm>
-          <a:prstGeom prst="rect">
-            <a:avLst/>
-          </a:prstGeom>
-          <a:noFill/>
-        </p:spPr>
-        <p:txBody>
-          <a:bodyPr wrap="square">
-            <a:spAutoFit/>
-          </a:bodyPr>
-          <a:lstStyle/>
-          <a:p>
-            <a:pPr algn="l"/>
-            <a:r>
-              <a:rPr sz="2000" b="1" i="0">
-                <a:solidFill>
-                  <a:srgbClr val="1F2C56"/>
-                </a:solidFill>
-                <a:latin typeface="Source Serif 4"/>
-              </a:rPr>
-              <a:t>Handlungsempfehlung Wenn-Dann</a:t>
-            </a:r>
+              <a:t>M04  ·  INHALT</a:t>
+            </a:r>
+          </a:p>
+        </p:txBody>
+      </p:sp>
+      <p:sp>
+        <p:nvSpPr>
+          <p:cNvPr id="5" name="Rectangle 4"/>
+          <p:cNvSpPr/>
+          <p:nvPr/>
+        </p:nvSpPr>
+        <p:spPr>
+          <a:xfrm>
+            <a:off x="0" y="1234440"/>
+            <a:ext cx="12188952" cy="12700"/>
+          </a:xfrm>
+          <a:prstGeom prst="rect">
+            <a:avLst/>
+          </a:prstGeom>
+          <a:solidFill>
+            <a:srgbClr val="D8DFE4"/>
+          </a:solidFill>
+          <a:ln>
+            <a:noFill/>
+          </a:ln>
+        </p:spPr>
+        <p:style>
+          <a:lnRef idx="1">
+            <a:schemeClr val="accent1"/>
+          </a:lnRef>
+          <a:fillRef idx="3">
+            <a:schemeClr val="accent1"/>
+          </a:fillRef>
+          <a:effectRef idx="2">
+            <a:schemeClr val="accent1"/>
+          </a:effectRef>
+          <a:fontRef idx="minor">
+            <a:schemeClr val="lt1"/>
+          </a:fontRef>
+        </p:style>
+        <p:txBody>
+          <a:bodyPr rtlCol="0" anchor="ctr"/>
+          <a:lstStyle/>
+          <a:p>
+            <a:pPr algn="ctr"/>
           </a:p>
         </p:txBody>
       </p:sp>
@@ -7971,8 +8301,8 @@
         </p:nvSpPr>
         <p:spPr>
           <a:xfrm>
-            <a:off x="685800" y="1143000"/>
-            <a:ext cx="10817352" cy="25400"/>
+            <a:off x="685800" y="502920"/>
+            <a:ext cx="36576" cy="658368"/>
           </a:xfrm>
           <a:prstGeom prst="rect">
             <a:avLst/>
@@ -8006,33 +8336,105 @@
           </a:p>
         </p:txBody>
       </p:sp>
-      <p:pic>
-        <p:nvPicPr>
-          <p:cNvPr id="7" name="Picture 6" descr="image.png"/>
-          <p:cNvPicPr>
-            <a:picLocks noChangeAspect="1"/>
-          </p:cNvPicPr>
-          <p:nvPr/>
-        </p:nvPicPr>
-        <p:blipFill>
-          <a:blip r:embed="rId2"/>
-          <a:stretch>
-            <a:fillRect/>
-          </a:stretch>
-        </p:blipFill>
-        <p:spPr>
-          <a:xfrm>
-            <a:off x="2303489" y="1325880"/>
-            <a:ext cx="7581973" cy="4937760"/>
-          </a:xfrm>
-          <a:prstGeom prst="rect">
-            <a:avLst/>
-          </a:prstGeom>
-        </p:spPr>
-      </p:pic>
-      <p:sp>
-        <p:nvSpPr>
-          <p:cNvPr id="8" name="Rectangle 7"/>
+      <p:sp>
+        <p:nvSpPr>
+          <p:cNvPr id="7" name="TextBox 6"/>
+          <p:cNvSpPr txBox="1"/>
+          <p:nvPr/>
+        </p:nvSpPr>
+        <p:spPr>
+          <a:xfrm>
+            <a:off x="813816" y="502920"/>
+            <a:ext cx="10634472" cy="685800"/>
+          </a:xfrm>
+          <a:prstGeom prst="rect">
+            <a:avLst/>
+          </a:prstGeom>
+          <a:noFill/>
+        </p:spPr>
+        <p:txBody>
+          <a:bodyPr wrap="square">
+            <a:spAutoFit/>
+          </a:bodyPr>
+          <a:lstStyle/>
+          <a:p>
+            <a:pPr algn="l"/>
+            <a:r>
+              <a:rPr sz="2400" b="1" i="0">
+                <a:solidFill>
+                  <a:srgbClr val="1F2C56"/>
+                </a:solidFill>
+                <a:latin typeface="Source Serif 4"/>
+              </a:rPr>
+              <a:t>Eskalationspfade – Wer handelt wann?</a:t>
+            </a:r>
+          </a:p>
+        </p:txBody>
+      </p:sp>
+      <p:sp>
+        <p:nvSpPr>
+          <p:cNvPr id="8" name="TextBox 7"/>
+          <p:cNvSpPr txBox="1"/>
+          <p:nvPr/>
+        </p:nvSpPr>
+        <p:spPr>
+          <a:xfrm>
+            <a:off x="685800" y="1417320"/>
+            <a:ext cx="10817352" cy="5029200"/>
+          </a:xfrm>
+          <a:prstGeom prst="rect">
+            <a:avLst/>
+          </a:prstGeom>
+          <a:noFill/>
+        </p:spPr>
+        <p:txBody>
+          <a:bodyPr wrap="square">
+            <a:spAutoFit/>
+          </a:bodyPr>
+          <a:lstStyle/>
+          <a:p>
+            <a:pPr>
+              <a:spcBef>
+                <a:spcPts val="600"/>
+              </a:spcBef>
+              <a:spcAft>
+                <a:spcPts val="200"/>
+              </a:spcAft>
+            </a:pPr>
+            <a:r>
+              <a:rPr sz="1200" i="1">
+                <a:solidFill>
+                  <a:srgbClr val="3D5466"/>
+                </a:solidFill>
+                <a:latin typeface="Arial"/>
+              </a:rPr>
+              <a:t>→  Dokumentation in agree: Jeder Gelb- oder Rot-Befund wird im Risikovermerk dokumentiert: Datum, Indikator, Bewertung, nächste Maßnahme, Verantwortlicher. Das ist Revisionspflicht .</a:t>
+            </a:r>
+          </a:p>
+          <a:p>
+            <a:pPr>
+              <a:spcBef>
+                <a:spcPts val="400"/>
+              </a:spcBef>
+              <a:spcAft>
+                <a:spcPts val="200"/>
+              </a:spcAft>
+            </a:pPr>
+            <a:r>
+              <a:rPr sz="1200">
+                <a:solidFill>
+                  <a:srgbClr val="3D5466"/>
+                </a:solidFill>
+                <a:latin typeface="Arial"/>
+              </a:rPr>
+              <a:t>Die folgende Karte verknüpft die erkannten Risikosignale direkt mit konkreten Handlungsschritten und zeigt, wann welche Maßnahme angemessen ist.</a:t>
+            </a:r>
+          </a:p>
+        </p:txBody>
+      </p:sp>
+      <p:sp>
+        <p:nvSpPr>
+          <p:cNvPr id="9" name="Rectangle 8"/>
           <p:cNvSpPr/>
           <p:nvPr/>
         </p:nvSpPr>
@@ -8075,7 +8477,7 @@
       </p:sp>
       <p:sp>
         <p:nvSpPr>
-          <p:cNvPr id="9" name="TextBox 8"/>
+          <p:cNvPr id="10" name="TextBox 9"/>
           <p:cNvSpPr txBox="1"/>
           <p:nvPr/>
         </p:nvSpPr>
@@ -8104,41 +8506,6 @@
                 <a:latin typeface="JetBrains Mono"/>
               </a:rPr>
               <a:t>Benedikt Zoller Coaching  ·  FKB Campus  ·  M04</a:t>
-            </a:r>
-          </a:p>
-        </p:txBody>
-      </p:sp>
-      <p:sp>
-        <p:nvSpPr>
-          <p:cNvPr id="10" name="TextBox 9"/>
-          <p:cNvSpPr txBox="1"/>
-          <p:nvPr/>
-        </p:nvSpPr>
-        <p:spPr>
-          <a:xfrm>
-            <a:off x="7176211" y="6583680"/>
-            <a:ext cx="4326940" cy="256032"/>
-          </a:xfrm>
-          <a:prstGeom prst="rect">
-            <a:avLst/>
-          </a:prstGeom>
-          <a:noFill/>
-        </p:spPr>
-        <p:txBody>
-          <a:bodyPr wrap="none">
-            <a:spAutoFit/>
-          </a:bodyPr>
-          <a:lstStyle/>
-          <a:p>
-            <a:pPr algn="r"/>
-            <a:r>
-              <a:rPr sz="700">
-                <a:solidFill>
-                  <a:srgbClr val="A0B4D2"/>
-                </a:solidFill>
-                <a:latin typeface="JetBrains Mono"/>
-              </a:rPr>
-              <a:t>Schaubild</a:t>
             </a:r>
           </a:p>
         </p:txBody>

--- a/protected-downloads/praesentation/M04.pptx
+++ b/protected-downloads/praesentation/M04.pptx
@@ -16,6 +16,8 @@
     <p:sldId id="264" r:id="rId16"/>
     <p:sldId id="265" r:id="rId17"/>
     <p:sldId id="266" r:id="rId18"/>
+    <p:sldId id="267" r:id="rId19"/>
+    <p:sldId id="268" r:id="rId20"/>
   </p:sldIdLst>
   <p:sldSz cx="12188952" cy="6858000" type="screen4x3"/>
   <p:notesSz cx="6858000" cy="9144000"/>
@@ -512,7 +514,7 @@
           <a:lstStyle/>
           <a:p>
             <a:r>
-              <a:t>Siehe Trainerhandbuch (Sektion 3) für Moderationshinweise, Timing und erwartete Teilnehmerreaktionen.</a:t>
+              <a:t>Agenda aus dem Ablaufplan (Sektion 3.1). Timing und Pausen siehe Trainerhandbuch.</a:t>
             </a:r>
           </a:p>
         </p:txBody>
@@ -818,6 +820,76 @@
 </file>
 
 <file path=ppt/notesSlides/notesSlide6.xml><?xml version="1.0" encoding="utf-8"?>
+<p:notes xmlns:a="http://schemas.openxmlformats.org/drawingml/2006/main" xmlns:p="http://schemas.openxmlformats.org/presentationml/2006/main" xmlns:r="http://schemas.openxmlformats.org/officeDocument/2006/relationships">
+  <p:cSld>
+    <p:spTree>
+      <p:nvGrpSpPr>
+        <p:cNvPr id="1" name=""/>
+        <p:cNvGrpSpPr/>
+        <p:nvPr/>
+      </p:nvGrpSpPr>
+      <p:grpSpPr>
+        <a:xfrm>
+          <a:off x="0" y="0"/>
+          <a:ext cx="0" cy="0"/>
+          <a:chOff x="0" y="0"/>
+          <a:chExt cx="0" cy="0"/>
+        </a:xfrm>
+      </p:grpSpPr>
+      <p:sp>
+        <p:nvSpPr>
+          <p:cNvPr id="2" name="Slide Image Placeholder 1"/>
+          <p:cNvSpPr>
+            <a:spLocks noGrp="1"/>
+          </p:cNvSpPr>
+          <p:nvPr>
+            <p:ph type="sldImg" idx="2"/>
+          </p:nvPr>
+        </p:nvSpPr>
+        <p:spPr/>
+      </p:sp>
+      <p:sp>
+        <p:nvSpPr>
+          <p:cNvPr id="3" name="Notes Placeholder 2"/>
+          <p:cNvSpPr>
+            <a:spLocks noGrp="1"/>
+          </p:cNvSpPr>
+          <p:nvPr>
+            <p:ph type="body" idx="3" sz="quarter"/>
+          </p:nvPr>
+        </p:nvSpPr>
+        <p:spPr/>
+        <p:txBody>
+          <a:bodyPr/>
+          <a:lstStyle/>
+          <a:p>
+            <a:r>
+              <a:t>Siehe Trainerhandbuch (Sektion 3) für Moderationshinweise, Timing und erwartete Teilnehmerreaktionen.</a:t>
+            </a:r>
+          </a:p>
+        </p:txBody>
+      </p:sp>
+      <p:sp>
+        <p:nvSpPr>
+          <p:cNvPr id="4" name="Slide Number Placeholder 3"/>
+          <p:cNvSpPr>
+            <a:spLocks noGrp="1"/>
+          </p:cNvSpPr>
+          <p:nvPr>
+            <p:ph type="sldNum" idx="5" sz="quarter"/>
+          </p:nvPr>
+        </p:nvSpPr>
+        <p:spPr/>
+      </p:sp>
+    </p:spTree>
+  </p:cSld>
+  <p:clrMapOvr>
+    <a:masterClrMapping/>
+  </p:clrMapOvr>
+</p:notes>
+</file>
+
+<file path=ppt/notesSlides/notesSlide7.xml><?xml version="1.0" encoding="utf-8"?>
 <p:notes xmlns:a="http://schemas.openxmlformats.org/drawingml/2006/main" xmlns:p="http://schemas.openxmlformats.org/presentationml/2006/main" xmlns:r="http://schemas.openxmlformats.org/officeDocument/2006/relationships">
   <p:cSld>
     <p:spTree>
@@ -4644,7 +4716,7 @@
                 </a:solidFill>
                 <a:latin typeface="Source Serif 4"/>
               </a:rPr>
-              <a:t>Handlungsempfehlung Wenn-Dann</a:t>
+              <a:t>Frühwarn-Ampelkarte</a:t>
             </a:r>
           </a:p>
         </p:txBody>
@@ -4708,8 +4780,8 @@
         </p:blipFill>
         <p:spPr>
           <a:xfrm>
-            <a:off x="2303489" y="1325880"/>
-            <a:ext cx="7581973" cy="4937760"/>
+            <a:off x="2163921" y="1325880"/>
+            <a:ext cx="7861110" cy="4937760"/>
           </a:xfrm>
           <a:prstGeom prst="rect">
             <a:avLst/>
@@ -4963,6 +5035,759 @@
                 </a:solidFill>
                 <a:latin typeface="JetBrains Mono"/>
               </a:rPr>
+              <a:t>M04  ·  INHALT</a:t>
+            </a:r>
+          </a:p>
+        </p:txBody>
+      </p:sp>
+      <p:sp>
+        <p:nvSpPr>
+          <p:cNvPr id="5" name="Rectangle 4"/>
+          <p:cNvSpPr/>
+          <p:nvPr/>
+        </p:nvSpPr>
+        <p:spPr>
+          <a:xfrm>
+            <a:off x="0" y="1234440"/>
+            <a:ext cx="12188952" cy="12700"/>
+          </a:xfrm>
+          <a:prstGeom prst="rect">
+            <a:avLst/>
+          </a:prstGeom>
+          <a:solidFill>
+            <a:srgbClr val="D8DFE4"/>
+          </a:solidFill>
+          <a:ln>
+            <a:noFill/>
+          </a:ln>
+        </p:spPr>
+        <p:style>
+          <a:lnRef idx="1">
+            <a:schemeClr val="accent1"/>
+          </a:lnRef>
+          <a:fillRef idx="3">
+            <a:schemeClr val="accent1"/>
+          </a:fillRef>
+          <a:effectRef idx="2">
+            <a:schemeClr val="accent1"/>
+          </a:effectRef>
+          <a:fontRef idx="minor">
+            <a:schemeClr val="lt1"/>
+          </a:fontRef>
+        </p:style>
+        <p:txBody>
+          <a:bodyPr rtlCol="0" anchor="ctr"/>
+          <a:lstStyle/>
+          <a:p>
+            <a:pPr algn="ctr"/>
+          </a:p>
+        </p:txBody>
+      </p:sp>
+      <p:sp>
+        <p:nvSpPr>
+          <p:cNvPr id="6" name="Rectangle 5"/>
+          <p:cNvSpPr/>
+          <p:nvPr/>
+        </p:nvSpPr>
+        <p:spPr>
+          <a:xfrm>
+            <a:off x="685800" y="502920"/>
+            <a:ext cx="36576" cy="658368"/>
+          </a:xfrm>
+          <a:prstGeom prst="rect">
+            <a:avLst/>
+          </a:prstGeom>
+          <a:solidFill>
+            <a:srgbClr val="D9C089"/>
+          </a:solidFill>
+          <a:ln>
+            <a:noFill/>
+          </a:ln>
+        </p:spPr>
+        <p:style>
+          <a:lnRef idx="1">
+            <a:schemeClr val="accent1"/>
+          </a:lnRef>
+          <a:fillRef idx="3">
+            <a:schemeClr val="accent1"/>
+          </a:fillRef>
+          <a:effectRef idx="2">
+            <a:schemeClr val="accent1"/>
+          </a:effectRef>
+          <a:fontRef idx="minor">
+            <a:schemeClr val="lt1"/>
+          </a:fontRef>
+        </p:style>
+        <p:txBody>
+          <a:bodyPr rtlCol="0" anchor="ctr"/>
+          <a:lstStyle/>
+          <a:p>
+            <a:pPr algn="ctr"/>
+          </a:p>
+        </p:txBody>
+      </p:sp>
+      <p:sp>
+        <p:nvSpPr>
+          <p:cNvPr id="7" name="TextBox 6"/>
+          <p:cNvSpPr txBox="1"/>
+          <p:nvPr/>
+        </p:nvSpPr>
+        <p:spPr>
+          <a:xfrm>
+            <a:off x="813816" y="502920"/>
+            <a:ext cx="10634472" cy="685800"/>
+          </a:xfrm>
+          <a:prstGeom prst="rect">
+            <a:avLst/>
+          </a:prstGeom>
+          <a:noFill/>
+        </p:spPr>
+        <p:txBody>
+          <a:bodyPr wrap="square">
+            <a:spAutoFit/>
+          </a:bodyPr>
+          <a:lstStyle/>
+          <a:p>
+            <a:pPr algn="l"/>
+            <a:r>
+              <a:rPr sz="2400" b="1" i="0">
+                <a:solidFill>
+                  <a:srgbClr val="1F2C56"/>
+                </a:solidFill>
+                <a:latin typeface="Source Serif 4"/>
+              </a:rPr>
+              <a:t>Eskalationspfade – Wer handelt wann?</a:t>
+            </a:r>
+          </a:p>
+        </p:txBody>
+      </p:sp>
+      <p:sp>
+        <p:nvSpPr>
+          <p:cNvPr id="8" name="TextBox 7"/>
+          <p:cNvSpPr txBox="1"/>
+          <p:nvPr/>
+        </p:nvSpPr>
+        <p:spPr>
+          <a:xfrm>
+            <a:off x="685800" y="1417320"/>
+            <a:ext cx="10817352" cy="5029200"/>
+          </a:xfrm>
+          <a:prstGeom prst="rect">
+            <a:avLst/>
+          </a:prstGeom>
+          <a:noFill/>
+        </p:spPr>
+        <p:txBody>
+          <a:bodyPr wrap="square">
+            <a:spAutoFit/>
+          </a:bodyPr>
+          <a:lstStyle/>
+          <a:p>
+            <a:pPr>
+              <a:spcBef>
+                <a:spcPts val="600"/>
+              </a:spcBef>
+              <a:spcAft>
+                <a:spcPts val="200"/>
+              </a:spcAft>
+            </a:pPr>
+            <a:r>
+              <a:rPr sz="1200" i="1">
+                <a:solidFill>
+                  <a:srgbClr val="3D5466"/>
+                </a:solidFill>
+                <a:latin typeface="Arial"/>
+              </a:rPr>
+              <a:t>→  Dokumentation in agree: Jeder Gelb- oder Rot-Befund wird im Risikovermerk dokumentiert: Datum, Indikator, Bewertung, nächste Maßnahme, Verantwortlicher. Das ist Revisionspflicht .</a:t>
+            </a:r>
+          </a:p>
+          <a:p>
+            <a:pPr>
+              <a:spcBef>
+                <a:spcPts val="400"/>
+              </a:spcBef>
+              <a:spcAft>
+                <a:spcPts val="200"/>
+              </a:spcAft>
+            </a:pPr>
+            <a:r>
+              <a:rPr sz="1300">
+                <a:solidFill>
+                  <a:srgbClr val="3D5466"/>
+                </a:solidFill>
+                <a:latin typeface="Arial"/>
+              </a:rPr>
+              <a:t>▸  Die folgende Karte verknüpft die erkannten Risikosignale direkt mit konkreten Handlungsschritten und zeigt, wann welche Maßnahme angemessen ist.</a:t>
+            </a:r>
+          </a:p>
+        </p:txBody>
+      </p:sp>
+      <p:sp>
+        <p:nvSpPr>
+          <p:cNvPr id="9" name="Rectangle 8"/>
+          <p:cNvSpPr/>
+          <p:nvPr/>
+        </p:nvSpPr>
+        <p:spPr>
+          <a:xfrm>
+            <a:off x="0" y="6510528"/>
+            <a:ext cx="12188952" cy="347472"/>
+          </a:xfrm>
+          <a:prstGeom prst="rect">
+            <a:avLst/>
+          </a:prstGeom>
+          <a:solidFill>
+            <a:srgbClr val="0A1937"/>
+          </a:solidFill>
+          <a:ln>
+            <a:noFill/>
+          </a:ln>
+        </p:spPr>
+        <p:style>
+          <a:lnRef idx="1">
+            <a:schemeClr val="accent1"/>
+          </a:lnRef>
+          <a:fillRef idx="3">
+            <a:schemeClr val="accent1"/>
+          </a:fillRef>
+          <a:effectRef idx="2">
+            <a:schemeClr val="accent1"/>
+          </a:effectRef>
+          <a:fontRef idx="minor">
+            <a:schemeClr val="lt1"/>
+          </a:fontRef>
+        </p:style>
+        <p:txBody>
+          <a:bodyPr rtlCol="0" anchor="ctr"/>
+          <a:lstStyle/>
+          <a:p>
+            <a:pPr algn="ctr"/>
+          </a:p>
+        </p:txBody>
+      </p:sp>
+      <p:sp>
+        <p:nvSpPr>
+          <p:cNvPr id="10" name="TextBox 9"/>
+          <p:cNvSpPr txBox="1"/>
+          <p:nvPr/>
+        </p:nvSpPr>
+        <p:spPr>
+          <a:xfrm>
+            <a:off x="685800" y="6583680"/>
+            <a:ext cx="6490411" cy="256032"/>
+          </a:xfrm>
+          <a:prstGeom prst="rect">
+            <a:avLst/>
+          </a:prstGeom>
+          <a:noFill/>
+        </p:spPr>
+        <p:txBody>
+          <a:bodyPr wrap="none">
+            <a:spAutoFit/>
+          </a:bodyPr>
+          <a:lstStyle/>
+          <a:p>
+            <a:pPr algn="l"/>
+            <a:r>
+              <a:rPr sz="700">
+                <a:solidFill>
+                  <a:srgbClr val="A0B4D2"/>
+                </a:solidFill>
+                <a:latin typeface="JetBrains Mono"/>
+              </a:rPr>
+              <a:t>Benedikt Zoller Coaching  ·  FKB Campus  ·  M04</a:t>
+            </a:r>
+          </a:p>
+        </p:txBody>
+      </p:sp>
+    </p:spTree>
+  </p:cSld>
+  <p:clrMapOvr>
+    <a:masterClrMapping/>
+  </p:clrMapOvr>
+</p:sld>
+</file>
+
+<file path=ppt/slides/slide12.xml><?xml version="1.0" encoding="utf-8"?>
+<p:sld xmlns:a="http://schemas.openxmlformats.org/drawingml/2006/main" xmlns:p="http://schemas.openxmlformats.org/presentationml/2006/main" xmlns:r="http://schemas.openxmlformats.org/officeDocument/2006/relationships">
+  <p:cSld>
+    <p:spTree>
+      <p:nvGrpSpPr>
+        <p:cNvPr id="1" name=""/>
+        <p:cNvGrpSpPr/>
+        <p:nvPr/>
+      </p:nvGrpSpPr>
+      <p:grpSpPr/>
+      <p:sp>
+        <p:nvSpPr>
+          <p:cNvPr id="2" name="Rectangle 1"/>
+          <p:cNvSpPr/>
+          <p:nvPr/>
+        </p:nvSpPr>
+        <p:spPr>
+          <a:xfrm>
+            <a:off x="0" y="0"/>
+            <a:ext cx="12188952" cy="6858000"/>
+          </a:xfrm>
+          <a:prstGeom prst="rect">
+            <a:avLst/>
+          </a:prstGeom>
+          <a:solidFill>
+            <a:srgbClr val="FFFFFF"/>
+          </a:solidFill>
+          <a:ln>
+            <a:noFill/>
+          </a:ln>
+        </p:spPr>
+        <p:style>
+          <a:lnRef idx="1">
+            <a:schemeClr val="accent1"/>
+          </a:lnRef>
+          <a:fillRef idx="3">
+            <a:schemeClr val="accent1"/>
+          </a:fillRef>
+          <a:effectRef idx="2">
+            <a:schemeClr val="accent1"/>
+          </a:effectRef>
+          <a:fontRef idx="minor">
+            <a:schemeClr val="lt1"/>
+          </a:fontRef>
+        </p:style>
+        <p:txBody>
+          <a:bodyPr rtlCol="0" anchor="ctr"/>
+          <a:lstStyle/>
+          <a:p>
+            <a:pPr algn="ctr"/>
+          </a:p>
+        </p:txBody>
+      </p:sp>
+      <p:sp>
+        <p:nvSpPr>
+          <p:cNvPr id="3" name="Rectangle 2"/>
+          <p:cNvSpPr/>
+          <p:nvPr/>
+        </p:nvSpPr>
+        <p:spPr>
+          <a:xfrm>
+            <a:off x="0" y="0"/>
+            <a:ext cx="12188952" cy="50292"/>
+          </a:xfrm>
+          <a:prstGeom prst="rect">
+            <a:avLst/>
+          </a:prstGeom>
+          <a:solidFill>
+            <a:srgbClr val="1F2C56"/>
+          </a:solidFill>
+          <a:ln>
+            <a:noFill/>
+          </a:ln>
+        </p:spPr>
+        <p:style>
+          <a:lnRef idx="1">
+            <a:schemeClr val="accent1"/>
+          </a:lnRef>
+          <a:fillRef idx="3">
+            <a:schemeClr val="accent1"/>
+          </a:fillRef>
+          <a:effectRef idx="2">
+            <a:schemeClr val="accent1"/>
+          </a:effectRef>
+          <a:fontRef idx="minor">
+            <a:schemeClr val="lt1"/>
+          </a:fontRef>
+        </p:style>
+        <p:txBody>
+          <a:bodyPr rtlCol="0" anchor="ctr"/>
+          <a:lstStyle/>
+          <a:p>
+            <a:pPr algn="ctr"/>
+          </a:p>
+        </p:txBody>
+      </p:sp>
+      <p:sp>
+        <p:nvSpPr>
+          <p:cNvPr id="4" name="TextBox 3"/>
+          <p:cNvSpPr txBox="1"/>
+          <p:nvPr/>
+        </p:nvSpPr>
+        <p:spPr>
+          <a:xfrm>
+            <a:off x="685800" y="109728"/>
+            <a:ext cx="10817352" cy="228600"/>
+          </a:xfrm>
+          <a:prstGeom prst="rect">
+            <a:avLst/>
+          </a:prstGeom>
+          <a:noFill/>
+        </p:spPr>
+        <p:txBody>
+          <a:bodyPr wrap="none">
+            <a:spAutoFit/>
+          </a:bodyPr>
+          <a:lstStyle/>
+          <a:p>
+            <a:pPr algn="l"/>
+            <a:r>
+              <a:rPr sz="750">
+                <a:solidFill>
+                  <a:srgbClr val="78808C"/>
+                </a:solidFill>
+                <a:latin typeface="JetBrains Mono"/>
+              </a:rPr>
+              <a:t>M04  ·  SCHAUBILD</a:t>
+            </a:r>
+          </a:p>
+        </p:txBody>
+      </p:sp>
+      <p:sp>
+        <p:nvSpPr>
+          <p:cNvPr id="5" name="TextBox 4"/>
+          <p:cNvSpPr txBox="1"/>
+          <p:nvPr/>
+        </p:nvSpPr>
+        <p:spPr>
+          <a:xfrm>
+            <a:off x="685800" y="502920"/>
+            <a:ext cx="10817352" cy="594360"/>
+          </a:xfrm>
+          <a:prstGeom prst="rect">
+            <a:avLst/>
+          </a:prstGeom>
+          <a:noFill/>
+        </p:spPr>
+        <p:txBody>
+          <a:bodyPr wrap="square">
+            <a:spAutoFit/>
+          </a:bodyPr>
+          <a:lstStyle/>
+          <a:p>
+            <a:pPr algn="l"/>
+            <a:r>
+              <a:rPr sz="2000" b="1" i="0">
+                <a:solidFill>
+                  <a:srgbClr val="1F2C56"/>
+                </a:solidFill>
+                <a:latin typeface="Source Serif 4"/>
+              </a:rPr>
+              <a:t>Handlungsempfehlung Wenn-Dann</a:t>
+            </a:r>
+          </a:p>
+        </p:txBody>
+      </p:sp>
+      <p:sp>
+        <p:nvSpPr>
+          <p:cNvPr id="6" name="Rectangle 5"/>
+          <p:cNvSpPr/>
+          <p:nvPr/>
+        </p:nvSpPr>
+        <p:spPr>
+          <a:xfrm>
+            <a:off x="685800" y="1143000"/>
+            <a:ext cx="10817352" cy="25400"/>
+          </a:xfrm>
+          <a:prstGeom prst="rect">
+            <a:avLst/>
+          </a:prstGeom>
+          <a:solidFill>
+            <a:srgbClr val="D9C089"/>
+          </a:solidFill>
+          <a:ln>
+            <a:noFill/>
+          </a:ln>
+        </p:spPr>
+        <p:style>
+          <a:lnRef idx="1">
+            <a:schemeClr val="accent1"/>
+          </a:lnRef>
+          <a:fillRef idx="3">
+            <a:schemeClr val="accent1"/>
+          </a:fillRef>
+          <a:effectRef idx="2">
+            <a:schemeClr val="accent1"/>
+          </a:effectRef>
+          <a:fontRef idx="minor">
+            <a:schemeClr val="lt1"/>
+          </a:fontRef>
+        </p:style>
+        <p:txBody>
+          <a:bodyPr rtlCol="0" anchor="ctr"/>
+          <a:lstStyle/>
+          <a:p>
+            <a:pPr algn="ctr"/>
+          </a:p>
+        </p:txBody>
+      </p:sp>
+      <p:pic>
+        <p:nvPicPr>
+          <p:cNvPr id="7" name="Picture 6" descr="image.png"/>
+          <p:cNvPicPr>
+            <a:picLocks noChangeAspect="1"/>
+          </p:cNvPicPr>
+          <p:nvPr/>
+        </p:nvPicPr>
+        <p:blipFill>
+          <a:blip r:embed="rId2"/>
+          <a:stretch>
+            <a:fillRect/>
+          </a:stretch>
+        </p:blipFill>
+        <p:spPr>
+          <a:xfrm>
+            <a:off x="2303489" y="1325880"/>
+            <a:ext cx="7581973" cy="4937760"/>
+          </a:xfrm>
+          <a:prstGeom prst="rect">
+            <a:avLst/>
+          </a:prstGeom>
+        </p:spPr>
+      </p:pic>
+      <p:sp>
+        <p:nvSpPr>
+          <p:cNvPr id="8" name="Rectangle 7"/>
+          <p:cNvSpPr/>
+          <p:nvPr/>
+        </p:nvSpPr>
+        <p:spPr>
+          <a:xfrm>
+            <a:off x="0" y="6510528"/>
+            <a:ext cx="12188952" cy="347472"/>
+          </a:xfrm>
+          <a:prstGeom prst="rect">
+            <a:avLst/>
+          </a:prstGeom>
+          <a:solidFill>
+            <a:srgbClr val="0A1937"/>
+          </a:solidFill>
+          <a:ln>
+            <a:noFill/>
+          </a:ln>
+        </p:spPr>
+        <p:style>
+          <a:lnRef idx="1">
+            <a:schemeClr val="accent1"/>
+          </a:lnRef>
+          <a:fillRef idx="3">
+            <a:schemeClr val="accent1"/>
+          </a:fillRef>
+          <a:effectRef idx="2">
+            <a:schemeClr val="accent1"/>
+          </a:effectRef>
+          <a:fontRef idx="minor">
+            <a:schemeClr val="lt1"/>
+          </a:fontRef>
+        </p:style>
+        <p:txBody>
+          <a:bodyPr rtlCol="0" anchor="ctr"/>
+          <a:lstStyle/>
+          <a:p>
+            <a:pPr algn="ctr"/>
+          </a:p>
+        </p:txBody>
+      </p:sp>
+      <p:sp>
+        <p:nvSpPr>
+          <p:cNvPr id="9" name="TextBox 8"/>
+          <p:cNvSpPr txBox="1"/>
+          <p:nvPr/>
+        </p:nvSpPr>
+        <p:spPr>
+          <a:xfrm>
+            <a:off x="685800" y="6583680"/>
+            <a:ext cx="6490411" cy="256032"/>
+          </a:xfrm>
+          <a:prstGeom prst="rect">
+            <a:avLst/>
+          </a:prstGeom>
+          <a:noFill/>
+        </p:spPr>
+        <p:txBody>
+          <a:bodyPr wrap="none">
+            <a:spAutoFit/>
+          </a:bodyPr>
+          <a:lstStyle/>
+          <a:p>
+            <a:pPr algn="l"/>
+            <a:r>
+              <a:rPr sz="700">
+                <a:solidFill>
+                  <a:srgbClr val="A0B4D2"/>
+                </a:solidFill>
+                <a:latin typeface="JetBrains Mono"/>
+              </a:rPr>
+              <a:t>Benedikt Zoller Coaching  ·  FKB Campus  ·  M04</a:t>
+            </a:r>
+          </a:p>
+        </p:txBody>
+      </p:sp>
+      <p:sp>
+        <p:nvSpPr>
+          <p:cNvPr id="10" name="TextBox 9"/>
+          <p:cNvSpPr txBox="1"/>
+          <p:nvPr/>
+        </p:nvSpPr>
+        <p:spPr>
+          <a:xfrm>
+            <a:off x="7176211" y="6583680"/>
+            <a:ext cx="4326940" cy="256032"/>
+          </a:xfrm>
+          <a:prstGeom prst="rect">
+            <a:avLst/>
+          </a:prstGeom>
+          <a:noFill/>
+        </p:spPr>
+        <p:txBody>
+          <a:bodyPr wrap="none">
+            <a:spAutoFit/>
+          </a:bodyPr>
+          <a:lstStyle/>
+          <a:p>
+            <a:pPr algn="r"/>
+            <a:r>
+              <a:rPr sz="700">
+                <a:solidFill>
+                  <a:srgbClr val="A0B4D2"/>
+                </a:solidFill>
+                <a:latin typeface="JetBrains Mono"/>
+              </a:rPr>
+              <a:t>Schaubild</a:t>
+            </a:r>
+          </a:p>
+        </p:txBody>
+      </p:sp>
+    </p:spTree>
+  </p:cSld>
+  <p:clrMapOvr>
+    <a:masterClrMapping/>
+  </p:clrMapOvr>
+</p:sld>
+</file>
+
+<file path=ppt/slides/slide13.xml><?xml version="1.0" encoding="utf-8"?>
+<p:sld xmlns:a="http://schemas.openxmlformats.org/drawingml/2006/main" xmlns:p="http://schemas.openxmlformats.org/presentationml/2006/main" xmlns:r="http://schemas.openxmlformats.org/officeDocument/2006/relationships">
+  <p:cSld>
+    <p:spTree>
+      <p:nvGrpSpPr>
+        <p:cNvPr id="1" name=""/>
+        <p:cNvGrpSpPr/>
+        <p:nvPr/>
+      </p:nvGrpSpPr>
+      <p:grpSpPr/>
+      <p:sp>
+        <p:nvSpPr>
+          <p:cNvPr id="2" name="Rectangle 1"/>
+          <p:cNvSpPr/>
+          <p:nvPr/>
+        </p:nvSpPr>
+        <p:spPr>
+          <a:xfrm>
+            <a:off x="0" y="0"/>
+            <a:ext cx="12188952" cy="6858000"/>
+          </a:xfrm>
+          <a:prstGeom prst="rect">
+            <a:avLst/>
+          </a:prstGeom>
+          <a:solidFill>
+            <a:srgbClr val="EDEDF3"/>
+          </a:solidFill>
+          <a:ln>
+            <a:noFill/>
+          </a:ln>
+        </p:spPr>
+        <p:style>
+          <a:lnRef idx="1">
+            <a:schemeClr val="accent1"/>
+          </a:lnRef>
+          <a:fillRef idx="3">
+            <a:schemeClr val="accent1"/>
+          </a:fillRef>
+          <a:effectRef idx="2">
+            <a:schemeClr val="accent1"/>
+          </a:effectRef>
+          <a:fontRef idx="minor">
+            <a:schemeClr val="lt1"/>
+          </a:fontRef>
+        </p:style>
+        <p:txBody>
+          <a:bodyPr rtlCol="0" anchor="ctr"/>
+          <a:lstStyle/>
+          <a:p>
+            <a:pPr algn="ctr"/>
+          </a:p>
+        </p:txBody>
+      </p:sp>
+      <p:sp>
+        <p:nvSpPr>
+          <p:cNvPr id="3" name="Rectangle 2"/>
+          <p:cNvSpPr/>
+          <p:nvPr/>
+        </p:nvSpPr>
+        <p:spPr>
+          <a:xfrm>
+            <a:off x="0" y="0"/>
+            <a:ext cx="12188952" cy="50292"/>
+          </a:xfrm>
+          <a:prstGeom prst="rect">
+            <a:avLst/>
+          </a:prstGeom>
+          <a:solidFill>
+            <a:srgbClr val="1F2C56"/>
+          </a:solidFill>
+          <a:ln>
+            <a:noFill/>
+          </a:ln>
+        </p:spPr>
+        <p:style>
+          <a:lnRef idx="1">
+            <a:schemeClr val="accent1"/>
+          </a:lnRef>
+          <a:fillRef idx="3">
+            <a:schemeClr val="accent1"/>
+          </a:fillRef>
+          <a:effectRef idx="2">
+            <a:schemeClr val="accent1"/>
+          </a:effectRef>
+          <a:fontRef idx="minor">
+            <a:schemeClr val="lt1"/>
+          </a:fontRef>
+        </p:style>
+        <p:txBody>
+          <a:bodyPr rtlCol="0" anchor="ctr"/>
+          <a:lstStyle/>
+          <a:p>
+            <a:pPr algn="ctr"/>
+          </a:p>
+        </p:txBody>
+      </p:sp>
+      <p:sp>
+        <p:nvSpPr>
+          <p:cNvPr id="4" name="TextBox 3"/>
+          <p:cNvSpPr txBox="1"/>
+          <p:nvPr/>
+        </p:nvSpPr>
+        <p:spPr>
+          <a:xfrm>
+            <a:off x="685800" y="109728"/>
+            <a:ext cx="10817352" cy="228600"/>
+          </a:xfrm>
+          <a:prstGeom prst="rect">
+            <a:avLst/>
+          </a:prstGeom>
+          <a:noFill/>
+        </p:spPr>
+        <p:txBody>
+          <a:bodyPr wrap="none">
+            <a:spAutoFit/>
+          </a:bodyPr>
+          <a:lstStyle/>
+          <a:p>
+            <a:pPr algn="l"/>
+            <a:r>
+              <a:rPr sz="750">
+                <a:solidFill>
+                  <a:srgbClr val="78808C"/>
+                </a:solidFill>
+                <a:latin typeface="JetBrains Mono"/>
+              </a:rPr>
               <a:t>M04  ·  ARBEITSBLATT</a:t>
             </a:r>
           </a:p>
@@ -6257,7 +7082,7 @@
                 </a:solidFill>
                 <a:latin typeface="JetBrains Mono"/>
               </a:rPr>
-              <a:t>M04  ·  INHALT</a:t>
+              <a:t>AGENDA  ·  M04</a:t>
             </a:r>
           </a:p>
         </p:txBody>
@@ -6307,57 +7132,14 @@
       </p:sp>
       <p:sp>
         <p:nvSpPr>
-          <p:cNvPr id="6" name="Rectangle 5"/>
-          <p:cNvSpPr/>
+          <p:cNvPr id="6" name="TextBox 5"/>
+          <p:cNvSpPr txBox="1"/>
           <p:nvPr/>
         </p:nvSpPr>
         <p:spPr>
           <a:xfrm>
             <a:off x="685800" y="502920"/>
-            <a:ext cx="36576" cy="658368"/>
-          </a:xfrm>
-          <a:prstGeom prst="rect">
-            <a:avLst/>
-          </a:prstGeom>
-          <a:solidFill>
-            <a:srgbClr val="D9C089"/>
-          </a:solidFill>
-          <a:ln>
-            <a:noFill/>
-          </a:ln>
-        </p:spPr>
-        <p:style>
-          <a:lnRef idx="1">
-            <a:schemeClr val="accent1"/>
-          </a:lnRef>
-          <a:fillRef idx="3">
-            <a:schemeClr val="accent1"/>
-          </a:fillRef>
-          <a:effectRef idx="2">
-            <a:schemeClr val="accent1"/>
-          </a:effectRef>
-          <a:fontRef idx="minor">
-            <a:schemeClr val="lt1"/>
-          </a:fontRef>
-        </p:style>
-        <p:txBody>
-          <a:bodyPr rtlCol="0" anchor="ctr"/>
-          <a:lstStyle/>
-          <a:p>
-            <a:pPr algn="ctr"/>
-          </a:p>
-        </p:txBody>
-      </p:sp>
-      <p:sp>
-        <p:nvSpPr>
-          <p:cNvPr id="7" name="TextBox 6"/>
-          <p:cNvSpPr txBox="1"/>
-          <p:nvPr/>
-        </p:nvSpPr>
-        <p:spPr>
-          <a:xfrm>
-            <a:off x="813816" y="502920"/>
-            <a:ext cx="10634472" cy="685800"/>
+            <a:ext cx="10817352" cy="658368"/>
           </a:xfrm>
           <a:prstGeom prst="rect">
             <a:avLst/>
@@ -6372,27 +7154,27 @@
           <a:p>
             <a:pPr algn="l"/>
             <a:r>
-              <a:rPr sz="2400" b="1" i="0">
+              <a:rPr sz="2600" b="1" i="0">
                 <a:solidFill>
                   <a:srgbClr val="1F2C56"/>
                 </a:solidFill>
                 <a:latin typeface="Source Serif 4"/>
               </a:rPr>
-              <a:t>Kreditrisiko – Grundbegriffe und Bedeutung für den Berater</a:t>
-            </a:r>
-          </a:p>
-        </p:txBody>
-      </p:sp>
-      <p:sp>
-        <p:nvSpPr>
-          <p:cNvPr id="8" name="TextBox 7"/>
+              <a:t>So läuft das Modul</a:t>
+            </a:r>
+          </a:p>
+        </p:txBody>
+      </p:sp>
+      <p:sp>
+        <p:nvSpPr>
+          <p:cNvPr id="7" name="TextBox 6"/>
           <p:cNvSpPr txBox="1"/>
           <p:nvPr/>
         </p:nvSpPr>
         <p:spPr>
           <a:xfrm>
-            <a:off x="685800" y="1417320"/>
-            <a:ext cx="10817352" cy="5029200"/>
+            <a:off x="685800" y="1463040"/>
+            <a:ext cx="10817352" cy="4937760"/>
           </a:xfrm>
           <a:prstGeom prst="rect">
             <a:avLst/>
@@ -6407,27 +7189,304 @@
           <a:p>
             <a:pPr>
               <a:spcBef>
-                <a:spcPts val="400"/>
+                <a:spcPts val="700"/>
               </a:spcBef>
               <a:spcAft>
-                <a:spcPts val="200"/>
+                <a:spcPts val="100"/>
               </a:spcAft>
             </a:pPr>
             <a:r>
               <a:rPr sz="1200">
                 <a:solidFill>
+                  <a:srgbClr val="78808C"/>
+                </a:solidFill>
+                <a:latin typeface="Consolas"/>
+              </a:rPr>
+              <a:t>00–05       </a:t>
+            </a:r>
+            <a:r>
+              <a:rPr sz="1500" b="1">
+                <a:solidFill>
                   <a:srgbClr val="3D5466"/>
                 </a:solidFill>
                 <a:latin typeface="Arial"/>
               </a:rPr>
-              <a:t>Die drei Kreditrisikoarten:</a:t>
-            </a:r>
-          </a:p>
-        </p:txBody>
-      </p:sp>
-      <p:sp>
-        <p:nvSpPr>
-          <p:cNvPr id="9" name="Rectangle 8"/>
+              <a:t>  Einstieg</a:t>
+            </a:r>
+            <a:r>
+              <a:rPr sz="1200">
+                <a:solidFill>
+                  <a:srgbClr val="78808C"/>
+                </a:solidFill>
+                <a:latin typeface="Arial"/>
+              </a:rPr>
+              <a:t>  ·  Blitzrunde</a:t>
+            </a:r>
+          </a:p>
+          <a:p>
+            <a:pPr>
+              <a:spcBef>
+                <a:spcPts val="700"/>
+              </a:spcBef>
+              <a:spcAft>
+                <a:spcPts val="100"/>
+              </a:spcAft>
+            </a:pPr>
+            <a:r>
+              <a:rPr sz="1200">
+                <a:solidFill>
+                  <a:srgbClr val="78808C"/>
+                </a:solidFill>
+                <a:latin typeface="Consolas"/>
+              </a:rPr>
+              <a:t>05–15       </a:t>
+            </a:r>
+            <a:r>
+              <a:rPr sz="1500" b="1">
+                <a:solidFill>
+                  <a:srgbClr val="3D5466"/>
+                </a:solidFill>
+                <a:latin typeface="Arial"/>
+              </a:rPr>
+              <a:t>  Aktivierung</a:t>
+            </a:r>
+            <a:r>
+              <a:rPr sz="1200">
+                <a:solidFill>
+                  <a:srgbClr val="78808C"/>
+                </a:solidFill>
+                <a:latin typeface="Arial"/>
+              </a:rPr>
+              <a:t>  ·  Partnerarbeit</a:t>
+            </a:r>
+          </a:p>
+          <a:p>
+            <a:pPr>
+              <a:spcBef>
+                <a:spcPts val="700"/>
+              </a:spcBef>
+              <a:spcAft>
+                <a:spcPts val="100"/>
+              </a:spcAft>
+            </a:pPr>
+            <a:r>
+              <a:rPr sz="1200">
+                <a:solidFill>
+                  <a:srgbClr val="78808C"/>
+                </a:solidFill>
+                <a:latin typeface="Consolas"/>
+              </a:rPr>
+              <a:t>15–30       </a:t>
+            </a:r>
+            <a:r>
+              <a:rPr sz="1500" b="1">
+                <a:solidFill>
+                  <a:srgbClr val="3D5466"/>
+                </a:solidFill>
+                <a:latin typeface="Arial"/>
+              </a:rPr>
+              <a:t>  Input 1</a:t>
+            </a:r>
+            <a:r>
+              <a:rPr sz="1200">
+                <a:solidFill>
+                  <a:srgbClr val="78808C"/>
+                </a:solidFill>
+                <a:latin typeface="Arial"/>
+              </a:rPr>
+              <a:t>  ·  Interaktiver Vortrag</a:t>
+            </a:r>
+          </a:p>
+          <a:p>
+            <a:pPr>
+              <a:spcBef>
+                <a:spcPts val="700"/>
+              </a:spcBef>
+              <a:spcAft>
+                <a:spcPts val="100"/>
+              </a:spcAft>
+            </a:pPr>
+            <a:r>
+              <a:rPr sz="1200">
+                <a:solidFill>
+                  <a:srgbClr val="78808C"/>
+                </a:solidFill>
+                <a:latin typeface="Consolas"/>
+              </a:rPr>
+              <a:t>30–45       </a:t>
+            </a:r>
+            <a:r>
+              <a:rPr sz="1500" b="1">
+                <a:solidFill>
+                  <a:srgbClr val="3D5466"/>
+                </a:solidFill>
+                <a:latin typeface="Arial"/>
+              </a:rPr>
+              <a:t>  Input 2</a:t>
+            </a:r>
+            <a:r>
+              <a:rPr sz="1200">
+                <a:solidFill>
+                  <a:srgbClr val="78808C"/>
+                </a:solidFill>
+                <a:latin typeface="Arial"/>
+              </a:rPr>
+              <a:t>  ·  Interaktiver Vortrag + Demo</a:t>
+            </a:r>
+          </a:p>
+          <a:p>
+            <a:pPr>
+              <a:spcBef>
+                <a:spcPts val="700"/>
+              </a:spcBef>
+              <a:spcAft>
+                <a:spcPts val="100"/>
+              </a:spcAft>
+            </a:pPr>
+            <a:r>
+              <a:rPr sz="1200">
+                <a:solidFill>
+                  <a:srgbClr val="78808C"/>
+                </a:solidFill>
+                <a:latin typeface="Consolas"/>
+              </a:rPr>
+              <a:t>45–65       </a:t>
+            </a:r>
+            <a:r>
+              <a:rPr sz="1500" b="1">
+                <a:solidFill>
+                  <a:srgbClr val="3D5466"/>
+                </a:solidFill>
+                <a:latin typeface="Arial"/>
+              </a:rPr>
+              <a:t>  Fallarbeit</a:t>
+            </a:r>
+            <a:r>
+              <a:rPr sz="1200">
+                <a:solidFill>
+                  <a:srgbClr val="78808C"/>
+                </a:solidFill>
+                <a:latin typeface="Arial"/>
+              </a:rPr>
+              <a:t>  ·  Gruppenarbeit</a:t>
+            </a:r>
+          </a:p>
+          <a:p>
+            <a:pPr>
+              <a:spcBef>
+                <a:spcPts val="700"/>
+              </a:spcBef>
+              <a:spcAft>
+                <a:spcPts val="100"/>
+              </a:spcAft>
+            </a:pPr>
+            <a:r>
+              <a:rPr sz="1200">
+                <a:solidFill>
+                  <a:srgbClr val="78808C"/>
+                </a:solidFill>
+                <a:latin typeface="Consolas"/>
+              </a:rPr>
+              <a:t>65–80       </a:t>
+            </a:r>
+            <a:r>
+              <a:rPr sz="1500" b="1">
+                <a:solidFill>
+                  <a:srgbClr val="3D5466"/>
+                </a:solidFill>
+                <a:latin typeface="Arial"/>
+              </a:rPr>
+              <a:t>  Auswertung</a:t>
+            </a:r>
+            <a:r>
+              <a:rPr sz="1200">
+                <a:solidFill>
+                  <a:srgbClr val="78808C"/>
+                </a:solidFill>
+                <a:latin typeface="Arial"/>
+              </a:rPr>
+              <a:t>  ·  Plenumsdiskussion</a:t>
+            </a:r>
+          </a:p>
+          <a:p>
+            <a:pPr>
+              <a:spcBef>
+                <a:spcPts val="700"/>
+              </a:spcBef>
+              <a:spcAft>
+                <a:spcPts val="100"/>
+              </a:spcAft>
+            </a:pPr>
+            <a:r>
+              <a:rPr sz="1200">
+                <a:solidFill>
+                  <a:srgbClr val="78808C"/>
+                </a:solidFill>
+                <a:latin typeface="Consolas"/>
+              </a:rPr>
+              <a:t>80–88       </a:t>
+            </a:r>
+            <a:r>
+              <a:rPr sz="1500" b="1">
+                <a:solidFill>
+                  <a:srgbClr val="3D5466"/>
+                </a:solidFill>
+                <a:latin typeface="Arial"/>
+              </a:rPr>
+              <a:t>  Transfer</a:t>
+            </a:r>
+            <a:r>
+              <a:rPr sz="1200">
+                <a:solidFill>
+                  <a:srgbClr val="78808C"/>
+                </a:solidFill>
+                <a:latin typeface="Arial"/>
+              </a:rPr>
+              <a:t>  ·  Plenum + Einzelarbeit</a:t>
+            </a:r>
+          </a:p>
+          <a:p>
+            <a:pPr>
+              <a:spcBef>
+                <a:spcPts val="700"/>
+              </a:spcBef>
+              <a:spcAft>
+                <a:spcPts val="100"/>
+              </a:spcAft>
+            </a:pPr>
+            <a:r>
+              <a:rPr sz="1200">
+                <a:solidFill>
+                  <a:srgbClr val="78808C"/>
+                </a:solidFill>
+                <a:latin typeface="Consolas"/>
+              </a:rPr>
+              <a:t>88–90       </a:t>
+            </a:r>
+            <a:r>
+              <a:rPr sz="1500" b="1">
+                <a:solidFill>
+                  <a:srgbClr val="3D5466"/>
+                </a:solidFill>
+                <a:latin typeface="Arial"/>
+              </a:rPr>
+              <a:t>  Abschluss</a:t>
+            </a:r>
+            <a:r>
+              <a:rPr sz="1200">
+                <a:solidFill>
+                  <a:srgbClr val="78808C"/>
+                </a:solidFill>
+                <a:latin typeface="Arial"/>
+              </a:rPr>
+              <a:t>  ·  Blitzrunde</a:t>
+            </a:r>
+          </a:p>
+        </p:txBody>
+      </p:sp>
+      <p:sp>
+        <p:nvSpPr>
+          <p:cNvPr id="8" name="Rectangle 7"/>
           <p:cNvSpPr/>
           <p:nvPr/>
         </p:nvSpPr>
@@ -6470,7 +7529,7 @@
       </p:sp>
       <p:sp>
         <p:nvSpPr>
-          <p:cNvPr id="10" name="TextBox 9"/>
+          <p:cNvPr id="9" name="TextBox 8"/>
           <p:cNvSpPr txBox="1"/>
           <p:nvPr/>
         </p:nvSpPr>
@@ -6758,7 +7817,7 @@
                 </a:solidFill>
                 <a:latin typeface="Source Serif 4"/>
               </a:rPr>
-              <a:t>Die vier Krisenphasen [Q-099]</a:t>
+              <a:t>Kreditrisiko – Grundbegriffe und Bedeutung für den Berater</a:t>
             </a:r>
           </a:p>
         </p:txBody>
@@ -6794,32 +7853,13 @@
               </a:spcAft>
             </a:pPr>
             <a:r>
-              <a:rPr sz="1200">
+              <a:rPr sz="1300">
                 <a:solidFill>
                   <a:srgbClr val="3D5466"/>
                 </a:solidFill>
                 <a:latin typeface="Arial"/>
               </a:rPr>
-              <a:t>Nicht jede rote Ampel hat dieselbe Dringlichkeit. Das Krisenphasen-Modell hilft einzuordnen, wie weit ein Unternehmen bereits in die Krise gerutscht ist:</a:t>
-            </a:r>
-          </a:p>
-          <a:p>
-            <a:pPr>
-              <a:spcBef>
-                <a:spcPts val="600"/>
-              </a:spcBef>
-              <a:spcAft>
-                <a:spcPts val="200"/>
-              </a:spcAft>
-            </a:pPr>
-            <a:r>
-              <a:rPr sz="1200" i="1">
-                <a:solidFill>
-                  <a:srgbClr val="3D5466"/>
-                </a:solidFill>
-                <a:latin typeface="Arial"/>
-              </a:rPr>
-              <a:t>→  Merksatz: Die Ampel-Checkliste zeigt, wo das Signal liegt. Die Krisenphase zeigt, wie dringend gehandelt werden muss.</a:t>
+              <a:t>▸  Die drei Kreditrisikoarten:</a:t>
             </a:r>
           </a:p>
         </p:txBody>
@@ -7157,7 +8197,7 @@
                 </a:solidFill>
                 <a:latin typeface="Source Serif 4"/>
               </a:rPr>
-              <a:t>Frühwarnindikatoren – Quantitativ und Qualitativ</a:t>
+              <a:t>Die vier Krisenphasen [Q-099]</a:t>
             </a:r>
           </a:p>
         </p:txBody>
@@ -7193,70 +8233,13 @@
               </a:spcAft>
             </a:pPr>
             <a:r>
-              <a:rPr sz="1200">
+              <a:rPr sz="1300">
                 <a:solidFill>
                   <a:srgbClr val="3D5466"/>
                 </a:solidFill>
                 <a:latin typeface="Arial"/>
               </a:rPr>
-              <a:t>Frühwarnindikatoren lassen sich in zwei komplementäre Kategorien einteilen :</a:t>
-            </a:r>
-          </a:p>
-          <a:p>
-            <a:pPr>
-              <a:spcBef>
-                <a:spcPts val="400"/>
-              </a:spcBef>
-              <a:spcAft>
-                <a:spcPts val="200"/>
-              </a:spcAft>
-            </a:pPr>
-            <a:r>
-              <a:rPr sz="1200">
-                <a:solidFill>
-                  <a:srgbClr val="3D5466"/>
-                </a:solidFill>
-                <a:latin typeface="Arial"/>
-              </a:rPr>
-              <a:t>Quantitative Indikatoren (aus Jahresabschluss und BWA):</a:t>
-            </a:r>
-          </a:p>
-          <a:p>
-            <a:pPr>
-              <a:spcBef>
-                <a:spcPts val="400"/>
-              </a:spcBef>
-              <a:spcAft>
-                <a:spcPts val="200"/>
-              </a:spcAft>
-            </a:pPr>
-            <a:r>
-              <a:rPr sz="1200">
-                <a:solidFill>
-                  <a:srgbClr val="3D5466"/>
-                </a:solidFill>
-                <a:latin typeface="Arial"/>
-              </a:rPr>
-              <a:t>NFK = verzinsliches Fremdkapital abzüglich liquide Mittel</a:t>
-            </a:r>
-          </a:p>
-          <a:p>
-            <a:pPr>
-              <a:spcBef>
-                <a:spcPts val="400"/>
-              </a:spcBef>
-              <a:spcAft>
-                <a:spcPts val="200"/>
-              </a:spcAft>
-            </a:pPr>
-            <a:r>
-              <a:rPr sz="1200">
-                <a:solidFill>
-                  <a:srgbClr val="3D5466"/>
-                </a:solidFill>
-                <a:latin typeface="Arial"/>
-              </a:rPr>
-              <a:t>Qualitative Indikatoren (aus Kundengespräch und Marktbeobachtung):</a:t>
+              <a:t>▸  Nicht jede rote Ampel hat dieselbe Dringlichkeit. Das Krisenphasen-Modell hilft einzuordnen, wie weit ein Unternehmen bereits in die Krise gerutscht ist:</a:t>
             </a:r>
           </a:p>
           <a:p>
@@ -7275,7 +8258,7 @@
                 </a:solidFill>
                 <a:latin typeface="Arial"/>
               </a:rPr>
-              <a:t>→  Merksatz: Qualitative Signale gehen quantitativen häufig 6–12 Monate voraus . Wer nur auf Zahlen wartet, reagiert zu spät.</a:t>
+              <a:t>→  Merksatz: Die Ampel-Checkliste zeigt, wo das Signal liegt. Die Krisenphase zeigt, wie dringend gehandelt werden muss.</a:t>
             </a:r>
           </a:p>
         </p:txBody>
@@ -7613,7 +8596,7 @@
                 </a:solidFill>
                 <a:latin typeface="Source Serif 4"/>
               </a:rPr>
-              <a:t>Ampel-Checkliste: Gesamtbewertung Kreditrisiko</a:t>
+              <a:t>Frühwarnindikatoren – Quantitativ und Qualitativ</a:t>
             </a:r>
           </a:p>
         </p:txBody>
@@ -7649,13 +8632,70 @@
               </a:spcAft>
             </a:pPr>
             <a:r>
-              <a:rPr sz="1200">
+              <a:rPr sz="1300">
                 <a:solidFill>
                   <a:srgbClr val="3D5466"/>
                 </a:solidFill>
                 <a:latin typeface="Arial"/>
               </a:rPr>
-              <a:t>Anleitung: Bewerten Sie jeden Indikator mit Grün (0 Punkte), Gelb (1 Punkt) oder Rot (2 Punkte).</a:t>
+              <a:t>▸  Frühwarnindikatoren lassen sich in zwei komplementäre Kategorien einteilen :</a:t>
+            </a:r>
+          </a:p>
+          <a:p>
+            <a:pPr>
+              <a:spcBef>
+                <a:spcPts val="400"/>
+              </a:spcBef>
+              <a:spcAft>
+                <a:spcPts val="200"/>
+              </a:spcAft>
+            </a:pPr>
+            <a:r>
+              <a:rPr sz="1300">
+                <a:solidFill>
+                  <a:srgbClr val="3D5466"/>
+                </a:solidFill>
+                <a:latin typeface="Arial"/>
+              </a:rPr>
+              <a:t>▸  Quantitative Indikatoren (aus Jahresabschluss und BWA):</a:t>
+            </a:r>
+          </a:p>
+          <a:p>
+            <a:pPr>
+              <a:spcBef>
+                <a:spcPts val="400"/>
+              </a:spcBef>
+              <a:spcAft>
+                <a:spcPts val="200"/>
+              </a:spcAft>
+            </a:pPr>
+            <a:r>
+              <a:rPr sz="1300">
+                <a:solidFill>
+                  <a:srgbClr val="3D5466"/>
+                </a:solidFill>
+                <a:latin typeface="Arial"/>
+              </a:rPr>
+              <a:t>▸  NFK = verzinsliches Fremdkapital abzüglich liquide Mittel</a:t>
+            </a:r>
+          </a:p>
+          <a:p>
+            <a:pPr>
+              <a:spcBef>
+                <a:spcPts val="400"/>
+              </a:spcBef>
+              <a:spcAft>
+                <a:spcPts val="200"/>
+              </a:spcAft>
+            </a:pPr>
+            <a:r>
+              <a:rPr sz="1300">
+                <a:solidFill>
+                  <a:srgbClr val="3D5466"/>
+                </a:solidFill>
+                <a:latin typeface="Arial"/>
+              </a:rPr>
+              <a:t>▸  Qualitative Indikatoren (aus Kundengespräch und Marktbeobachtung):</a:t>
             </a:r>
           </a:p>
           <a:p>
@@ -7674,7 +8714,7 @@
                 </a:solidFill>
                 <a:latin typeface="Arial"/>
               </a:rPr>
-              <a:t>→  Einzel-Rot-Trigger: Bei Jahresabschluss-Verweigerung, laufendem Zinsverzug oder Kenntnis eines Insolvenzantrags → unabhängig vom Gesamtscore sofort eskalieren.</a:t>
+              <a:t>→  Merksatz: Qualitative Signale gehen quantitativen häufig 6–12 Monate voraus . Wer nur auf Zahlen wartet, reagiert zu spät.</a:t>
             </a:r>
           </a:p>
         </p:txBody>
@@ -7891,7 +8931,7 @@
                 </a:solidFill>
                 <a:latin typeface="JetBrains Mono"/>
               </a:rPr>
-              <a:t>M04  ·  SCHAUBILD</a:t>
+              <a:t>M04  ·  ÜBERSICHT</a:t>
             </a:r>
           </a:p>
         </p:txBody>
@@ -7926,7 +8966,7 @@
                 </a:solidFill>
                 <a:latin typeface="Source Serif 4"/>
               </a:rPr>
-              <a:t>Frühwarn-Ampelkarte</a:t>
+              <a:t>Frühwarnindikatoren – Quantitativ und Qualitativ</a:t>
             </a:r>
           </a:p>
         </p:txBody>
@@ -7974,30 +9014,607 @@
           </a:p>
         </p:txBody>
       </p:sp>
-      <p:pic>
-        <p:nvPicPr>
-          <p:cNvPr id="7" name="Picture 6" descr="image.png"/>
-          <p:cNvPicPr>
-            <a:picLocks noChangeAspect="1"/>
-          </p:cNvPicPr>
-          <p:nvPr/>
-        </p:nvPicPr>
-        <p:blipFill>
-          <a:blip r:embed="rId2"/>
-          <a:stretch>
-            <a:fillRect/>
-          </a:stretch>
-        </p:blipFill>
-        <p:spPr>
-          <a:xfrm>
-            <a:off x="2163921" y="1325880"/>
-            <a:ext cx="7861110" cy="4937760"/>
-          </a:xfrm>
-          <a:prstGeom prst="rect">
-            <a:avLst/>
-          </a:prstGeom>
-        </p:spPr>
-      </p:pic>
+      <p:graphicFrame>
+        <p:nvGraphicFramePr>
+          <p:cNvPr id="7" name="Table 6"/>
+          <p:cNvGraphicFramePr>
+            <a:graphicFrameLocks noGrp="1"/>
+          </p:cNvGraphicFramePr>
+          <p:nvPr/>
+        </p:nvGraphicFramePr>
+        <p:xfrm>
+          <a:off x="685800" y="1417320"/>
+          <a:ext cx="10817352" cy="2304288"/>
+        </p:xfrm>
+        <a:graphic>
+          <a:graphicData uri="http://schemas.openxmlformats.org/drawingml/2006/table">
+            <a:tbl>
+              <a:tblPr firstRow="1" bandRow="1">
+                <a:tableStyleId>{5C22544A-7EE6-4342-B048-85BDC9FD1C3A}</a:tableStyleId>
+              </a:tblPr>
+              <a:tblGrid>
+                <a:gridCol w="2163470"/>
+                <a:gridCol w="2163470"/>
+                <a:gridCol w="2163470"/>
+                <a:gridCol w="2163470"/>
+                <a:gridCol w="2163472"/>
+              </a:tblGrid>
+              <a:tr h="384048">
+                <a:tc>
+                  <a:txBody>
+                    <a:bodyPr/>
+                    <a:lstStyle/>
+                    <a:p>
+                      <a:r>
+                        <a:rPr sz="1100" b="1">
+                          <a:solidFill>
+                            <a:srgbClr val="FFFFFF"/>
+                          </a:solidFill>
+                          <a:latin typeface="Arial"/>
+                        </a:rPr>
+                        <a:t>Indikator</a:t>
+                      </a:r>
+                    </a:p>
+                  </a:txBody>
+                  <a:tcPr>
+                    <a:solidFill>
+                      <a:srgbClr val="1F2C56"/>
+                    </a:solidFill>
+                  </a:tcPr>
+                </a:tc>
+                <a:tc>
+                  <a:txBody>
+                    <a:bodyPr/>
+                    <a:lstStyle/>
+                    <a:p>
+                      <a:r>
+                        <a:rPr sz="1100" b="1">
+                          <a:solidFill>
+                            <a:srgbClr val="FFFFFF"/>
+                          </a:solidFill>
+                          <a:latin typeface="Arial"/>
+                        </a:rPr>
+                        <a:t>Formel</a:t>
+                      </a:r>
+                    </a:p>
+                  </a:txBody>
+                  <a:tcPr>
+                    <a:solidFill>
+                      <a:srgbClr val="1F2C56"/>
+                    </a:solidFill>
+                  </a:tcPr>
+                </a:tc>
+                <a:tc>
+                  <a:txBody>
+                    <a:bodyPr/>
+                    <a:lstStyle/>
+                    <a:p>
+                      <a:r>
+                        <a:rPr sz="1100" b="1">
+                          <a:solidFill>
+                            <a:srgbClr val="FFFFFF"/>
+                          </a:solidFill>
+                          <a:latin typeface="Arial"/>
+                        </a:rPr>
+                        <a:t>Grün</a:t>
+                      </a:r>
+                    </a:p>
+                  </a:txBody>
+                  <a:tcPr>
+                    <a:solidFill>
+                      <a:srgbClr val="1F2C56"/>
+                    </a:solidFill>
+                  </a:tcPr>
+                </a:tc>
+                <a:tc>
+                  <a:txBody>
+                    <a:bodyPr/>
+                    <a:lstStyle/>
+                    <a:p>
+                      <a:r>
+                        <a:rPr sz="1100" b="1">
+                          <a:solidFill>
+                            <a:srgbClr val="FFFFFF"/>
+                          </a:solidFill>
+                          <a:latin typeface="Arial"/>
+                        </a:rPr>
+                        <a:t>Gelb</a:t>
+                      </a:r>
+                    </a:p>
+                  </a:txBody>
+                  <a:tcPr>
+                    <a:solidFill>
+                      <a:srgbClr val="1F2C56"/>
+                    </a:solidFill>
+                  </a:tcPr>
+                </a:tc>
+                <a:tc>
+                  <a:txBody>
+                    <a:bodyPr/>
+                    <a:lstStyle/>
+                    <a:p>
+                      <a:r>
+                        <a:rPr sz="1100" b="1">
+                          <a:solidFill>
+                            <a:srgbClr val="FFFFFF"/>
+                          </a:solidFill>
+                          <a:latin typeface="Arial"/>
+                        </a:rPr>
+                        <a:t>Rot</a:t>
+                      </a:r>
+                    </a:p>
+                  </a:txBody>
+                  <a:tcPr>
+                    <a:solidFill>
+                      <a:srgbClr val="1F2C56"/>
+                    </a:solidFill>
+                  </a:tcPr>
+                </a:tc>
+              </a:tr>
+              <a:tr h="384048">
+                <a:tc>
+                  <a:txBody>
+                    <a:bodyPr/>
+                    <a:lstStyle/>
+                    <a:p>
+                      <a:r>
+                        <a:rPr sz="1050">
+                          <a:solidFill>
+                            <a:srgbClr val="3D5466"/>
+                          </a:solidFill>
+                          <a:latin typeface="Arial"/>
+                        </a:rPr>
+                        <a:t>EBITDA-Marge</a:t>
+                      </a:r>
+                    </a:p>
+                  </a:txBody>
+                  <a:tcPr/>
+                </a:tc>
+                <a:tc>
+                  <a:txBody>
+                    <a:bodyPr/>
+                    <a:lstStyle/>
+                    <a:p>
+                      <a:r>
+                        <a:rPr sz="1050">
+                          <a:solidFill>
+                            <a:srgbClr val="3D5466"/>
+                          </a:solidFill>
+                          <a:latin typeface="Arial"/>
+                        </a:rPr>
+                        <a:t>EBITDA / Umsatz × 100</a:t>
+                      </a:r>
+                    </a:p>
+                  </a:txBody>
+                  <a:tcPr/>
+                </a:tc>
+                <a:tc>
+                  <a:txBody>
+                    <a:bodyPr/>
+                    <a:lstStyle/>
+                    <a:p>
+                      <a:r>
+                        <a:rPr sz="1050">
+                          <a:solidFill>
+                            <a:srgbClr val="3D5466"/>
+                          </a:solidFill>
+                          <a:latin typeface="Arial"/>
+                        </a:rPr>
+                        <a:t>&gt; 8 %</a:t>
+                      </a:r>
+                    </a:p>
+                  </a:txBody>
+                  <a:tcPr/>
+                </a:tc>
+                <a:tc>
+                  <a:txBody>
+                    <a:bodyPr/>
+                    <a:lstStyle/>
+                    <a:p>
+                      <a:r>
+                        <a:rPr sz="1050">
+                          <a:solidFill>
+                            <a:srgbClr val="3D5466"/>
+                          </a:solidFill>
+                          <a:latin typeface="Arial"/>
+                        </a:rPr>
+                        <a:t>5–8 %</a:t>
+                      </a:r>
+                    </a:p>
+                  </a:txBody>
+                  <a:tcPr/>
+                </a:tc>
+                <a:tc>
+                  <a:txBody>
+                    <a:bodyPr/>
+                    <a:lstStyle/>
+                    <a:p>
+                      <a:r>
+                        <a:rPr sz="1050">
+                          <a:solidFill>
+                            <a:srgbClr val="3D5466"/>
+                          </a:solidFill>
+                          <a:latin typeface="Arial"/>
+                        </a:rPr>
+                        <a:t>&lt; 5 %</a:t>
+                      </a:r>
+                    </a:p>
+                  </a:txBody>
+                  <a:tcPr/>
+                </a:tc>
+              </a:tr>
+              <a:tr h="384048">
+                <a:tc>
+                  <a:txBody>
+                    <a:bodyPr/>
+                    <a:lstStyle/>
+                    <a:p>
+                      <a:r>
+                        <a:rPr sz="1050">
+                          <a:solidFill>
+                            <a:srgbClr val="3D5466"/>
+                          </a:solidFill>
+                          <a:latin typeface="Arial"/>
+                        </a:rPr>
+                        <a:t>Leverage (NFK/EBITDA)</a:t>
+                      </a:r>
+                    </a:p>
+                  </a:txBody>
+                  <a:tcPr/>
+                </a:tc>
+                <a:tc>
+                  <a:txBody>
+                    <a:bodyPr/>
+                    <a:lstStyle/>
+                    <a:p>
+                      <a:r>
+                        <a:rPr sz="1050">
+                          <a:solidFill>
+                            <a:srgbClr val="3D5466"/>
+                          </a:solidFill>
+                          <a:latin typeface="Arial"/>
+                        </a:rPr>
+                        <a:t>Netto-Finanzverbindlichkeiten / EBITDA</a:t>
+                      </a:r>
+                    </a:p>
+                  </a:txBody>
+                  <a:tcPr/>
+                </a:tc>
+                <a:tc>
+                  <a:txBody>
+                    <a:bodyPr/>
+                    <a:lstStyle/>
+                    <a:p>
+                      <a:r>
+                        <a:rPr sz="1050">
+                          <a:solidFill>
+                            <a:srgbClr val="3D5466"/>
+                          </a:solidFill>
+                          <a:latin typeface="Arial"/>
+                        </a:rPr>
+                        <a:t>&lt; 3,0x</a:t>
+                      </a:r>
+                    </a:p>
+                  </a:txBody>
+                  <a:tcPr/>
+                </a:tc>
+                <a:tc>
+                  <a:txBody>
+                    <a:bodyPr/>
+                    <a:lstStyle/>
+                    <a:p>
+                      <a:r>
+                        <a:rPr sz="1050">
+                          <a:solidFill>
+                            <a:srgbClr val="3D5466"/>
+                          </a:solidFill>
+                          <a:latin typeface="Arial"/>
+                        </a:rPr>
+                        <a:t>3,0–4,0x</a:t>
+                      </a:r>
+                    </a:p>
+                  </a:txBody>
+                  <a:tcPr/>
+                </a:tc>
+                <a:tc>
+                  <a:txBody>
+                    <a:bodyPr/>
+                    <a:lstStyle/>
+                    <a:p>
+                      <a:r>
+                        <a:rPr sz="1050">
+                          <a:solidFill>
+                            <a:srgbClr val="3D5466"/>
+                          </a:solidFill>
+                          <a:latin typeface="Arial"/>
+                        </a:rPr>
+                        <a:t>&gt; 4,0x</a:t>
+                      </a:r>
+                    </a:p>
+                  </a:txBody>
+                  <a:tcPr/>
+                </a:tc>
+              </a:tr>
+              <a:tr h="384048">
+                <a:tc>
+                  <a:txBody>
+                    <a:bodyPr/>
+                    <a:lstStyle/>
+                    <a:p>
+                      <a:r>
+                        <a:rPr sz="1050">
+                          <a:solidFill>
+                            <a:srgbClr val="3D5466"/>
+                          </a:solidFill>
+                          <a:latin typeface="Arial"/>
+                        </a:rPr>
+                        <a:t>Eigenkapitalquote</a:t>
+                      </a:r>
+                    </a:p>
+                  </a:txBody>
+                  <a:tcPr/>
+                </a:tc>
+                <a:tc>
+                  <a:txBody>
+                    <a:bodyPr/>
+                    <a:lstStyle/>
+                    <a:p>
+                      <a:r>
+                        <a:rPr sz="1050">
+                          <a:solidFill>
+                            <a:srgbClr val="3D5466"/>
+                          </a:solidFill>
+                          <a:latin typeface="Arial"/>
+                        </a:rPr>
+                        <a:t>EK / Bilanzsumme × 100</a:t>
+                      </a:r>
+                    </a:p>
+                  </a:txBody>
+                  <a:tcPr/>
+                </a:tc>
+                <a:tc>
+                  <a:txBody>
+                    <a:bodyPr/>
+                    <a:lstStyle/>
+                    <a:p>
+                      <a:r>
+                        <a:rPr sz="1050">
+                          <a:solidFill>
+                            <a:srgbClr val="3D5466"/>
+                          </a:solidFill>
+                          <a:latin typeface="Arial"/>
+                        </a:rPr>
+                        <a:t>&gt; 20 %</a:t>
+                      </a:r>
+                    </a:p>
+                  </a:txBody>
+                  <a:tcPr/>
+                </a:tc>
+                <a:tc>
+                  <a:txBody>
+                    <a:bodyPr/>
+                    <a:lstStyle/>
+                    <a:p>
+                      <a:r>
+                        <a:rPr sz="1050">
+                          <a:solidFill>
+                            <a:srgbClr val="3D5466"/>
+                          </a:solidFill>
+                          <a:latin typeface="Arial"/>
+                        </a:rPr>
+                        <a:t>10–20 %</a:t>
+                      </a:r>
+                    </a:p>
+                  </a:txBody>
+                  <a:tcPr/>
+                </a:tc>
+                <a:tc>
+                  <a:txBody>
+                    <a:bodyPr/>
+                    <a:lstStyle/>
+                    <a:p>
+                      <a:r>
+                        <a:rPr sz="1050">
+                          <a:solidFill>
+                            <a:srgbClr val="3D5466"/>
+                          </a:solidFill>
+                          <a:latin typeface="Arial"/>
+                        </a:rPr>
+                        <a:t>&lt; 10 %</a:t>
+                      </a:r>
+                    </a:p>
+                  </a:txBody>
+                  <a:tcPr/>
+                </a:tc>
+              </a:tr>
+              <a:tr h="384048">
+                <a:tc>
+                  <a:txBody>
+                    <a:bodyPr/>
+                    <a:lstStyle/>
+                    <a:p>
+                      <a:r>
+                        <a:rPr sz="1050">
+                          <a:solidFill>
+                            <a:srgbClr val="3D5466"/>
+                          </a:solidFill>
+                          <a:latin typeface="Arial"/>
+                        </a:rPr>
+                        <a:t>KK-Inanspruchnahme (Ø)</a:t>
+                      </a:r>
+                    </a:p>
+                  </a:txBody>
+                  <a:tcPr/>
+                </a:tc>
+                <a:tc>
+                  <a:txBody>
+                    <a:bodyPr/>
+                    <a:lstStyle/>
+                    <a:p>
+                      <a:r>
+                        <a:rPr sz="1050">
+                          <a:solidFill>
+                            <a:srgbClr val="3D5466"/>
+                          </a:solidFill>
+                          <a:latin typeface="Arial"/>
+                        </a:rPr>
+                        <a:t>Ø-Inanspruchnahme / Limit × 100</a:t>
+                      </a:r>
+                    </a:p>
+                  </a:txBody>
+                  <a:tcPr/>
+                </a:tc>
+                <a:tc>
+                  <a:txBody>
+                    <a:bodyPr/>
+                    <a:lstStyle/>
+                    <a:p>
+                      <a:r>
+                        <a:rPr sz="1050">
+                          <a:solidFill>
+                            <a:srgbClr val="3D5466"/>
+                          </a:solidFill>
+                          <a:latin typeface="Arial"/>
+                        </a:rPr>
+                        <a:t>&lt; 60 %</a:t>
+                      </a:r>
+                    </a:p>
+                  </a:txBody>
+                  <a:tcPr/>
+                </a:tc>
+                <a:tc>
+                  <a:txBody>
+                    <a:bodyPr/>
+                    <a:lstStyle/>
+                    <a:p>
+                      <a:r>
+                        <a:rPr sz="1050">
+                          <a:solidFill>
+                            <a:srgbClr val="3D5466"/>
+                          </a:solidFill>
+                          <a:latin typeface="Arial"/>
+                        </a:rPr>
+                        <a:t>60–85 %</a:t>
+                      </a:r>
+                    </a:p>
+                  </a:txBody>
+                  <a:tcPr/>
+                </a:tc>
+                <a:tc>
+                  <a:txBody>
+                    <a:bodyPr/>
+                    <a:lstStyle/>
+                    <a:p>
+                      <a:r>
+                        <a:rPr sz="1050">
+                          <a:solidFill>
+                            <a:srgbClr val="3D5466"/>
+                          </a:solidFill>
+                          <a:latin typeface="Arial"/>
+                        </a:rPr>
+                        <a:t>&gt; 85 %</a:t>
+                      </a:r>
+                    </a:p>
+                  </a:txBody>
+                  <a:tcPr/>
+                </a:tc>
+              </a:tr>
+              <a:tr h="384048">
+                <a:tc>
+                  <a:txBody>
+                    <a:bodyPr/>
+                    <a:lstStyle/>
+                    <a:p>
+                      <a:r>
+                        <a:rPr sz="1050">
+                          <a:solidFill>
+                            <a:srgbClr val="3D5466"/>
+                          </a:solidFill>
+                          <a:latin typeface="Arial"/>
+                        </a:rPr>
+                        <a:t>Jahresabschluss-Vorlage</a:t>
+                      </a:r>
+                    </a:p>
+                  </a:txBody>
+                  <a:tcPr/>
+                </a:tc>
+                <a:tc>
+                  <a:txBody>
+                    <a:bodyPr/>
+                    <a:lstStyle/>
+                    <a:p>
+                      <a:r>
+                        <a:rPr sz="1050">
+                          <a:solidFill>
+                            <a:srgbClr val="3D5466"/>
+                          </a:solidFill>
+                          <a:latin typeface="Arial"/>
+                        </a:rPr>
+                        <a:t>Monate nach Geschäftsjahresende</a:t>
+                      </a:r>
+                    </a:p>
+                  </a:txBody>
+                  <a:tcPr/>
+                </a:tc>
+                <a:tc>
+                  <a:txBody>
+                    <a:bodyPr/>
+                    <a:lstStyle/>
+                    <a:p>
+                      <a:r>
+                        <a:rPr sz="1050">
+                          <a:solidFill>
+                            <a:srgbClr val="3D5466"/>
+                          </a:solidFill>
+                          <a:latin typeface="Arial"/>
+                        </a:rPr>
+                        <a:t>&lt; 6</a:t>
+                      </a:r>
+                    </a:p>
+                  </a:txBody>
+                  <a:tcPr/>
+                </a:tc>
+                <a:tc>
+                  <a:txBody>
+                    <a:bodyPr/>
+                    <a:lstStyle/>
+                    <a:p>
+                      <a:r>
+                        <a:rPr sz="1050">
+                          <a:solidFill>
+                            <a:srgbClr val="3D5466"/>
+                          </a:solidFill>
+                          <a:latin typeface="Arial"/>
+                        </a:rPr>
+                        <a:t>6–9</a:t>
+                      </a:r>
+                    </a:p>
+                  </a:txBody>
+                  <a:tcPr/>
+                </a:tc>
+                <a:tc>
+                  <a:txBody>
+                    <a:bodyPr/>
+                    <a:lstStyle/>
+                    <a:p>
+                      <a:r>
+                        <a:rPr sz="1050">
+                          <a:solidFill>
+                            <a:srgbClr val="3D5466"/>
+                          </a:solidFill>
+                          <a:latin typeface="Arial"/>
+                        </a:rPr>
+                        <a:t>&gt; 9 / Verweigerung</a:t>
+                      </a:r>
+                    </a:p>
+                  </a:txBody>
+                  <a:tcPr/>
+                </a:tc>
+              </a:tr>
+            </a:tbl>
+          </a:graphicData>
+        </a:graphic>
+      </p:graphicFrame>
       <p:sp>
         <p:nvSpPr>
           <p:cNvPr id="8" name="Rectangle 7"/>
@@ -8106,7 +9723,7 @@
                 </a:solidFill>
                 <a:latin typeface="JetBrains Mono"/>
               </a:rPr>
-              <a:t>Schaubild</a:t>
+              <a:t>Übersicht</a:t>
             </a:r>
           </a:p>
         </p:txBody>
@@ -8366,7 +9983,7 @@
                 </a:solidFill>
                 <a:latin typeface="Source Serif 4"/>
               </a:rPr>
-              <a:t>Eskalationspfade – Wer handelt wann?</a:t>
+              <a:t>Ampel-Checkliste: Gesamtbewertung Kreditrisiko</a:t>
             </a:r>
           </a:p>
         </p:txBody>
@@ -8392,6 +10009,25 @@
             <a:spAutoFit/>
           </a:bodyPr>
           <a:lstStyle/>
+          <a:p>
+            <a:pPr>
+              <a:spcBef>
+                <a:spcPts val="400"/>
+              </a:spcBef>
+              <a:spcAft>
+                <a:spcPts val="200"/>
+              </a:spcAft>
+            </a:pPr>
+            <a:r>
+              <a:rPr sz="1300">
+                <a:solidFill>
+                  <a:srgbClr val="3D5466"/>
+                </a:solidFill>
+                <a:latin typeface="Arial"/>
+              </a:rPr>
+              <a:t>▸  Anleitung: Bewerten Sie jeden Indikator mit Grün (0 Punkte), Gelb (1 Punkt) oder Rot (2 Punkte).</a:t>
+            </a:r>
+          </a:p>
           <a:p>
             <a:pPr>
               <a:spcBef>
@@ -8408,26 +10044,7 @@
                 </a:solidFill>
                 <a:latin typeface="Arial"/>
               </a:rPr>
-              <a:t>→  Dokumentation in agree: Jeder Gelb- oder Rot-Befund wird im Risikovermerk dokumentiert: Datum, Indikator, Bewertung, nächste Maßnahme, Verantwortlicher. Das ist Revisionspflicht .</a:t>
-            </a:r>
-          </a:p>
-          <a:p>
-            <a:pPr>
-              <a:spcBef>
-                <a:spcPts val="400"/>
-              </a:spcBef>
-              <a:spcAft>
-                <a:spcPts val="200"/>
-              </a:spcAft>
-            </a:pPr>
-            <a:r>
-              <a:rPr sz="1200">
-                <a:solidFill>
-                  <a:srgbClr val="3D5466"/>
-                </a:solidFill>
-                <a:latin typeface="Arial"/>
-              </a:rPr>
-              <a:t>Die folgende Karte verknüpft die erkannten Risikosignale direkt mit konkreten Handlungsschritten und zeigt, wann welche Maßnahme angemessen ist.</a:t>
+              <a:t>→  Einzel-Rot-Trigger: Bei Jahresabschluss-Verweigerung, laufendem Zinsverzug oder Kenntnis eines Insolvenzantrags → unabhängig vom Gesamtscore sofort eskalieren.</a:t>
             </a:r>
           </a:p>
         </p:txBody>

--- a/protected-downloads/praesentation/M04.pptx
+++ b/protected-downloads/praesentation/M04.pptx
@@ -4507,7 +4507,7 @@
                 </a:solidFill>
                 <a:latin typeface="JetBrains Mono"/>
               </a:rPr>
-              <a:t>Benedikt Zoller Coaching  ·  FKB Campus  ·  2026</a:t>
+              <a:t>FKB Campus  ·  2026</a:t>
             </a:r>
           </a:p>
         </p:txBody>
@@ -4861,7 +4861,7 @@
                 </a:solidFill>
                 <a:latin typeface="JetBrains Mono"/>
               </a:rPr>
-              <a:t>Benedikt Zoller Coaching  ·  FKB Campus  ·  M04</a:t>
+              <a:t>FKB Campus  ·  M04</a:t>
             </a:r>
           </a:p>
         </p:txBody>
@@ -5295,7 +5295,7 @@
                 </a:solidFill>
                 <a:latin typeface="JetBrains Mono"/>
               </a:rPr>
-              <a:t>Benedikt Zoller Coaching  ·  FKB Campus  ·  M04</a:t>
+              <a:t>FKB Campus  ·  M04</a:t>
             </a:r>
           </a:p>
         </p:txBody>
@@ -5614,7 +5614,7 @@
                 </a:solidFill>
                 <a:latin typeface="JetBrains Mono"/>
               </a:rPr>
-              <a:t>Benedikt Zoller Coaching  ·  FKB Campus  ·  M04</a:t>
+              <a:t>FKB Campus  ·  M04</a:t>
             </a:r>
           </a:p>
         </p:txBody>
@@ -6183,7 +6183,7 @@
                 </a:solidFill>
                 <a:latin typeface="JetBrains Mono"/>
               </a:rPr>
-              <a:t>Benedikt Zoller Coaching  ·  FKB Campus  ·  M04</a:t>
+              <a:t>FKB Campus  ·  M04</a:t>
             </a:r>
           </a:p>
         </p:txBody>
@@ -6549,7 +6549,7 @@
                 </a:solidFill>
                 <a:latin typeface="JetBrains Mono"/>
               </a:rPr>
-              <a:t>Benedikt Zoller Coaching  ·  FKB Campus  ·  M04</a:t>
+              <a:t>FKB Campus  ·  M04</a:t>
             </a:r>
           </a:p>
         </p:txBody>
@@ -6943,7 +6943,7 @@
                 </a:solidFill>
                 <a:latin typeface="JetBrains Mono"/>
               </a:rPr>
-              <a:t>Benedikt Zoller Coaching  ·  FKB Campus  ·  M04</a:t>
+              <a:t>FKB Campus  ·  M04</a:t>
             </a:r>
           </a:p>
         </p:txBody>
@@ -7557,7 +7557,7 @@
                 </a:solidFill>
                 <a:latin typeface="JetBrains Mono"/>
               </a:rPr>
-              <a:t>Benedikt Zoller Coaching  ·  FKB Campus  ·  M04</a:t>
+              <a:t>FKB Campus  ·  M04</a:t>
             </a:r>
           </a:p>
         </p:txBody>
@@ -7937,7 +7937,7 @@
                 </a:solidFill>
                 <a:latin typeface="JetBrains Mono"/>
               </a:rPr>
-              <a:t>Benedikt Zoller Coaching  ·  FKB Campus  ·  M04</a:t>
+              <a:t>FKB Campus  ·  M04</a:t>
             </a:r>
           </a:p>
         </p:txBody>
@@ -8336,7 +8336,7 @@
                 </a:solidFill>
                 <a:latin typeface="JetBrains Mono"/>
               </a:rPr>
-              <a:t>Benedikt Zoller Coaching  ·  FKB Campus  ·  M04</a:t>
+              <a:t>FKB Campus  ·  M04</a:t>
             </a:r>
           </a:p>
         </p:txBody>
@@ -8792,7 +8792,7 @@
                 </a:solidFill>
                 <a:latin typeface="JetBrains Mono"/>
               </a:rPr>
-              <a:t>Benedikt Zoller Coaching  ·  FKB Campus  ·  M04</a:t>
+              <a:t>FKB Campus  ·  M04</a:t>
             </a:r>
           </a:p>
         </p:txBody>
@@ -9688,7 +9688,7 @@
                 </a:solidFill>
                 <a:latin typeface="JetBrains Mono"/>
               </a:rPr>
-              <a:t>Benedikt Zoller Coaching  ·  FKB Campus  ·  M04</a:t>
+              <a:t>FKB Campus  ·  M04</a:t>
             </a:r>
           </a:p>
         </p:txBody>
@@ -10122,7 +10122,7 @@
                 </a:solidFill>
                 <a:latin typeface="JetBrains Mono"/>
               </a:rPr>
-              <a:t>Benedikt Zoller Coaching  ·  FKB Campus  ·  M04</a:t>
+              <a:t>FKB Campus  ·  M04</a:t>
             </a:r>
           </a:p>
         </p:txBody>

--- a/protected-downloads/praesentation/M04.pptx
+++ b/protected-downloads/praesentation/M04.pptx
@@ -7276,7 +7276,7 @@
                 </a:solidFill>
                 <a:latin typeface="Consolas"/>
               </a:rPr>
-              <a:t>15–30       </a:t>
+              <a:t>15–32       </a:t>
             </a:r>
             <a:r>
               <a:rPr sz="1500" b="1">
@@ -7313,7 +7313,7 @@
                 </a:solidFill>
                 <a:latin typeface="Consolas"/>
               </a:rPr>
-              <a:t>30–45       </a:t>
+              <a:t>32–47       </a:t>
             </a:r>
             <a:r>
               <a:rPr sz="1500" b="1">
@@ -7350,7 +7350,7 @@
                 </a:solidFill>
                 <a:latin typeface="Consolas"/>
               </a:rPr>
-              <a:t>45–65       </a:t>
+              <a:t>47–72       </a:t>
             </a:r>
             <a:r>
               <a:rPr sz="1500" b="1">
@@ -7387,7 +7387,7 @@
                 </a:solidFill>
                 <a:latin typeface="Consolas"/>
               </a:rPr>
-              <a:t>65–80       </a:t>
+              <a:t>72–90       </a:t>
             </a:r>
             <a:r>
               <a:rPr sz="1500" b="1">
@@ -7424,7 +7424,7 @@
                 </a:solidFill>
                 <a:latin typeface="Consolas"/>
               </a:rPr>
-              <a:t>80–88       </a:t>
+              <a:t>90–98       </a:t>
             </a:r>
             <a:r>
               <a:rPr sz="1500" b="1">
@@ -7461,7 +7461,7 @@
                 </a:solidFill>
                 <a:latin typeface="Consolas"/>
               </a:rPr>
-              <a:t>88–90       </a:t>
+              <a:t>98–100      </a:t>
             </a:r>
             <a:r>
               <a:rPr sz="1500" b="1">

--- a/protected-downloads/praesentation/M04.pptx
+++ b/protected-downloads/praesentation/M04.pptx
@@ -4429,7 +4429,7 @@
                 </a:solidFill>
                 <a:latin typeface="Arial"/>
               </a:rPr>
-              <a:t>v1.2</a:t>
+              <a:t>v1.0</a:t>
             </a:r>
           </a:p>
         </p:txBody>

--- a/protected-downloads/praesentation/M04.pptx
+++ b/protected-downloads/praesentation/M04.pptx
@@ -4104,7 +4104,7 @@
                 <a:solidFill>
                   <a:srgbClr val="C8D2E6"/>
                 </a:solidFill>
-                <a:latin typeface="JetBrains Mono"/>
+                <a:latin typeface="Consolas"/>
               </a:rPr>
               <a:t>FKB CAMPUS  ·  FIRMENKUNDENAKADEMIE  ·  M04</a:t>
             </a:r>
@@ -4139,7 +4139,7 @@
                 <a:solidFill>
                   <a:srgbClr val="FFFFFF"/>
                 </a:solidFill>
-                <a:latin typeface="Source Serif 4"/>
+                <a:latin typeface="Arial"/>
               </a:rPr>
               <a:t>Kreditrisikofrüherkennung</a:t>
             </a:r>
@@ -4174,7 +4174,7 @@
                 <a:solidFill>
                   <a:srgbClr val="BECDE6"/>
                 </a:solidFill>
-                <a:latin typeface="Source Serif 4"/>
+                <a:latin typeface="Arial"/>
               </a:rPr>
               <a:t>Warnsignale systematisch erkennen und professionell handeln</a:t>
             </a:r>
@@ -4252,7 +4252,7 @@
                 <a:solidFill>
                   <a:srgbClr val="A0B4D2"/>
                 </a:solidFill>
-                <a:latin typeface="JetBrains Mono"/>
+                <a:latin typeface="Consolas"/>
               </a:rPr>
               <a:t>KOMPETENZFELD</a:t>
             </a:r>
@@ -4322,7 +4322,7 @@
                 <a:solidFill>
                   <a:srgbClr val="A0B4D2"/>
                 </a:solidFill>
-                <a:latin typeface="JetBrains Mono"/>
+                <a:latin typeface="Consolas"/>
               </a:rPr>
               <a:t>KOMPETENZSTUFE</a:t>
             </a:r>
@@ -4392,7 +4392,7 @@
                 <a:solidFill>
                   <a:srgbClr val="A0B4D2"/>
                 </a:solidFill>
-                <a:latin typeface="JetBrains Mono"/>
+                <a:latin typeface="Consolas"/>
               </a:rPr>
               <a:t>VERSION</a:t>
             </a:r>
@@ -4505,7 +4505,7 @@
                 <a:solidFill>
                   <a:srgbClr val="96A5BE"/>
                 </a:solidFill>
-                <a:latin typeface="JetBrains Mono"/>
+                <a:latin typeface="Consolas"/>
               </a:rPr>
               <a:t>FKB Campus  ·  2026</a:t>
             </a:r>
@@ -4540,7 +4540,7 @@
                 <a:solidFill>
                   <a:srgbClr val="96A5BE"/>
                 </a:solidFill>
-                <a:latin typeface="JetBrains Mono"/>
+                <a:latin typeface="Consolas"/>
               </a:rPr>
               <a:t>Trainer-Präsentation</a:t>
             </a:r>
@@ -4679,7 +4679,7 @@
                 <a:solidFill>
                   <a:srgbClr val="78808C"/>
                 </a:solidFill>
-                <a:latin typeface="JetBrains Mono"/>
+                <a:latin typeface="Consolas"/>
               </a:rPr>
               <a:t>M04  ·  SCHAUBILD</a:t>
             </a:r>
@@ -4714,7 +4714,7 @@
                 <a:solidFill>
                   <a:srgbClr val="1F2C56"/>
                 </a:solidFill>
-                <a:latin typeface="Source Serif 4"/>
+                <a:latin typeface="Arial"/>
               </a:rPr>
               <a:t>Frühwarn-Ampelkarte</a:t>
             </a:r>
@@ -4859,7 +4859,7 @@
                 <a:solidFill>
                   <a:srgbClr val="A0B4D2"/>
                 </a:solidFill>
-                <a:latin typeface="JetBrains Mono"/>
+                <a:latin typeface="Consolas"/>
               </a:rPr>
               <a:t>FKB Campus  ·  M04</a:t>
             </a:r>
@@ -4894,7 +4894,7 @@
                 <a:solidFill>
                   <a:srgbClr val="A0B4D2"/>
                 </a:solidFill>
-                <a:latin typeface="JetBrains Mono"/>
+                <a:latin typeface="Consolas"/>
               </a:rPr>
               <a:t>Schaubild</a:t>
             </a:r>
@@ -5033,7 +5033,7 @@
                 <a:solidFill>
                   <a:srgbClr val="78808C"/>
                 </a:solidFill>
-                <a:latin typeface="JetBrains Mono"/>
+                <a:latin typeface="Consolas"/>
               </a:rPr>
               <a:t>M04  ·  INHALT</a:t>
             </a:r>
@@ -5154,7 +5154,7 @@
                 <a:solidFill>
                   <a:srgbClr val="1F2C56"/>
                 </a:solidFill>
-                <a:latin typeface="Source Serif 4"/>
+                <a:latin typeface="Arial"/>
               </a:rPr>
               <a:t>Eskalationspfade – Wer handelt wann?</a:t>
             </a:r>
@@ -5170,7 +5170,7 @@
         <p:spPr>
           <a:xfrm>
             <a:off x="685800" y="1417320"/>
-            <a:ext cx="10817352" cy="5029200"/>
+            <a:ext cx="10817352" cy="4892040"/>
           </a:xfrm>
           <a:prstGeom prst="rect">
             <a:avLst/>
@@ -5178,12 +5178,12 @@
           <a:noFill/>
         </p:spPr>
         <p:txBody>
-          <a:bodyPr wrap="square">
+          <a:bodyPr wrap="square" anchor="ctr">
             <a:spAutoFit/>
           </a:bodyPr>
           <a:lstStyle/>
           <a:p>
-            <a:pPr>
+            <a:pPr marL="177800" indent="-177800">
               <a:spcBef>
                 <a:spcPts val="600"/>
               </a:spcBef>
@@ -5202,7 +5202,7 @@
             </a:r>
           </a:p>
           <a:p>
-            <a:pPr>
+            <a:pPr marL="190500" indent="-190500">
               <a:spcBef>
                 <a:spcPts val="400"/>
               </a:spcBef>
@@ -5293,7 +5293,7 @@
                 <a:solidFill>
                   <a:srgbClr val="A0B4D2"/>
                 </a:solidFill>
-                <a:latin typeface="JetBrains Mono"/>
+                <a:latin typeface="Consolas"/>
               </a:rPr>
               <a:t>FKB Campus  ·  M04</a:t>
             </a:r>
@@ -5432,7 +5432,7 @@
                 <a:solidFill>
                   <a:srgbClr val="78808C"/>
                 </a:solidFill>
-                <a:latin typeface="JetBrains Mono"/>
+                <a:latin typeface="Consolas"/>
               </a:rPr>
               <a:t>M04  ·  SCHAUBILD</a:t>
             </a:r>
@@ -5467,7 +5467,7 @@
                 <a:solidFill>
                   <a:srgbClr val="1F2C56"/>
                 </a:solidFill>
-                <a:latin typeface="Source Serif 4"/>
+                <a:latin typeface="Arial"/>
               </a:rPr>
               <a:t>Handlungsempfehlung Wenn-Dann</a:t>
             </a:r>
@@ -5612,7 +5612,7 @@
                 <a:solidFill>
                   <a:srgbClr val="A0B4D2"/>
                 </a:solidFill>
-                <a:latin typeface="JetBrains Mono"/>
+                <a:latin typeface="Consolas"/>
               </a:rPr>
               <a:t>FKB Campus  ·  M04</a:t>
             </a:r>
@@ -5647,7 +5647,7 @@
                 <a:solidFill>
                   <a:srgbClr val="A0B4D2"/>
                 </a:solidFill>
-                <a:latin typeface="JetBrains Mono"/>
+                <a:latin typeface="Consolas"/>
               </a:rPr>
               <a:t>Schaubild</a:t>
             </a:r>
@@ -5786,7 +5786,7 @@
                 <a:solidFill>
                   <a:srgbClr val="78808C"/>
                 </a:solidFill>
-                <a:latin typeface="JetBrains Mono"/>
+                <a:latin typeface="Consolas"/>
               </a:rPr>
               <a:t>M04  ·  ARBEITSBLATT</a:t>
             </a:r>
@@ -5907,7 +5907,7 @@
                 <a:solidFill>
                   <a:srgbClr val="1F2C56"/>
                 </a:solidFill>
-                <a:latin typeface="Source Serif 4"/>
+                <a:latin typeface="Arial"/>
               </a:rPr>
               <a:t>Praxiscase: Renner Metallverarbeitung GmbH</a:t>
             </a:r>
@@ -5936,7 +5936,7 @@
           </a:bodyPr>
           <a:lstStyle/>
           <a:p>
-            <a:pPr>
+            <a:pPr marL="190500" indent="-190500">
               <a:spcBef>
                 <a:spcPts val="400"/>
               </a:spcBef>
@@ -5955,7 +5955,7 @@
             </a:r>
           </a:p>
           <a:p>
-            <a:pPr>
+            <a:pPr marL="190500" indent="-190500">
               <a:spcBef>
                 <a:spcPts val="400"/>
               </a:spcBef>
@@ -5974,7 +5974,7 @@
             </a:r>
           </a:p>
           <a:p>
-            <a:pPr>
+            <a:pPr marL="190500" indent="-190500">
               <a:spcBef>
                 <a:spcPts val="400"/>
               </a:spcBef>
@@ -5993,7 +5993,7 @@
             </a:r>
           </a:p>
           <a:p>
-            <a:pPr>
+            <a:pPr marL="190500" indent="-190500">
               <a:spcBef>
                 <a:spcPts val="400"/>
               </a:spcBef>
@@ -6012,7 +6012,7 @@
             </a:r>
           </a:p>
           <a:p>
-            <a:pPr>
+            <a:pPr marL="190500" indent="-190500">
               <a:spcBef>
                 <a:spcPts val="400"/>
               </a:spcBef>
@@ -6181,7 +6181,7 @@
                 <a:solidFill>
                   <a:srgbClr val="A0B4D2"/>
                 </a:solidFill>
-                <a:latin typeface="JetBrains Mono"/>
+                <a:latin typeface="Consolas"/>
               </a:rPr>
               <a:t>FKB Campus  ·  M04</a:t>
             </a:r>
@@ -6320,7 +6320,7 @@
                 <a:solidFill>
                   <a:srgbClr val="78808C"/>
                 </a:solidFill>
-                <a:latin typeface="JetBrains Mono"/>
+                <a:latin typeface="Consolas"/>
               </a:rPr>
               <a:t>ÜBERBLICK  ·  M04</a:t>
             </a:r>
@@ -6398,7 +6398,7 @@
                 <a:solidFill>
                   <a:srgbClr val="1F2C56"/>
                 </a:solidFill>
-                <a:latin typeface="Source Serif 4"/>
+                <a:latin typeface="Arial"/>
               </a:rPr>
               <a:t>Worum geht es heute</a:t>
             </a:r>
@@ -6547,7 +6547,7 @@
                 <a:solidFill>
                   <a:srgbClr val="A0B4D2"/>
                 </a:solidFill>
-                <a:latin typeface="JetBrains Mono"/>
+                <a:latin typeface="Consolas"/>
               </a:rPr>
               <a:t>FKB Campus  ·  M04</a:t>
             </a:r>
@@ -6686,7 +6686,7 @@
                 <a:solidFill>
                   <a:srgbClr val="78808C"/>
                 </a:solidFill>
-                <a:latin typeface="JetBrains Mono"/>
+                <a:latin typeface="Consolas"/>
               </a:rPr>
               <a:t>LERNZIELE  ·  M04</a:t>
             </a:r>
@@ -6764,7 +6764,7 @@
                 <a:solidFill>
                   <a:srgbClr val="1F2C56"/>
                 </a:solidFill>
-                <a:latin typeface="Source Serif 4"/>
+                <a:latin typeface="Arial"/>
               </a:rPr>
               <a:t>Was Sie heute mitnehmen</a:t>
             </a:r>
@@ -6941,7 +6941,7 @@
                 <a:solidFill>
                   <a:srgbClr val="A0B4D2"/>
                 </a:solidFill>
-                <a:latin typeface="JetBrains Mono"/>
+                <a:latin typeface="Consolas"/>
               </a:rPr>
               <a:t>FKB Campus  ·  M04</a:t>
             </a:r>
@@ -7080,7 +7080,7 @@
                 <a:solidFill>
                   <a:srgbClr val="78808C"/>
                 </a:solidFill>
-                <a:latin typeface="JetBrains Mono"/>
+                <a:latin typeface="Consolas"/>
               </a:rPr>
               <a:t>AGENDA  ·  M04</a:t>
             </a:r>
@@ -7158,7 +7158,7 @@
                 <a:solidFill>
                   <a:srgbClr val="1F2C56"/>
                 </a:solidFill>
-                <a:latin typeface="Source Serif 4"/>
+                <a:latin typeface="Arial"/>
               </a:rPr>
               <a:t>So läuft das Modul</a:t>
             </a:r>
@@ -7555,7 +7555,7 @@
                 <a:solidFill>
                   <a:srgbClr val="A0B4D2"/>
                 </a:solidFill>
-                <a:latin typeface="JetBrains Mono"/>
+                <a:latin typeface="Consolas"/>
               </a:rPr>
               <a:t>FKB Campus  ·  M04</a:t>
             </a:r>
@@ -7694,7 +7694,7 @@
                 <a:solidFill>
                   <a:srgbClr val="78808C"/>
                 </a:solidFill>
-                <a:latin typeface="JetBrains Mono"/>
+                <a:latin typeface="Consolas"/>
               </a:rPr>
               <a:t>M04  ·  INHALT</a:t>
             </a:r>
@@ -7815,7 +7815,7 @@
                 <a:solidFill>
                   <a:srgbClr val="1F2C56"/>
                 </a:solidFill>
-                <a:latin typeface="Source Serif 4"/>
+                <a:latin typeface="Arial"/>
               </a:rPr>
               <a:t>Kreditrisiko – Grundbegriffe und Bedeutung für den Berater</a:t>
             </a:r>
@@ -7831,7 +7831,7 @@
         <p:spPr>
           <a:xfrm>
             <a:off x="685800" y="1417320"/>
-            <a:ext cx="10817352" cy="5029200"/>
+            <a:ext cx="10817352" cy="4892040"/>
           </a:xfrm>
           <a:prstGeom prst="rect">
             <a:avLst/>
@@ -7839,12 +7839,12 @@
           <a:noFill/>
         </p:spPr>
         <p:txBody>
-          <a:bodyPr wrap="square">
+          <a:bodyPr wrap="square" anchor="ctr">
             <a:spAutoFit/>
           </a:bodyPr>
           <a:lstStyle/>
           <a:p>
-            <a:pPr>
+            <a:pPr marL="190500" indent="-190500">
               <a:spcBef>
                 <a:spcPts val="400"/>
               </a:spcBef>
@@ -7935,7 +7935,7 @@
                 <a:solidFill>
                   <a:srgbClr val="A0B4D2"/>
                 </a:solidFill>
-                <a:latin typeface="JetBrains Mono"/>
+                <a:latin typeface="Consolas"/>
               </a:rPr>
               <a:t>FKB Campus  ·  M04</a:t>
             </a:r>
@@ -8074,7 +8074,7 @@
                 <a:solidFill>
                   <a:srgbClr val="78808C"/>
                 </a:solidFill>
-                <a:latin typeface="JetBrains Mono"/>
+                <a:latin typeface="Consolas"/>
               </a:rPr>
               <a:t>M04  ·  INHALT</a:t>
             </a:r>
@@ -8195,7 +8195,7 @@
                 <a:solidFill>
                   <a:srgbClr val="1F2C56"/>
                 </a:solidFill>
-                <a:latin typeface="Source Serif 4"/>
+                <a:latin typeface="Arial"/>
               </a:rPr>
               <a:t>Die vier Krisenphasen [Q-099]</a:t>
             </a:r>
@@ -8211,7 +8211,7 @@
         <p:spPr>
           <a:xfrm>
             <a:off x="685800" y="1417320"/>
-            <a:ext cx="10817352" cy="5029200"/>
+            <a:ext cx="10817352" cy="4892040"/>
           </a:xfrm>
           <a:prstGeom prst="rect">
             <a:avLst/>
@@ -8219,12 +8219,12 @@
           <a:noFill/>
         </p:spPr>
         <p:txBody>
-          <a:bodyPr wrap="square">
+          <a:bodyPr wrap="square" anchor="ctr">
             <a:spAutoFit/>
           </a:bodyPr>
           <a:lstStyle/>
           <a:p>
-            <a:pPr>
+            <a:pPr marL="190500" indent="-190500">
               <a:spcBef>
                 <a:spcPts val="400"/>
               </a:spcBef>
@@ -8243,7 +8243,7 @@
             </a:r>
           </a:p>
           <a:p>
-            <a:pPr>
+            <a:pPr marL="177800" indent="-177800">
               <a:spcBef>
                 <a:spcPts val="600"/>
               </a:spcBef>
@@ -8334,7 +8334,7 @@
                 <a:solidFill>
                   <a:srgbClr val="A0B4D2"/>
                 </a:solidFill>
-                <a:latin typeface="JetBrains Mono"/>
+                <a:latin typeface="Consolas"/>
               </a:rPr>
               <a:t>FKB Campus  ·  M04</a:t>
             </a:r>
@@ -8473,7 +8473,7 @@
                 <a:solidFill>
                   <a:srgbClr val="78808C"/>
                 </a:solidFill>
-                <a:latin typeface="JetBrains Mono"/>
+                <a:latin typeface="Consolas"/>
               </a:rPr>
               <a:t>M04  ·  INHALT</a:t>
             </a:r>
@@ -8594,7 +8594,7 @@
                 <a:solidFill>
                   <a:srgbClr val="1F2C56"/>
                 </a:solidFill>
-                <a:latin typeface="Source Serif 4"/>
+                <a:latin typeface="Arial"/>
               </a:rPr>
               <a:t>Frühwarnindikatoren – Quantitativ und Qualitativ</a:t>
             </a:r>
@@ -8610,7 +8610,7 @@
         <p:spPr>
           <a:xfrm>
             <a:off x="685800" y="1417320"/>
-            <a:ext cx="10817352" cy="5029200"/>
+            <a:ext cx="10817352" cy="4892040"/>
           </a:xfrm>
           <a:prstGeom prst="rect">
             <a:avLst/>
@@ -8618,12 +8618,12 @@
           <a:noFill/>
         </p:spPr>
         <p:txBody>
-          <a:bodyPr wrap="square">
+          <a:bodyPr wrap="square" anchor="ctr">
             <a:spAutoFit/>
           </a:bodyPr>
           <a:lstStyle/>
           <a:p>
-            <a:pPr>
+            <a:pPr marL="190500" indent="-190500">
               <a:spcBef>
                 <a:spcPts val="400"/>
               </a:spcBef>
@@ -8642,7 +8642,7 @@
             </a:r>
           </a:p>
           <a:p>
-            <a:pPr>
+            <a:pPr marL="190500" indent="-190500">
               <a:spcBef>
                 <a:spcPts val="400"/>
               </a:spcBef>
@@ -8661,7 +8661,7 @@
             </a:r>
           </a:p>
           <a:p>
-            <a:pPr>
+            <a:pPr marL="190500" indent="-190500">
               <a:spcBef>
                 <a:spcPts val="400"/>
               </a:spcBef>
@@ -8680,7 +8680,7 @@
             </a:r>
           </a:p>
           <a:p>
-            <a:pPr>
+            <a:pPr marL="190500" indent="-190500">
               <a:spcBef>
                 <a:spcPts val="400"/>
               </a:spcBef>
@@ -8699,7 +8699,7 @@
             </a:r>
           </a:p>
           <a:p>
-            <a:pPr>
+            <a:pPr marL="177800" indent="-177800">
               <a:spcBef>
                 <a:spcPts val="600"/>
               </a:spcBef>
@@ -8790,7 +8790,7 @@
                 <a:solidFill>
                   <a:srgbClr val="A0B4D2"/>
                 </a:solidFill>
-                <a:latin typeface="JetBrains Mono"/>
+                <a:latin typeface="Consolas"/>
               </a:rPr>
               <a:t>FKB Campus  ·  M04</a:t>
             </a:r>
@@ -8929,7 +8929,7 @@
                 <a:solidFill>
                   <a:srgbClr val="78808C"/>
                 </a:solidFill>
-                <a:latin typeface="JetBrains Mono"/>
+                <a:latin typeface="Consolas"/>
               </a:rPr>
               <a:t>M04  ·  ÜBERSICHT</a:t>
             </a:r>
@@ -8964,7 +8964,7 @@
                 <a:solidFill>
                   <a:srgbClr val="1F2C56"/>
                 </a:solidFill>
-                <a:latin typeface="Source Serif 4"/>
+                <a:latin typeface="Arial"/>
               </a:rPr>
               <a:t>Frühwarnindikatoren – Quantitativ und Qualitativ</a:t>
             </a:r>
@@ -9686,7 +9686,7 @@
                 <a:solidFill>
                   <a:srgbClr val="A0B4D2"/>
                 </a:solidFill>
-                <a:latin typeface="JetBrains Mono"/>
+                <a:latin typeface="Consolas"/>
               </a:rPr>
               <a:t>FKB Campus  ·  M04</a:t>
             </a:r>
@@ -9721,7 +9721,7 @@
                 <a:solidFill>
                   <a:srgbClr val="A0B4D2"/>
                 </a:solidFill>
-                <a:latin typeface="JetBrains Mono"/>
+                <a:latin typeface="Consolas"/>
               </a:rPr>
               <a:t>Übersicht</a:t>
             </a:r>
@@ -9860,7 +9860,7 @@
                 <a:solidFill>
                   <a:srgbClr val="78808C"/>
                 </a:solidFill>
-                <a:latin typeface="JetBrains Mono"/>
+                <a:latin typeface="Consolas"/>
               </a:rPr>
               <a:t>M04  ·  INHALT</a:t>
             </a:r>
@@ -9981,7 +9981,7 @@
                 <a:solidFill>
                   <a:srgbClr val="1F2C56"/>
                 </a:solidFill>
-                <a:latin typeface="Source Serif 4"/>
+                <a:latin typeface="Arial"/>
               </a:rPr>
               <a:t>Ampel-Checkliste: Gesamtbewertung Kreditrisiko</a:t>
             </a:r>
@@ -9997,7 +9997,7 @@
         <p:spPr>
           <a:xfrm>
             <a:off x="685800" y="1417320"/>
-            <a:ext cx="10817352" cy="5029200"/>
+            <a:ext cx="10817352" cy="4892040"/>
           </a:xfrm>
           <a:prstGeom prst="rect">
             <a:avLst/>
@@ -10005,12 +10005,12 @@
           <a:noFill/>
         </p:spPr>
         <p:txBody>
-          <a:bodyPr wrap="square">
+          <a:bodyPr wrap="square" anchor="ctr">
             <a:spAutoFit/>
           </a:bodyPr>
           <a:lstStyle/>
           <a:p>
-            <a:pPr>
+            <a:pPr marL="190500" indent="-190500">
               <a:spcBef>
                 <a:spcPts val="400"/>
               </a:spcBef>
@@ -10029,7 +10029,7 @@
             </a:r>
           </a:p>
           <a:p>
-            <a:pPr>
+            <a:pPr marL="177800" indent="-177800">
               <a:spcBef>
                 <a:spcPts val="600"/>
               </a:spcBef>
@@ -10120,7 +10120,7 @@
                 <a:solidFill>
                   <a:srgbClr val="A0B4D2"/>
                 </a:solidFill>
-                <a:latin typeface="JetBrains Mono"/>
+                <a:latin typeface="Consolas"/>
               </a:rPr>
               <a:t>FKB Campus  ·  M04</a:t>
             </a:r>

--- a/protected-downloads/praesentation/M04.pptx
+++ b/protected-downloads/praesentation/M04.pptx
@@ -18,6 +18,7 @@
     <p:sldId id="266" r:id="rId18"/>
     <p:sldId id="267" r:id="rId19"/>
     <p:sldId id="268" r:id="rId20"/>
+    <p:sldId id="269" r:id="rId21"/>
   </p:sldIdLst>
   <p:sldSz cx="12188952" cy="6858000" type="screen4x3"/>
   <p:notesSz cx="6858000" cy="9144000"/>
@@ -584,7 +585,7 @@
           <a:lstStyle/>
           <a:p>
             <a:r>
-              <a:t>Siehe Trainerhandbuch (Sektion 3) für Moderationshinweise, Timing und erwartete Teilnehmerreaktionen.</a:t>
+              <a:t>Einstieg: „Woran haben Sie zuletzt gemerkt, dass es bei einem Kunden kippt – bevor es die Zahlen zeigten?"</a:t>
             </a:r>
           </a:p>
         </p:txBody>
@@ -654,7 +655,7 @@
           <a:lstStyle/>
           <a:p>
             <a:r>
-              <a:t>Siehe Trainerhandbuch (Sektion 3) für Moderationshinweise, Timing und erwartete Teilnehmerreaktionen.</a:t>
+              <a:t>Kernbotschaft: in der Strategie-/Ertragskrise ist der Kunde noch gestaltbar; in der Liquiditätskrise wird es Schadensbegrenzung.</a:t>
             </a:r>
           </a:p>
         </p:txBody>
@@ -724,7 +725,7 @@
           <a:lstStyle/>
           <a:p>
             <a:r>
-              <a:t>Siehe Trainerhandbuch (Sektion 3) für Moderationshinweise, Timing und erwartete Teilnehmerreaktionen.</a:t>
+              <a:t>Die Ampel-Checkliste bündelt beide Dimensionen zu einer Gesamtbewertung.</a:t>
             </a:r>
           </a:p>
         </p:txBody>
@@ -794,7 +795,7 @@
           <a:lstStyle/>
           <a:p>
             <a:r>
-              <a:t>Siehe Trainerhandbuch (Sektion 3) für Moderationshinweise, Timing und erwartete Teilnehmerreaktionen.</a:t>
+              <a:t>Revisionssichere agree-Dokumentation als Mindeststandard. Die Handlungsempfehlung verbindet Signal und Reaktion.</a:t>
             </a:r>
           </a:p>
         </p:txBody>
@@ -864,7 +865,12 @@
           <a:lstStyle/>
           <a:p>
             <a:r>
-              <a:t>Siehe Trainerhandbuch (Sektion 3) für Moderationshinweise, Timing und erwartete Teilnehmerreaktionen.</a:t>
+              <a:t>AB Musterlösung (Trainer-Version)</a:t>
+            </a:r>
+          </a:p>
+          <a:p>
+            <a:r>
+              <a:t>Renner: mehrere gelbe/rote Signale (Kontokorrent-Auslastung, verzögerter Jahresabschluss). Ergebnis: rote Ampel, Meldung Teamleiter + Marktfolge, revisionssicherer Vermerk.</a:t>
             </a:r>
           </a:p>
         </p:txBody>
@@ -934,57 +940,77 @@
           <a:lstStyle/>
           <a:p>
             <a:r>
-              <a:t>Musterlösung (Trainer-Version)</a:t>
-            </a:r>
-          </a:p>
-          <a:p>
-            <a:r>
-              <a:t>AB-1 Ergebnisse:</a:t>
-            </a:r>
-          </a:p>
-          <a:p>
-            <a:r>
-              <a:t>Gesamtpunktzahl: mindestens 13–15 / 20 → Rot-Einstufung</a:t>
-            </a:r>
-          </a:p>
-          <a:p>
-            <a:r>
-              <a:t>AB-2 Musterlösung:</a:t>
-            </a:r>
-          </a:p>
-          <a:p>
-            <a:r>
-              <a:t>Krisenphase 2 (Latente Krise): Krise ist vorhanden (Leverage 5,4x, KK 91 %, fallende EBITDA-Marge über 3 Jahre), aber noch kein Zahlungsausfall. Übergang zu Phase 3 droht ohne Gegenmaßnahmen.</a:t>
-            </a:r>
-          </a:p>
-          <a:p>
-            <a:r>
-              <a:t>Dominantes Signal: Leverage 5,4x bei fallendem EBITDA — der Schuldendienst ist gefährdet. Ergänzend: KK-Inanspruchnahme 91 % = Liquiditätspuffer nahezu aufgebraucht.</a:t>
-            </a:r>
-          </a:p>
-          <a:p>
-            <a:r>
-              <a:t>Eskalation Rot: Sofortige Meldung an Teamleiter (&lt; 48 Stunden). Keine eigenständigen Zusagen oder Linienerhöhungen. Marktfolge zur Sicherheitenbewertung einschalten.</a:t>
-            </a:r>
-          </a:p>
-          <a:p>
-            <a:r>
-              <a:t>Musterformulierungen Aufgabe A4:</a:t>
-            </a:r>
-          </a:p>
-          <a:p>
-            <a:r>
-              <a:t>1. „Wie entwickelt sich der Auftragsbestand bei Ihrem Hauptkunden — haben Sie Aufträge für die nächsten 6 Monate gesichert?"</a:t>
-            </a:r>
-          </a:p>
-          <a:p>
-            <a:r>
-              <a:t>2. „Ihr Jahresabschluss liegt uns noch nicht vor. Können wir Ihren Steuerberater direkt kontaktieren?"</a:t>
-            </a:r>
-          </a:p>
-          <a:p>
-            <a:r>
-              <a:t>3. „Wie haben Sie die langfristige Führung des Unternehmens geregelt — haben Sie schon konkrete Überlegungen zur Nachfolge?"</a:t>
+              <a:t>Überleitung zum Selbstcheck und Transfer.</a:t>
+            </a:r>
+          </a:p>
+        </p:txBody>
+      </p:sp>
+      <p:sp>
+        <p:nvSpPr>
+          <p:cNvPr id="4" name="Slide Number Placeholder 3"/>
+          <p:cNvSpPr>
+            <a:spLocks noGrp="1"/>
+          </p:cNvSpPr>
+          <p:nvPr>
+            <p:ph type="sldNum" idx="5" sz="quarter"/>
+          </p:nvPr>
+        </p:nvSpPr>
+        <p:spPr/>
+      </p:sp>
+    </p:spTree>
+  </p:cSld>
+  <p:clrMapOvr>
+    <a:masterClrMapping/>
+  </p:clrMapOvr>
+</p:notes>
+</file>
+
+<file path=ppt/notesSlides/notesSlide8.xml><?xml version="1.0" encoding="utf-8"?>
+<p:notes xmlns:a="http://schemas.openxmlformats.org/drawingml/2006/main" xmlns:p="http://schemas.openxmlformats.org/presentationml/2006/main" xmlns:r="http://schemas.openxmlformats.org/officeDocument/2006/relationships">
+  <p:cSld>
+    <p:spTree>
+      <p:nvGrpSpPr>
+        <p:cNvPr id="1" name=""/>
+        <p:cNvGrpSpPr/>
+        <p:nvPr/>
+      </p:nvGrpSpPr>
+      <p:grpSpPr>
+        <a:xfrm>
+          <a:off x="0" y="0"/>
+          <a:ext cx="0" cy="0"/>
+          <a:chOff x="0" y="0"/>
+          <a:chExt cx="0" cy="0"/>
+        </a:xfrm>
+      </p:grpSpPr>
+      <p:sp>
+        <p:nvSpPr>
+          <p:cNvPr id="2" name="Slide Image Placeholder 1"/>
+          <p:cNvSpPr>
+            <a:spLocks noGrp="1"/>
+          </p:cNvSpPr>
+          <p:nvPr>
+            <p:ph type="sldImg" idx="2"/>
+          </p:nvPr>
+        </p:nvSpPr>
+        <p:spPr/>
+      </p:sp>
+      <p:sp>
+        <p:nvSpPr>
+          <p:cNvPr id="3" name="Notes Placeholder 2"/>
+          <p:cNvSpPr>
+            <a:spLocks noGrp="1"/>
+          </p:cNvSpPr>
+          <p:nvPr>
+            <p:ph type="body" idx="3" sz="quarter"/>
+          </p:nvPr>
+        </p:nvSpPr>
+        <p:spPr/>
+        <p:txBody>
+          <a:bodyPr/>
+          <a:lstStyle/>
+          <a:p>
+            <a:r>
+              <a:t>Selbstcheck nach 4 Wochen als Transferanker.</a:t>
             </a:r>
           </a:p>
         </p:txBody>
@@ -4716,7 +4742,7 @@
                 </a:solidFill>
                 <a:latin typeface="Arial"/>
               </a:rPr>
-              <a:t>Frühwarn-Ampelkarte</a:t>
+              <a:t>Handlungsempfehlung: vom Warnsignal zur Eskalation</a:t>
             </a:r>
           </a:p>
         </p:txBody>
@@ -4780,8 +4806,8 @@
         </p:blipFill>
         <p:spPr>
           <a:xfrm>
-            <a:off x="2163921" y="1325880"/>
-            <a:ext cx="7861110" cy="4937760"/>
+            <a:off x="2303489" y="1325880"/>
+            <a:ext cx="7581973" cy="4937760"/>
           </a:xfrm>
           <a:prstGeom prst="rect">
             <a:avLst/>
@@ -4934,7 +4960,7 @@
             <a:avLst/>
           </a:prstGeom>
           <a:solidFill>
-            <a:srgbClr val="EDEDF3"/>
+            <a:srgbClr val="1F2C56"/>
           </a:solidFill>
           <a:ln>
             <a:noFill/>
@@ -4964,57 +4990,14 @@
       </p:sp>
       <p:sp>
         <p:nvSpPr>
-          <p:cNvPr id="3" name="Rectangle 2"/>
-          <p:cNvSpPr/>
-          <p:nvPr/>
-        </p:nvSpPr>
-        <p:spPr>
-          <a:xfrm>
-            <a:off x="0" y="0"/>
-            <a:ext cx="12188952" cy="50292"/>
-          </a:xfrm>
-          <a:prstGeom prst="rect">
-            <a:avLst/>
-          </a:prstGeom>
-          <a:solidFill>
-            <a:srgbClr val="1F2C56"/>
-          </a:solidFill>
-          <a:ln>
-            <a:noFill/>
-          </a:ln>
-        </p:spPr>
-        <p:style>
-          <a:lnRef idx="1">
-            <a:schemeClr val="accent1"/>
-          </a:lnRef>
-          <a:fillRef idx="3">
-            <a:schemeClr val="accent1"/>
-          </a:fillRef>
-          <a:effectRef idx="2">
-            <a:schemeClr val="accent1"/>
-          </a:effectRef>
-          <a:fontRef idx="minor">
-            <a:schemeClr val="lt1"/>
-          </a:fontRef>
-        </p:style>
-        <p:txBody>
-          <a:bodyPr rtlCol="0" anchor="ctr"/>
-          <a:lstStyle/>
-          <a:p>
-            <a:pPr algn="ctr"/>
-          </a:p>
-        </p:txBody>
-      </p:sp>
-      <p:sp>
-        <p:nvSpPr>
-          <p:cNvPr id="4" name="TextBox 3"/>
+          <p:cNvPr id="3" name="TextBox 2"/>
           <p:cNvSpPr txBox="1"/>
           <p:nvPr/>
         </p:nvSpPr>
         <p:spPr>
           <a:xfrm>
-            <a:off x="685800" y="109728"/>
-            <a:ext cx="10817352" cy="228600"/>
+            <a:off x="685800" y="2377440"/>
+            <a:ext cx="10817352" cy="365760"/>
           </a:xfrm>
           <a:prstGeom prst="rect">
             <a:avLst/>
@@ -5029,70 +5012,27 @@
           <a:p>
             <a:pPr algn="l"/>
             <a:r>
-              <a:rPr sz="750">
-                <a:solidFill>
-                  <a:srgbClr val="78808C"/>
+              <a:rPr sz="1200">
+                <a:solidFill>
+                  <a:srgbClr val="D9C089"/>
                 </a:solidFill>
                 <a:latin typeface="Consolas"/>
               </a:rPr>
-              <a:t>M04  ·  INHALT</a:t>
-            </a:r>
-          </a:p>
-        </p:txBody>
-      </p:sp>
-      <p:sp>
-        <p:nvSpPr>
-          <p:cNvPr id="5" name="Rectangle 4"/>
+              <a:t>FALLARBEIT</a:t>
+            </a:r>
+          </a:p>
+        </p:txBody>
+      </p:sp>
+      <p:sp>
+        <p:nvSpPr>
+          <p:cNvPr id="4" name="Rectangle 3"/>
           <p:cNvSpPr/>
           <p:nvPr/>
         </p:nvSpPr>
         <p:spPr>
           <a:xfrm>
-            <a:off x="0" y="1234440"/>
-            <a:ext cx="12188952" cy="12700"/>
-          </a:xfrm>
-          <a:prstGeom prst="rect">
-            <a:avLst/>
-          </a:prstGeom>
-          <a:solidFill>
-            <a:srgbClr val="D8DFE4"/>
-          </a:solidFill>
-          <a:ln>
-            <a:noFill/>
-          </a:ln>
-        </p:spPr>
-        <p:style>
-          <a:lnRef idx="1">
-            <a:schemeClr val="accent1"/>
-          </a:lnRef>
-          <a:fillRef idx="3">
-            <a:schemeClr val="accent1"/>
-          </a:fillRef>
-          <a:effectRef idx="2">
-            <a:schemeClr val="accent1"/>
-          </a:effectRef>
-          <a:fontRef idx="minor">
-            <a:schemeClr val="lt1"/>
-          </a:fontRef>
-        </p:style>
-        <p:txBody>
-          <a:bodyPr rtlCol="0" anchor="ctr"/>
-          <a:lstStyle/>
-          <a:p>
-            <a:pPr algn="ctr"/>
-          </a:p>
-        </p:txBody>
-      </p:sp>
-      <p:sp>
-        <p:nvSpPr>
-          <p:cNvPr id="6" name="Rectangle 5"/>
-          <p:cNvSpPr/>
-          <p:nvPr/>
-        </p:nvSpPr>
-        <p:spPr>
-          <a:xfrm>
-            <a:off x="685800" y="502920"/>
-            <a:ext cx="36576" cy="658368"/>
+            <a:off x="685800" y="2788920"/>
+            <a:ext cx="548640" cy="38100"/>
           </a:xfrm>
           <a:prstGeom prst="rect">
             <a:avLst/>
@@ -5128,14 +5068,14 @@
       </p:sp>
       <p:sp>
         <p:nvSpPr>
-          <p:cNvPr id="7" name="TextBox 6"/>
+          <p:cNvPr id="5" name="TextBox 4"/>
           <p:cNvSpPr txBox="1"/>
           <p:nvPr/>
         </p:nvSpPr>
         <p:spPr>
           <a:xfrm>
-            <a:off x="813816" y="502920"/>
-            <a:ext cx="10634472" cy="685800"/>
+            <a:off x="685800" y="3017520"/>
+            <a:ext cx="10817352" cy="1463040"/>
           </a:xfrm>
           <a:prstGeom prst="rect">
             <a:avLst/>
@@ -5150,27 +5090,27 @@
           <a:p>
             <a:pPr algn="l"/>
             <a:r>
-              <a:rPr sz="2400" b="1" i="0">
-                <a:solidFill>
-                  <a:srgbClr val="1F2C56"/>
+              <a:rPr sz="4000" b="1" i="0">
+                <a:solidFill>
+                  <a:srgbClr val="FFFFFF"/>
                 </a:solidFill>
                 <a:latin typeface="Arial"/>
               </a:rPr>
-              <a:t>Eskalationspfade – Wer handelt wann?</a:t>
-            </a:r>
-          </a:p>
-        </p:txBody>
-      </p:sp>
-      <p:sp>
-        <p:nvSpPr>
-          <p:cNvPr id="8" name="TextBox 7"/>
+              <a:t>Praxiscase Renner Metallverarbeitung</a:t>
+            </a:r>
+          </a:p>
+        </p:txBody>
+      </p:sp>
+      <p:sp>
+        <p:nvSpPr>
+          <p:cNvPr id="6" name="TextBox 5"/>
           <p:cNvSpPr txBox="1"/>
           <p:nvPr/>
         </p:nvSpPr>
         <p:spPr>
           <a:xfrm>
-            <a:off x="685800" y="1417320"/>
-            <a:ext cx="10817352" cy="4892040"/>
+            <a:off x="685800" y="4480560"/>
+            <a:ext cx="8653881" cy="1280160"/>
           </a:xfrm>
           <a:prstGeom prst="rect">
             <a:avLst/>
@@ -5178,103 +5118,34 @@
           <a:noFill/>
         </p:spPr>
         <p:txBody>
-          <a:bodyPr wrap="square" anchor="ctr">
+          <a:bodyPr wrap="square">
             <a:spAutoFit/>
           </a:bodyPr>
           <a:lstStyle/>
           <a:p>
-            <a:pPr marL="177800" indent="-177800">
-              <a:spcBef>
-                <a:spcPts val="600"/>
-              </a:spcBef>
-              <a:spcAft>
-                <a:spcPts val="200"/>
-              </a:spcAft>
-            </a:pPr>
-            <a:r>
-              <a:rPr sz="1200" i="1">
-                <a:solidFill>
-                  <a:srgbClr val="3D5466"/>
+            <a:pPr algn="l"/>
+            <a:r>
+              <a:rPr sz="1600" b="0" i="0">
+                <a:solidFill>
+                  <a:srgbClr val="C8D2E6"/>
                 </a:solidFill>
                 <a:latin typeface="Arial"/>
               </a:rPr>
-              <a:t>→  Dokumentation in agree: Jeder Gelb- oder Rot-Befund wird im Risikovermerk dokumentiert: Datum, Indikator, Bewertung, nächste Maßnahme, Verantwortlicher. Das ist Revisionspflicht .</a:t>
-            </a:r>
-          </a:p>
-          <a:p>
-            <a:pPr marL="190500" indent="-190500">
-              <a:spcBef>
-                <a:spcPts val="400"/>
-              </a:spcBef>
-              <a:spcAft>
-                <a:spcPts val="200"/>
-              </a:spcAft>
-            </a:pPr>
-            <a:r>
-              <a:rPr sz="1300">
-                <a:solidFill>
-                  <a:srgbClr val="3D5466"/>
-                </a:solidFill>
-                <a:latin typeface="Arial"/>
-              </a:rPr>
-              <a:t>▸  Die folgende Karte verknüpft die erkannten Risikosignale direkt mit konkreten Handlungsschritten und zeigt, wann welche Maßnahme angemessen ist.</a:t>
-            </a:r>
-          </a:p>
-        </p:txBody>
-      </p:sp>
-      <p:sp>
-        <p:nvSpPr>
-          <p:cNvPr id="9" name="Rectangle 8"/>
-          <p:cNvSpPr/>
-          <p:nvPr/>
-        </p:nvSpPr>
-        <p:spPr>
-          <a:xfrm>
-            <a:off x="0" y="6510528"/>
-            <a:ext cx="12188952" cy="347472"/>
-          </a:xfrm>
-          <a:prstGeom prst="rect">
-            <a:avLst/>
-          </a:prstGeom>
-          <a:solidFill>
-            <a:srgbClr val="0A1937"/>
-          </a:solidFill>
-          <a:ln>
-            <a:noFill/>
-          </a:ln>
-        </p:spPr>
-        <p:style>
-          <a:lnRef idx="1">
-            <a:schemeClr val="accent1"/>
-          </a:lnRef>
-          <a:fillRef idx="3">
-            <a:schemeClr val="accent1"/>
-          </a:fillRef>
-          <a:effectRef idx="2">
-            <a:schemeClr val="accent1"/>
-          </a:effectRef>
-          <a:fontRef idx="minor">
-            <a:schemeClr val="lt1"/>
-          </a:fontRef>
-        </p:style>
-        <p:txBody>
-          <a:bodyPr rtlCol="0" anchor="ctr"/>
-          <a:lstStyle/>
-          <a:p>
-            <a:pPr algn="ctr"/>
-          </a:p>
-        </p:txBody>
-      </p:sp>
-      <p:sp>
-        <p:nvSpPr>
-          <p:cNvPr id="10" name="TextBox 9"/>
+              <a:t>Die Ampel-Checkliste auf einen echten Kunden anwenden.</a:t>
+            </a:r>
+          </a:p>
+        </p:txBody>
+      </p:sp>
+      <p:sp>
+        <p:nvSpPr>
+          <p:cNvPr id="7" name="TextBox 6"/>
           <p:cNvSpPr txBox="1"/>
           <p:nvPr/>
         </p:nvSpPr>
         <p:spPr>
           <a:xfrm>
-            <a:off x="685800" y="6583680"/>
-            <a:ext cx="6490411" cy="256032"/>
+            <a:off x="685800" y="6355080"/>
+            <a:ext cx="10817352" cy="274320"/>
           </a:xfrm>
           <a:prstGeom prst="rect">
             <a:avLst/>
@@ -5291,7 +5162,7 @@
             <a:r>
               <a:rPr sz="700">
                 <a:solidFill>
-                  <a:srgbClr val="A0B4D2"/>
+                  <a:srgbClr val="8CA0C3"/>
                 </a:solidFill>
                 <a:latin typeface="Consolas"/>
               </a:rPr>
@@ -5333,7 +5204,7 @@
             <a:avLst/>
           </a:prstGeom>
           <a:solidFill>
-            <a:srgbClr val="FFFFFF"/>
+            <a:srgbClr val="EDEDF3"/>
           </a:solidFill>
           <a:ln>
             <a:noFill/>
@@ -5434,43 +5305,51 @@
                 </a:solidFill>
                 <a:latin typeface="Consolas"/>
               </a:rPr>
-              <a:t>M04  ·  SCHAUBILD</a:t>
-            </a:r>
-          </a:p>
-        </p:txBody>
-      </p:sp>
-      <p:sp>
-        <p:nvSpPr>
-          <p:cNvPr id="5" name="TextBox 4"/>
-          <p:cNvSpPr txBox="1"/>
-          <p:nvPr/>
-        </p:nvSpPr>
-        <p:spPr>
-          <a:xfrm>
-            <a:off x="685800" y="502920"/>
-            <a:ext cx="10817352" cy="594360"/>
-          </a:xfrm>
-          <a:prstGeom prst="rect">
-            <a:avLst/>
-          </a:prstGeom>
-          <a:noFill/>
-        </p:spPr>
-        <p:txBody>
-          <a:bodyPr wrap="square">
-            <a:spAutoFit/>
-          </a:bodyPr>
-          <a:lstStyle/>
-          <a:p>
-            <a:pPr algn="l"/>
-            <a:r>
-              <a:rPr sz="2000" b="1" i="0">
-                <a:solidFill>
-                  <a:srgbClr val="1F2C56"/>
-                </a:solidFill>
-                <a:latin typeface="Arial"/>
-              </a:rPr>
-              <a:t>Handlungsempfehlung Wenn-Dann</a:t>
-            </a:r>
+              <a:t>M04  ·  ARBEITSBLATT</a:t>
+            </a:r>
+          </a:p>
+        </p:txBody>
+      </p:sp>
+      <p:sp>
+        <p:nvSpPr>
+          <p:cNvPr id="5" name="Rectangle 4"/>
+          <p:cNvSpPr/>
+          <p:nvPr/>
+        </p:nvSpPr>
+        <p:spPr>
+          <a:xfrm>
+            <a:off x="0" y="1234440"/>
+            <a:ext cx="12188952" cy="12700"/>
+          </a:xfrm>
+          <a:prstGeom prst="rect">
+            <a:avLst/>
+          </a:prstGeom>
+          <a:solidFill>
+            <a:srgbClr val="D8DFE4"/>
+          </a:solidFill>
+          <a:ln>
+            <a:noFill/>
+          </a:ln>
+        </p:spPr>
+        <p:style>
+          <a:lnRef idx="1">
+            <a:schemeClr val="accent1"/>
+          </a:lnRef>
+          <a:fillRef idx="3">
+            <a:schemeClr val="accent1"/>
+          </a:fillRef>
+          <a:effectRef idx="2">
+            <a:schemeClr val="accent1"/>
+          </a:effectRef>
+          <a:fontRef idx="minor">
+            <a:schemeClr val="lt1"/>
+          </a:fontRef>
+        </p:style>
+        <p:txBody>
+          <a:bodyPr rtlCol="0" anchor="ctr"/>
+          <a:lstStyle/>
+          <a:p>
+            <a:pPr algn="ctr"/>
           </a:p>
         </p:txBody>
       </p:sp>
@@ -5482,8 +5361,8 @@
         </p:nvSpPr>
         <p:spPr>
           <a:xfrm>
-            <a:off x="685800" y="1143000"/>
-            <a:ext cx="10817352" cy="25400"/>
+            <a:off x="685800" y="502920"/>
+            <a:ext cx="36576" cy="658368"/>
           </a:xfrm>
           <a:prstGeom prst="rect">
             <a:avLst/>
@@ -5517,33 +5396,202 @@
           </a:p>
         </p:txBody>
       </p:sp>
-      <p:pic>
-        <p:nvPicPr>
-          <p:cNvPr id="7" name="Picture 6" descr="image.png"/>
-          <p:cNvPicPr>
-            <a:picLocks noChangeAspect="1"/>
-          </p:cNvPicPr>
-          <p:nvPr/>
-        </p:nvPicPr>
-        <p:blipFill>
-          <a:blip r:embed="rId2"/>
-          <a:stretch>
-            <a:fillRect/>
-          </a:stretch>
-        </p:blipFill>
-        <p:spPr>
-          <a:xfrm>
-            <a:off x="2303489" y="1325880"/>
-            <a:ext cx="7581973" cy="4937760"/>
-          </a:xfrm>
-          <a:prstGeom prst="rect">
-            <a:avLst/>
-          </a:prstGeom>
-        </p:spPr>
-      </p:pic>
-      <p:sp>
-        <p:nvSpPr>
-          <p:cNvPr id="8" name="Rectangle 7"/>
+      <p:sp>
+        <p:nvSpPr>
+          <p:cNvPr id="7" name="TextBox 6"/>
+          <p:cNvSpPr txBox="1"/>
+          <p:nvPr/>
+        </p:nvSpPr>
+        <p:spPr>
+          <a:xfrm>
+            <a:off x="813816" y="502920"/>
+            <a:ext cx="10634472" cy="685800"/>
+          </a:xfrm>
+          <a:prstGeom prst="rect">
+            <a:avLst/>
+          </a:prstGeom>
+          <a:noFill/>
+        </p:spPr>
+        <p:txBody>
+          <a:bodyPr wrap="square">
+            <a:spAutoFit/>
+          </a:bodyPr>
+          <a:lstStyle/>
+          <a:p>
+            <a:pPr algn="l"/>
+            <a:r>
+              <a:rPr sz="2400" b="1" i="0">
+                <a:solidFill>
+                  <a:srgbClr val="1F2C56"/>
+                </a:solidFill>
+                <a:latin typeface="Arial"/>
+              </a:rPr>
+              <a:t>Praxiscase Renner bearbeiten</a:t>
+            </a:r>
+          </a:p>
+        </p:txBody>
+      </p:sp>
+      <p:sp>
+        <p:nvSpPr>
+          <p:cNvPr id="8" name="TextBox 7"/>
+          <p:cNvSpPr txBox="1"/>
+          <p:nvPr/>
+        </p:nvSpPr>
+        <p:spPr>
+          <a:xfrm>
+            <a:off x="685800" y="1554480"/>
+            <a:ext cx="10817352" cy="3840480"/>
+          </a:xfrm>
+          <a:prstGeom prst="rect">
+            <a:avLst/>
+          </a:prstGeom>
+          <a:noFill/>
+        </p:spPr>
+        <p:txBody>
+          <a:bodyPr wrap="square">
+            <a:spAutoFit/>
+          </a:bodyPr>
+          <a:lstStyle/>
+          <a:p>
+            <a:pPr marL="190500" indent="-190500">
+              <a:spcBef>
+                <a:spcPts val="400"/>
+              </a:spcBef>
+              <a:spcAft>
+                <a:spcPts val="200"/>
+              </a:spcAft>
+            </a:pPr>
+            <a:r>
+              <a:rPr sz="1400">
+                <a:solidFill>
+                  <a:srgbClr val="3D5466"/>
+                </a:solidFill>
+                <a:latin typeface="Arial"/>
+              </a:rPr>
+              <a:t>▸  Füllen Sie die Ampel-Checkliste für die Renner Metallverarbeitung GmbH aus (AB-1).</a:t>
+            </a:r>
+          </a:p>
+          <a:p>
+            <a:pPr marL="190500" indent="-190500">
+              <a:spcBef>
+                <a:spcPts val="400"/>
+              </a:spcBef>
+              <a:spcAft>
+                <a:spcPts val="200"/>
+              </a:spcAft>
+            </a:pPr>
+            <a:r>
+              <a:rPr sz="1400">
+                <a:solidFill>
+                  <a:srgbClr val="3D5466"/>
+                </a:solidFill>
+                <a:latin typeface="Arial"/>
+              </a:rPr>
+              <a:t>▸  Bestimmen Sie die Krisenphase und die passenden Frühwarnindikatoren.</a:t>
+            </a:r>
+          </a:p>
+          <a:p>
+            <a:pPr marL="190500" indent="-190500">
+              <a:spcBef>
+                <a:spcPts val="400"/>
+              </a:spcBef>
+              <a:spcAft>
+                <a:spcPts val="200"/>
+              </a:spcAft>
+            </a:pPr>
+            <a:r>
+              <a:rPr sz="1400">
+                <a:solidFill>
+                  <a:srgbClr val="3D5466"/>
+                </a:solidFill>
+                <a:latin typeface="Arial"/>
+              </a:rPr>
+              <a:t>▸  Leiten Sie Maßnahmen und den Eskalationspfad ab (AB-2).</a:t>
+            </a:r>
+          </a:p>
+        </p:txBody>
+      </p:sp>
+      <p:sp>
+        <p:nvSpPr>
+          <p:cNvPr id="9" name="Rectangle 8"/>
+          <p:cNvSpPr/>
+          <p:nvPr/>
+        </p:nvSpPr>
+        <p:spPr>
+          <a:xfrm>
+            <a:off x="685800" y="5486400"/>
+            <a:ext cx="10817352" cy="640080"/>
+          </a:xfrm>
+          <a:prstGeom prst="rect">
+            <a:avLst/>
+          </a:prstGeom>
+          <a:solidFill>
+            <a:srgbClr val="1F2C56"/>
+          </a:solidFill>
+          <a:ln>
+            <a:noFill/>
+          </a:ln>
+        </p:spPr>
+        <p:style>
+          <a:lnRef idx="1">
+            <a:schemeClr val="accent1"/>
+          </a:lnRef>
+          <a:fillRef idx="3">
+            <a:schemeClr val="accent1"/>
+          </a:fillRef>
+          <a:effectRef idx="2">
+            <a:schemeClr val="accent1"/>
+          </a:effectRef>
+          <a:fontRef idx="minor">
+            <a:schemeClr val="lt1"/>
+          </a:fontRef>
+        </p:style>
+        <p:txBody>
+          <a:bodyPr rtlCol="0" anchor="ctr"/>
+          <a:lstStyle/>
+          <a:p>
+            <a:pPr algn="ctr"/>
+          </a:p>
+        </p:txBody>
+      </p:sp>
+      <p:sp>
+        <p:nvSpPr>
+          <p:cNvPr id="10" name="TextBox 9"/>
+          <p:cNvSpPr txBox="1"/>
+          <p:nvPr/>
+        </p:nvSpPr>
+        <p:spPr>
+          <a:xfrm>
+            <a:off x="868680" y="5596128"/>
+            <a:ext cx="10451592" cy="457200"/>
+          </a:xfrm>
+          <a:prstGeom prst="rect">
+            <a:avLst/>
+          </a:prstGeom>
+          <a:noFill/>
+        </p:spPr>
+        <p:txBody>
+          <a:bodyPr wrap="square">
+            <a:spAutoFit/>
+          </a:bodyPr>
+          <a:lstStyle/>
+          <a:p>
+            <a:pPr algn="l"/>
+            <a:r>
+              <a:rPr sz="1300" b="1" i="0">
+                <a:solidFill>
+                  <a:srgbClr val="FFFFFF"/>
+                </a:solidFill>
+                <a:latin typeface="Arial"/>
+              </a:rPr>
+              <a:t>→  Bearbeitung im Teilnehmer-Workbook (Arbeitsblatt mit Ausfüllfeldern)</a:t>
+            </a:r>
+          </a:p>
+        </p:txBody>
+      </p:sp>
+      <p:sp>
+        <p:nvSpPr>
+          <p:cNvPr id="11" name="Rectangle 10"/>
           <p:cNvSpPr/>
           <p:nvPr/>
         </p:nvSpPr>
@@ -5586,7 +5634,7 @@
       </p:sp>
       <p:sp>
         <p:nvSpPr>
-          <p:cNvPr id="9" name="TextBox 8"/>
+          <p:cNvPr id="12" name="TextBox 11"/>
           <p:cNvSpPr txBox="1"/>
           <p:nvPr/>
         </p:nvSpPr>
@@ -5615,41 +5663,6 @@
                 <a:latin typeface="Consolas"/>
               </a:rPr>
               <a:t>FKB Campus  ·  M04</a:t>
-            </a:r>
-          </a:p>
-        </p:txBody>
-      </p:sp>
-      <p:sp>
-        <p:nvSpPr>
-          <p:cNvPr id="10" name="TextBox 9"/>
-          <p:cNvSpPr txBox="1"/>
-          <p:nvPr/>
-        </p:nvSpPr>
-        <p:spPr>
-          <a:xfrm>
-            <a:off x="7176211" y="6583680"/>
-            <a:ext cx="4326940" cy="256032"/>
-          </a:xfrm>
-          <a:prstGeom prst="rect">
-            <a:avLst/>
-          </a:prstGeom>
-          <a:noFill/>
-        </p:spPr>
-        <p:txBody>
-          <a:bodyPr wrap="none">
-            <a:spAutoFit/>
-          </a:bodyPr>
-          <a:lstStyle/>
-          <a:p>
-            <a:pPr algn="r"/>
-            <a:r>
-              <a:rPr sz="700">
-                <a:solidFill>
-                  <a:srgbClr val="A0B4D2"/>
-                </a:solidFill>
-                <a:latin typeface="Consolas"/>
-              </a:rPr>
-              <a:t>Schaubild</a:t>
             </a:r>
           </a:p>
         </p:txBody>
@@ -5788,7 +5801,7 @@
                 </a:solidFill>
                 <a:latin typeface="Consolas"/>
               </a:rPr>
-              <a:t>M04  ·  ARBEITSBLATT</a:t>
+              <a:t>M04  ·  INHALT</a:t>
             </a:r>
           </a:p>
         </p:txBody>
@@ -5909,7 +5922,7 @@
                 </a:solidFill>
                 <a:latin typeface="Arial"/>
               </a:rPr>
-              <a:t>Praxiscase: Renner Metallverarbeitung GmbH</a:t>
+              <a:t>Prinzip dieses Moduls</a:t>
             </a:r>
           </a:p>
         </p:txBody>
@@ -5922,8 +5935,8 @@
         </p:nvSpPr>
         <p:spPr>
           <a:xfrm>
-            <a:off x="685800" y="1554480"/>
-            <a:ext cx="10817352" cy="3840480"/>
+            <a:off x="685800" y="1417320"/>
+            <a:ext cx="10817352" cy="4892040"/>
           </a:xfrm>
           <a:prstGeom prst="rect">
             <a:avLst/>
@@ -5931,10 +5944,29 @@
           <a:noFill/>
         </p:spPr>
         <p:txBody>
-          <a:bodyPr wrap="square">
+          <a:bodyPr wrap="square" anchor="ctr">
             <a:spAutoFit/>
           </a:bodyPr>
           <a:lstStyle/>
+          <a:p>
+            <a:pPr marL="177800" indent="-177800">
+              <a:spcBef>
+                <a:spcPts val="600"/>
+              </a:spcBef>
+              <a:spcAft>
+                <a:spcPts val="200"/>
+              </a:spcAft>
+            </a:pPr>
+            <a:r>
+              <a:rPr sz="1200" i="1">
+                <a:solidFill>
+                  <a:srgbClr val="3D5466"/>
+                </a:solidFill>
+                <a:latin typeface="Arial"/>
+              </a:rPr>
+              <a:t>→  Das erste Warnsignal steht selten in der Bilanz – meist im Kontokorrent.</a:t>
+            </a:r>
+          </a:p>
           <a:p>
             <a:pPr marL="190500" indent="-190500">
               <a:spcBef>
@@ -5945,15 +5977,376 @@
               </a:spcAft>
             </a:pPr>
             <a:r>
-              <a:rPr sz="1400">
+              <a:rPr sz="1300">
                 <a:solidFill>
                   <a:srgbClr val="3D5466"/>
                 </a:solidFill>
                 <a:latin typeface="Arial"/>
               </a:rPr>
-              <a:t>▸  Unternehmensprofil:</a:t>
-            </a:r>
-          </a:p>
+              <a:t>▸  Qualitative Frühindikatoren laufen den Kennzahlen voraus; reagiere auf das schwache Signal, nicht erst auf den Schaden.</a:t>
+            </a:r>
+          </a:p>
+        </p:txBody>
+      </p:sp>
+      <p:sp>
+        <p:nvSpPr>
+          <p:cNvPr id="9" name="Rectangle 8"/>
+          <p:cNvSpPr/>
+          <p:nvPr/>
+        </p:nvSpPr>
+        <p:spPr>
+          <a:xfrm>
+            <a:off x="0" y="6510528"/>
+            <a:ext cx="12188952" cy="347472"/>
+          </a:xfrm>
+          <a:prstGeom prst="rect">
+            <a:avLst/>
+          </a:prstGeom>
+          <a:solidFill>
+            <a:srgbClr val="0A1937"/>
+          </a:solidFill>
+          <a:ln>
+            <a:noFill/>
+          </a:ln>
+        </p:spPr>
+        <p:style>
+          <a:lnRef idx="1">
+            <a:schemeClr val="accent1"/>
+          </a:lnRef>
+          <a:fillRef idx="3">
+            <a:schemeClr val="accent1"/>
+          </a:fillRef>
+          <a:effectRef idx="2">
+            <a:schemeClr val="accent1"/>
+          </a:effectRef>
+          <a:fontRef idx="minor">
+            <a:schemeClr val="lt1"/>
+          </a:fontRef>
+        </p:style>
+        <p:txBody>
+          <a:bodyPr rtlCol="0" anchor="ctr"/>
+          <a:lstStyle/>
+          <a:p>
+            <a:pPr algn="ctr"/>
+          </a:p>
+        </p:txBody>
+      </p:sp>
+      <p:sp>
+        <p:nvSpPr>
+          <p:cNvPr id="10" name="TextBox 9"/>
+          <p:cNvSpPr txBox="1"/>
+          <p:nvPr/>
+        </p:nvSpPr>
+        <p:spPr>
+          <a:xfrm>
+            <a:off x="685800" y="6583680"/>
+            <a:ext cx="6490411" cy="256032"/>
+          </a:xfrm>
+          <a:prstGeom prst="rect">
+            <a:avLst/>
+          </a:prstGeom>
+          <a:noFill/>
+        </p:spPr>
+        <p:txBody>
+          <a:bodyPr wrap="none">
+            <a:spAutoFit/>
+          </a:bodyPr>
+          <a:lstStyle/>
+          <a:p>
+            <a:pPr algn="l"/>
+            <a:r>
+              <a:rPr sz="700">
+                <a:solidFill>
+                  <a:srgbClr val="A0B4D2"/>
+                </a:solidFill>
+                <a:latin typeface="Consolas"/>
+              </a:rPr>
+              <a:t>FKB Campus  ·  M04</a:t>
+            </a:r>
+          </a:p>
+        </p:txBody>
+      </p:sp>
+    </p:spTree>
+  </p:cSld>
+  <p:clrMapOvr>
+    <a:masterClrMapping/>
+  </p:clrMapOvr>
+</p:sld>
+</file>
+
+<file path=ppt/slides/slide14.xml><?xml version="1.0" encoding="utf-8"?>
+<p:sld xmlns:a="http://schemas.openxmlformats.org/drawingml/2006/main" xmlns:p="http://schemas.openxmlformats.org/presentationml/2006/main" xmlns:r="http://schemas.openxmlformats.org/officeDocument/2006/relationships">
+  <p:cSld>
+    <p:spTree>
+      <p:nvGrpSpPr>
+        <p:cNvPr id="1" name=""/>
+        <p:cNvGrpSpPr/>
+        <p:nvPr/>
+      </p:nvGrpSpPr>
+      <p:grpSpPr/>
+      <p:sp>
+        <p:nvSpPr>
+          <p:cNvPr id="2" name="Rectangle 1"/>
+          <p:cNvSpPr/>
+          <p:nvPr/>
+        </p:nvSpPr>
+        <p:spPr>
+          <a:xfrm>
+            <a:off x="0" y="0"/>
+            <a:ext cx="12188952" cy="6858000"/>
+          </a:xfrm>
+          <a:prstGeom prst="rect">
+            <a:avLst/>
+          </a:prstGeom>
+          <a:solidFill>
+            <a:srgbClr val="EDEDF3"/>
+          </a:solidFill>
+          <a:ln>
+            <a:noFill/>
+          </a:ln>
+        </p:spPr>
+        <p:style>
+          <a:lnRef idx="1">
+            <a:schemeClr val="accent1"/>
+          </a:lnRef>
+          <a:fillRef idx="3">
+            <a:schemeClr val="accent1"/>
+          </a:fillRef>
+          <a:effectRef idx="2">
+            <a:schemeClr val="accent1"/>
+          </a:effectRef>
+          <a:fontRef idx="minor">
+            <a:schemeClr val="lt1"/>
+          </a:fontRef>
+        </p:style>
+        <p:txBody>
+          <a:bodyPr rtlCol="0" anchor="ctr"/>
+          <a:lstStyle/>
+          <a:p>
+            <a:pPr algn="ctr"/>
+          </a:p>
+        </p:txBody>
+      </p:sp>
+      <p:sp>
+        <p:nvSpPr>
+          <p:cNvPr id="3" name="Rectangle 2"/>
+          <p:cNvSpPr/>
+          <p:nvPr/>
+        </p:nvSpPr>
+        <p:spPr>
+          <a:xfrm>
+            <a:off x="0" y="0"/>
+            <a:ext cx="12188952" cy="50292"/>
+          </a:xfrm>
+          <a:prstGeom prst="rect">
+            <a:avLst/>
+          </a:prstGeom>
+          <a:solidFill>
+            <a:srgbClr val="1F2C56"/>
+          </a:solidFill>
+          <a:ln>
+            <a:noFill/>
+          </a:ln>
+        </p:spPr>
+        <p:style>
+          <a:lnRef idx="1">
+            <a:schemeClr val="accent1"/>
+          </a:lnRef>
+          <a:fillRef idx="3">
+            <a:schemeClr val="accent1"/>
+          </a:fillRef>
+          <a:effectRef idx="2">
+            <a:schemeClr val="accent1"/>
+          </a:effectRef>
+          <a:fontRef idx="minor">
+            <a:schemeClr val="lt1"/>
+          </a:fontRef>
+        </p:style>
+        <p:txBody>
+          <a:bodyPr rtlCol="0" anchor="ctr"/>
+          <a:lstStyle/>
+          <a:p>
+            <a:pPr algn="ctr"/>
+          </a:p>
+        </p:txBody>
+      </p:sp>
+      <p:sp>
+        <p:nvSpPr>
+          <p:cNvPr id="4" name="TextBox 3"/>
+          <p:cNvSpPr txBox="1"/>
+          <p:nvPr/>
+        </p:nvSpPr>
+        <p:spPr>
+          <a:xfrm>
+            <a:off x="685800" y="109728"/>
+            <a:ext cx="10817352" cy="228600"/>
+          </a:xfrm>
+          <a:prstGeom prst="rect">
+            <a:avLst/>
+          </a:prstGeom>
+          <a:noFill/>
+        </p:spPr>
+        <p:txBody>
+          <a:bodyPr wrap="none">
+            <a:spAutoFit/>
+          </a:bodyPr>
+          <a:lstStyle/>
+          <a:p>
+            <a:pPr algn="l"/>
+            <a:r>
+              <a:rPr sz="750">
+                <a:solidFill>
+                  <a:srgbClr val="78808C"/>
+                </a:solidFill>
+                <a:latin typeface="Consolas"/>
+              </a:rPr>
+              <a:t>M04  ·  INHALT</a:t>
+            </a:r>
+          </a:p>
+        </p:txBody>
+      </p:sp>
+      <p:sp>
+        <p:nvSpPr>
+          <p:cNvPr id="5" name="Rectangle 4"/>
+          <p:cNvSpPr/>
+          <p:nvPr/>
+        </p:nvSpPr>
+        <p:spPr>
+          <a:xfrm>
+            <a:off x="0" y="1234440"/>
+            <a:ext cx="12188952" cy="12700"/>
+          </a:xfrm>
+          <a:prstGeom prst="rect">
+            <a:avLst/>
+          </a:prstGeom>
+          <a:solidFill>
+            <a:srgbClr val="D8DFE4"/>
+          </a:solidFill>
+          <a:ln>
+            <a:noFill/>
+          </a:ln>
+        </p:spPr>
+        <p:style>
+          <a:lnRef idx="1">
+            <a:schemeClr val="accent1"/>
+          </a:lnRef>
+          <a:fillRef idx="3">
+            <a:schemeClr val="accent1"/>
+          </a:fillRef>
+          <a:effectRef idx="2">
+            <a:schemeClr val="accent1"/>
+          </a:effectRef>
+          <a:fontRef idx="minor">
+            <a:schemeClr val="lt1"/>
+          </a:fontRef>
+        </p:style>
+        <p:txBody>
+          <a:bodyPr rtlCol="0" anchor="ctr"/>
+          <a:lstStyle/>
+          <a:p>
+            <a:pPr algn="ctr"/>
+          </a:p>
+        </p:txBody>
+      </p:sp>
+      <p:sp>
+        <p:nvSpPr>
+          <p:cNvPr id="6" name="Rectangle 5"/>
+          <p:cNvSpPr/>
+          <p:nvPr/>
+        </p:nvSpPr>
+        <p:spPr>
+          <a:xfrm>
+            <a:off x="685800" y="502920"/>
+            <a:ext cx="36576" cy="658368"/>
+          </a:xfrm>
+          <a:prstGeom prst="rect">
+            <a:avLst/>
+          </a:prstGeom>
+          <a:solidFill>
+            <a:srgbClr val="D9C089"/>
+          </a:solidFill>
+          <a:ln>
+            <a:noFill/>
+          </a:ln>
+        </p:spPr>
+        <p:style>
+          <a:lnRef idx="1">
+            <a:schemeClr val="accent1"/>
+          </a:lnRef>
+          <a:fillRef idx="3">
+            <a:schemeClr val="accent1"/>
+          </a:fillRef>
+          <a:effectRef idx="2">
+            <a:schemeClr val="accent1"/>
+          </a:effectRef>
+          <a:fontRef idx="minor">
+            <a:schemeClr val="lt1"/>
+          </a:fontRef>
+        </p:style>
+        <p:txBody>
+          <a:bodyPr rtlCol="0" anchor="ctr"/>
+          <a:lstStyle/>
+          <a:p>
+            <a:pPr algn="ctr"/>
+          </a:p>
+        </p:txBody>
+      </p:sp>
+      <p:sp>
+        <p:nvSpPr>
+          <p:cNvPr id="7" name="TextBox 6"/>
+          <p:cNvSpPr txBox="1"/>
+          <p:nvPr/>
+        </p:nvSpPr>
+        <p:spPr>
+          <a:xfrm>
+            <a:off x="813816" y="502920"/>
+            <a:ext cx="10634472" cy="685800"/>
+          </a:xfrm>
+          <a:prstGeom prst="rect">
+            <a:avLst/>
+          </a:prstGeom>
+          <a:noFill/>
+        </p:spPr>
+        <p:txBody>
+          <a:bodyPr wrap="square">
+            <a:spAutoFit/>
+          </a:bodyPr>
+          <a:lstStyle/>
+          <a:p>
+            <a:pPr algn="l"/>
+            <a:r>
+              <a:rPr sz="2400" b="1" i="0">
+                <a:solidFill>
+                  <a:srgbClr val="1F2C56"/>
+                </a:solidFill>
+                <a:latin typeface="Arial"/>
+              </a:rPr>
+              <a:t>Reflexion und Selbstcheck</a:t>
+            </a:r>
+          </a:p>
+        </p:txBody>
+      </p:sp>
+      <p:sp>
+        <p:nvSpPr>
+          <p:cNvPr id="8" name="TextBox 7"/>
+          <p:cNvSpPr txBox="1"/>
+          <p:nvPr/>
+        </p:nvSpPr>
+        <p:spPr>
+          <a:xfrm>
+            <a:off x="685800" y="1417320"/>
+            <a:ext cx="10817352" cy="4892040"/>
+          </a:xfrm>
+          <a:prstGeom prst="rect">
+            <a:avLst/>
+          </a:prstGeom>
+          <a:noFill/>
+        </p:spPr>
+        <p:txBody>
+          <a:bodyPr wrap="square" anchor="ctr">
+            <a:spAutoFit/>
+          </a:bodyPr>
+          <a:lstStyle/>
           <a:p>
             <a:pPr marL="190500" indent="-190500">
               <a:spcBef>
@@ -5964,13 +6357,13 @@
               </a:spcAft>
             </a:pPr>
             <a:r>
-              <a:rPr sz="1400">
+              <a:rPr sz="1300">
                 <a:solidFill>
                   <a:srgbClr val="3D5466"/>
                 </a:solidFill>
                 <a:latin typeface="Arial"/>
               </a:rPr>
-              <a:t>▸  Finanzkennzahlen (letzte 3 Perioden):</a:t>
+              <a:t>▸  Bei welchem Kunden ignorieren Sie gerade ein schwaches Signal, weil die Zahlen noch stimmen?</a:t>
             </a:r>
           </a:p>
           <a:p>
@@ -5983,13 +6376,13 @@
               </a:spcAft>
             </a:pPr>
             <a:r>
-              <a:rPr sz="1400">
+              <a:rPr sz="1300">
                 <a:solidFill>
                   <a:srgbClr val="3D5466"/>
                 </a:solidFill>
                 <a:latin typeface="Arial"/>
               </a:rPr>
-              <a:t>▸  Zusatzinformationen aus dem letzten Gespräch (vor 6 Wochen):</a:t>
+              <a:t>▸  Welchen qualitativen Frühindikator übersehen Sie im Alltag am ehesten?</a:t>
             </a:r>
           </a:p>
           <a:p>
@@ -6002,32 +6395,13 @@
               </a:spcAft>
             </a:pPr>
             <a:r>
-              <a:rPr sz="1400">
+              <a:rPr sz="1300">
                 <a:solidFill>
                   <a:srgbClr val="3D5466"/>
                 </a:solidFill>
                 <a:latin typeface="Arial"/>
               </a:rPr>
-              <a:t>▸  Ampel-Checkliste ausfüllen</a:t>
-            </a:r>
-          </a:p>
-          <a:p>
-            <a:pPr marL="190500" indent="-190500">
-              <a:spcBef>
-                <a:spcPts val="400"/>
-              </a:spcBef>
-              <a:spcAft>
-                <a:spcPts val="200"/>
-              </a:spcAft>
-            </a:pPr>
-            <a:r>
-              <a:rPr sz="1400">
-                <a:solidFill>
-                  <a:srgbClr val="3D5466"/>
-                </a:solidFill>
-                <a:latin typeface="Arial"/>
-              </a:rPr>
-              <a:t>▸  Füllen Sie die Ampel-Checkliste für die Renner Metallverarbeitung GmbH (Berichtsjahr aktuell) vollständig aus.</a:t>
+              <a:t>▸  Kennen Sie Ihren Eskalationspfad für die rote Ampel – auswendig?</a:t>
             </a:r>
           </a:p>
         </p:txBody>
@@ -6035,84 +6409,6 @@
       <p:sp>
         <p:nvSpPr>
           <p:cNvPr id="9" name="Rectangle 8"/>
-          <p:cNvSpPr/>
-          <p:nvPr/>
-        </p:nvSpPr>
-        <p:spPr>
-          <a:xfrm>
-            <a:off x="685800" y="5486400"/>
-            <a:ext cx="10817352" cy="640080"/>
-          </a:xfrm>
-          <a:prstGeom prst="rect">
-            <a:avLst/>
-          </a:prstGeom>
-          <a:solidFill>
-            <a:srgbClr val="1F2C56"/>
-          </a:solidFill>
-          <a:ln>
-            <a:noFill/>
-          </a:ln>
-        </p:spPr>
-        <p:style>
-          <a:lnRef idx="1">
-            <a:schemeClr val="accent1"/>
-          </a:lnRef>
-          <a:fillRef idx="3">
-            <a:schemeClr val="accent1"/>
-          </a:fillRef>
-          <a:effectRef idx="2">
-            <a:schemeClr val="accent1"/>
-          </a:effectRef>
-          <a:fontRef idx="minor">
-            <a:schemeClr val="lt1"/>
-          </a:fontRef>
-        </p:style>
-        <p:txBody>
-          <a:bodyPr rtlCol="0" anchor="ctr"/>
-          <a:lstStyle/>
-          <a:p>
-            <a:pPr algn="ctr"/>
-          </a:p>
-        </p:txBody>
-      </p:sp>
-      <p:sp>
-        <p:nvSpPr>
-          <p:cNvPr id="10" name="TextBox 9"/>
-          <p:cNvSpPr txBox="1"/>
-          <p:nvPr/>
-        </p:nvSpPr>
-        <p:spPr>
-          <a:xfrm>
-            <a:off x="868680" y="5596128"/>
-            <a:ext cx="10451592" cy="457200"/>
-          </a:xfrm>
-          <a:prstGeom prst="rect">
-            <a:avLst/>
-          </a:prstGeom>
-          <a:noFill/>
-        </p:spPr>
-        <p:txBody>
-          <a:bodyPr wrap="square">
-            <a:spAutoFit/>
-          </a:bodyPr>
-          <a:lstStyle/>
-          <a:p>
-            <a:pPr algn="l"/>
-            <a:r>
-              <a:rPr sz="1300" b="1" i="0">
-                <a:solidFill>
-                  <a:srgbClr val="FFFFFF"/>
-                </a:solidFill>
-                <a:latin typeface="Arial"/>
-              </a:rPr>
-              <a:t>→  Bearbeitung im Teilnehmer-Workbook (Arbeitsblatt mit Ausfüllfeldern)</a:t>
-            </a:r>
-          </a:p>
-        </p:txBody>
-      </p:sp>
-      <p:sp>
-        <p:nvSpPr>
-          <p:cNvPr id="11" name="Rectangle 10"/>
           <p:cNvSpPr/>
           <p:nvPr/>
         </p:nvSpPr>
@@ -6155,7 +6451,7 @@
       </p:sp>
       <p:sp>
         <p:nvSpPr>
-          <p:cNvPr id="12" name="TextBox 11"/>
+          <p:cNvPr id="10" name="TextBox 9"/>
           <p:cNvSpPr txBox="1"/>
           <p:nvPr/>
         </p:nvSpPr>
@@ -7817,7 +8113,7 @@
                 </a:solidFill>
                 <a:latin typeface="Arial"/>
               </a:rPr>
-              <a:t>Kreditrisiko – Grundbegriffe und Bedeutung für den Berater</a:t>
+              <a:t>Das erste Warnsignal steht selten in der Bilanz</a:t>
             </a:r>
           </a:p>
         </p:txBody>
@@ -7843,6 +8139,25 @@
             <a:spAutoFit/>
           </a:bodyPr>
           <a:lstStyle/>
+          <a:p>
+            <a:pPr marL="177800" indent="-177800">
+              <a:spcBef>
+                <a:spcPts val="600"/>
+              </a:spcBef>
+              <a:spcAft>
+                <a:spcPts val="200"/>
+              </a:spcAft>
+            </a:pPr>
+            <a:r>
+              <a:rPr sz="1200" i="1">
+                <a:solidFill>
+                  <a:srgbClr val="3D5466"/>
+                </a:solidFill>
+                <a:latin typeface="Arial"/>
+              </a:rPr>
+              <a:t>→  Das erste Warnsignal steht selten in der Bilanz – meist im Kontokorrent.</a:t>
+            </a:r>
+          </a:p>
           <a:p>
             <a:pPr marL="190500" indent="-190500">
               <a:spcBef>
@@ -7859,7 +8174,26 @@
                 </a:solidFill>
                 <a:latin typeface="Arial"/>
               </a:rPr>
-              <a:t>▸  Die drei Kreditrisikoarten:</a:t>
+              <a:t>▸  Qualitative Frühindikatoren laufen den Kennzahlen voraus.</a:t>
+            </a:r>
+          </a:p>
+          <a:p>
+            <a:pPr marL="190500" indent="-190500">
+              <a:spcBef>
+                <a:spcPts val="400"/>
+              </a:spcBef>
+              <a:spcAft>
+                <a:spcPts val="200"/>
+              </a:spcAft>
+            </a:pPr>
+            <a:r>
+              <a:rPr sz="1300">
+                <a:solidFill>
+                  <a:srgbClr val="3D5466"/>
+                </a:solidFill>
+                <a:latin typeface="Arial"/>
+              </a:rPr>
+              <a:t>▸  Wer auf das schwache Signal reagiert, verhindert den Schaden, statt ihn zu verwalten.</a:t>
             </a:r>
           </a:p>
         </p:txBody>
@@ -8197,7 +8531,7 @@
                 </a:solidFill>
                 <a:latin typeface="Arial"/>
               </a:rPr>
-              <a:t>Die vier Krisenphasen [Q-099]</a:t>
+              <a:t>Die vier Krisenphasen: je früher, desto mehr Spielraum</a:t>
             </a:r>
           </a:p>
         </p:txBody>
@@ -8223,6 +8557,25 @@
             <a:spAutoFit/>
           </a:bodyPr>
           <a:lstStyle/>
+          <a:p>
+            <a:pPr marL="177800" indent="-177800">
+              <a:spcBef>
+                <a:spcPts val="600"/>
+              </a:spcBef>
+              <a:spcAft>
+                <a:spcPts val="200"/>
+              </a:spcAft>
+            </a:pPr>
+            <a:r>
+              <a:rPr sz="1200" i="1">
+                <a:solidFill>
+                  <a:srgbClr val="3D5466"/>
+                </a:solidFill>
+                <a:latin typeface="Arial"/>
+              </a:rPr>
+              <a:t>→  Eine Unternehmenskrise läuft in Phasen ab – der Handlungsspielraum ist am Anfang am größten und schwindet mit jeder Phase.</a:t>
+            </a:r>
+          </a:p>
           <a:p>
             <a:pPr marL="190500" indent="-190500">
               <a:spcBef>
@@ -8239,26 +8592,26 @@
                 </a:solidFill>
                 <a:latin typeface="Arial"/>
               </a:rPr>
-              <a:t>▸  Nicht jede rote Ampel hat dieselbe Dringlichkeit. Das Krisenphasen-Modell hilft einzuordnen, wie weit ein Unternehmen bereits in die Krise gerutscht ist:</a:t>
-            </a:r>
-          </a:p>
-          <a:p>
-            <a:pPr marL="177800" indent="-177800">
+              <a:t>▸  Strategiekrise, Ertragskrise, Liquiditätskrise, Insolvenz.</a:t>
+            </a:r>
+          </a:p>
+          <a:p>
+            <a:pPr marL="190500" indent="-190500">
               <a:spcBef>
-                <a:spcPts val="600"/>
+                <a:spcPts val="400"/>
               </a:spcBef>
               <a:spcAft>
                 <a:spcPts val="200"/>
               </a:spcAft>
             </a:pPr>
             <a:r>
-              <a:rPr sz="1200" i="1">
+              <a:rPr sz="1300">
                 <a:solidFill>
                   <a:srgbClr val="3D5466"/>
                 </a:solidFill>
                 <a:latin typeface="Arial"/>
               </a:rPr>
-              <a:t>→  Merksatz: Die Ampel-Checkliste zeigt, wo das Signal liegt. Die Krisenphase zeigt, wie dringend gehandelt werden muss.</a:t>
+              <a:t>▸  Jede Phase hat eigene Frühwarnindikatoren – und einen eigenen Eskalationspfad.</a:t>
             </a:r>
           </a:p>
         </p:txBody>
@@ -8596,7 +8949,7 @@
                 </a:solidFill>
                 <a:latin typeface="Arial"/>
               </a:rPr>
-              <a:t>Frühwarnindikatoren – Quantitativ und Qualitativ</a:t>
+              <a:t>Frühwarnindikatoren: quantitativ und qualitativ</a:t>
             </a:r>
           </a:p>
         </p:txBody>
@@ -8622,6 +8975,25 @@
             <a:spAutoFit/>
           </a:bodyPr>
           <a:lstStyle/>
+          <a:p>
+            <a:pPr marL="177800" indent="-177800">
+              <a:spcBef>
+                <a:spcPts val="600"/>
+              </a:spcBef>
+              <a:spcAft>
+                <a:spcPts val="200"/>
+              </a:spcAft>
+            </a:pPr>
+            <a:r>
+              <a:rPr sz="1200" i="1">
+                <a:solidFill>
+                  <a:srgbClr val="3D5466"/>
+                </a:solidFill>
+                <a:latin typeface="Arial"/>
+              </a:rPr>
+              <a:t>→  Die härtesten Frühsignale sind oft weich – Verhalten, Kommunikation, Kontobewegungen, nicht die Jahresbilanz.</a:t>
+            </a:r>
+          </a:p>
           <a:p>
             <a:pPr marL="190500" indent="-190500">
               <a:spcBef>
@@ -8638,7 +9010,7 @@
                 </a:solidFill>
                 <a:latin typeface="Arial"/>
               </a:rPr>
-              <a:t>▸  Frühwarnindikatoren lassen sich in zwei komplementäre Kategorien einteilen :</a:t>
+              <a:t>▸  Quantitativ: Kontokorrent-Auslastung, Zinsverzug, rückläufige Umsätze, Ratingverschlechterung.</a:t>
             </a:r>
           </a:p>
           <a:p>
@@ -8657,64 +9029,7 @@
                 </a:solidFill>
                 <a:latin typeface="Arial"/>
               </a:rPr>
-              <a:t>▸  Quantitative Indikatoren (aus Jahresabschluss und BWA):</a:t>
-            </a:r>
-          </a:p>
-          <a:p>
-            <a:pPr marL="190500" indent="-190500">
-              <a:spcBef>
-                <a:spcPts val="400"/>
-              </a:spcBef>
-              <a:spcAft>
-                <a:spcPts val="200"/>
-              </a:spcAft>
-            </a:pPr>
-            <a:r>
-              <a:rPr sz="1300">
-                <a:solidFill>
-                  <a:srgbClr val="3D5466"/>
-                </a:solidFill>
-                <a:latin typeface="Arial"/>
-              </a:rPr>
-              <a:t>▸  NFK = verzinsliches Fremdkapital abzüglich liquide Mittel</a:t>
-            </a:r>
-          </a:p>
-          <a:p>
-            <a:pPr marL="190500" indent="-190500">
-              <a:spcBef>
-                <a:spcPts val="400"/>
-              </a:spcBef>
-              <a:spcAft>
-                <a:spcPts val="200"/>
-              </a:spcAft>
-            </a:pPr>
-            <a:r>
-              <a:rPr sz="1300">
-                <a:solidFill>
-                  <a:srgbClr val="3D5466"/>
-                </a:solidFill>
-                <a:latin typeface="Arial"/>
-              </a:rPr>
-              <a:t>▸  Qualitative Indikatoren (aus Kundengespräch und Marktbeobachtung):</a:t>
-            </a:r>
-          </a:p>
-          <a:p>
-            <a:pPr marL="177800" indent="-177800">
-              <a:spcBef>
-                <a:spcPts val="600"/>
-              </a:spcBef>
-              <a:spcAft>
-                <a:spcPts val="200"/>
-              </a:spcAft>
-            </a:pPr>
-            <a:r>
-              <a:rPr sz="1200" i="1">
-                <a:solidFill>
-                  <a:srgbClr val="3D5466"/>
-                </a:solidFill>
-                <a:latin typeface="Arial"/>
-              </a:rPr>
-              <a:t>→  Merksatz: Qualitative Signale gehen quantitativen häufig 6–12 Monate voraus . Wer nur auf Zahlen wartet, reagiert zu spät.</a:t>
+              <a:t>▸  Qualitativ: verzögerte Unterlagen, Führungswechsel, Auftragsstornos, Gesprächsvermeidung.</a:t>
             </a:r>
           </a:p>
         </p:txBody>
@@ -8931,7 +9246,7 @@
                 </a:solidFill>
                 <a:latin typeface="Consolas"/>
               </a:rPr>
-              <a:t>M04  ·  ÜBERSICHT</a:t>
+              <a:t>M04  ·  SCHAUBILD</a:t>
             </a:r>
           </a:p>
         </p:txBody>
@@ -8966,7 +9281,7 @@
                 </a:solidFill>
                 <a:latin typeface="Arial"/>
               </a:rPr>
-              <a:t>Frühwarnindikatoren – Quantitativ und Qualitativ</a:t>
+              <a:t>Die Frühwarn-Ampelkarte</a:t>
             </a:r>
           </a:p>
         </p:txBody>
@@ -9014,607 +9329,30 @@
           </a:p>
         </p:txBody>
       </p:sp>
-      <p:graphicFrame>
-        <p:nvGraphicFramePr>
-          <p:cNvPr id="7" name="Table 6"/>
-          <p:cNvGraphicFramePr>
-            <a:graphicFrameLocks noGrp="1"/>
-          </p:cNvGraphicFramePr>
-          <p:nvPr/>
-        </p:nvGraphicFramePr>
-        <p:xfrm>
-          <a:off x="685800" y="1417320"/>
-          <a:ext cx="10817352" cy="2304288"/>
-        </p:xfrm>
-        <a:graphic>
-          <a:graphicData uri="http://schemas.openxmlformats.org/drawingml/2006/table">
-            <a:tbl>
-              <a:tblPr firstRow="1" bandRow="1">
-                <a:tableStyleId>{5C22544A-7EE6-4342-B048-85BDC9FD1C3A}</a:tableStyleId>
-              </a:tblPr>
-              <a:tblGrid>
-                <a:gridCol w="2163470"/>
-                <a:gridCol w="2163470"/>
-                <a:gridCol w="2163470"/>
-                <a:gridCol w="2163470"/>
-                <a:gridCol w="2163472"/>
-              </a:tblGrid>
-              <a:tr h="384048">
-                <a:tc>
-                  <a:txBody>
-                    <a:bodyPr/>
-                    <a:lstStyle/>
-                    <a:p>
-                      <a:r>
-                        <a:rPr sz="1100" b="1">
-                          <a:solidFill>
-                            <a:srgbClr val="FFFFFF"/>
-                          </a:solidFill>
-                          <a:latin typeface="Arial"/>
-                        </a:rPr>
-                        <a:t>Indikator</a:t>
-                      </a:r>
-                    </a:p>
-                  </a:txBody>
-                  <a:tcPr>
-                    <a:solidFill>
-                      <a:srgbClr val="1F2C56"/>
-                    </a:solidFill>
-                  </a:tcPr>
-                </a:tc>
-                <a:tc>
-                  <a:txBody>
-                    <a:bodyPr/>
-                    <a:lstStyle/>
-                    <a:p>
-                      <a:r>
-                        <a:rPr sz="1100" b="1">
-                          <a:solidFill>
-                            <a:srgbClr val="FFFFFF"/>
-                          </a:solidFill>
-                          <a:latin typeface="Arial"/>
-                        </a:rPr>
-                        <a:t>Formel</a:t>
-                      </a:r>
-                    </a:p>
-                  </a:txBody>
-                  <a:tcPr>
-                    <a:solidFill>
-                      <a:srgbClr val="1F2C56"/>
-                    </a:solidFill>
-                  </a:tcPr>
-                </a:tc>
-                <a:tc>
-                  <a:txBody>
-                    <a:bodyPr/>
-                    <a:lstStyle/>
-                    <a:p>
-                      <a:r>
-                        <a:rPr sz="1100" b="1">
-                          <a:solidFill>
-                            <a:srgbClr val="FFFFFF"/>
-                          </a:solidFill>
-                          <a:latin typeface="Arial"/>
-                        </a:rPr>
-                        <a:t>Grün</a:t>
-                      </a:r>
-                    </a:p>
-                  </a:txBody>
-                  <a:tcPr>
-                    <a:solidFill>
-                      <a:srgbClr val="1F2C56"/>
-                    </a:solidFill>
-                  </a:tcPr>
-                </a:tc>
-                <a:tc>
-                  <a:txBody>
-                    <a:bodyPr/>
-                    <a:lstStyle/>
-                    <a:p>
-                      <a:r>
-                        <a:rPr sz="1100" b="1">
-                          <a:solidFill>
-                            <a:srgbClr val="FFFFFF"/>
-                          </a:solidFill>
-                          <a:latin typeface="Arial"/>
-                        </a:rPr>
-                        <a:t>Gelb</a:t>
-                      </a:r>
-                    </a:p>
-                  </a:txBody>
-                  <a:tcPr>
-                    <a:solidFill>
-                      <a:srgbClr val="1F2C56"/>
-                    </a:solidFill>
-                  </a:tcPr>
-                </a:tc>
-                <a:tc>
-                  <a:txBody>
-                    <a:bodyPr/>
-                    <a:lstStyle/>
-                    <a:p>
-                      <a:r>
-                        <a:rPr sz="1100" b="1">
-                          <a:solidFill>
-                            <a:srgbClr val="FFFFFF"/>
-                          </a:solidFill>
-                          <a:latin typeface="Arial"/>
-                        </a:rPr>
-                        <a:t>Rot</a:t>
-                      </a:r>
-                    </a:p>
-                  </a:txBody>
-                  <a:tcPr>
-                    <a:solidFill>
-                      <a:srgbClr val="1F2C56"/>
-                    </a:solidFill>
-                  </a:tcPr>
-                </a:tc>
-              </a:tr>
-              <a:tr h="384048">
-                <a:tc>
-                  <a:txBody>
-                    <a:bodyPr/>
-                    <a:lstStyle/>
-                    <a:p>
-                      <a:r>
-                        <a:rPr sz="1050">
-                          <a:solidFill>
-                            <a:srgbClr val="3D5466"/>
-                          </a:solidFill>
-                          <a:latin typeface="Arial"/>
-                        </a:rPr>
-                        <a:t>EBITDA-Marge</a:t>
-                      </a:r>
-                    </a:p>
-                  </a:txBody>
-                  <a:tcPr/>
-                </a:tc>
-                <a:tc>
-                  <a:txBody>
-                    <a:bodyPr/>
-                    <a:lstStyle/>
-                    <a:p>
-                      <a:r>
-                        <a:rPr sz="1050">
-                          <a:solidFill>
-                            <a:srgbClr val="3D5466"/>
-                          </a:solidFill>
-                          <a:latin typeface="Arial"/>
-                        </a:rPr>
-                        <a:t>EBITDA / Umsatz × 100</a:t>
-                      </a:r>
-                    </a:p>
-                  </a:txBody>
-                  <a:tcPr/>
-                </a:tc>
-                <a:tc>
-                  <a:txBody>
-                    <a:bodyPr/>
-                    <a:lstStyle/>
-                    <a:p>
-                      <a:r>
-                        <a:rPr sz="1050">
-                          <a:solidFill>
-                            <a:srgbClr val="3D5466"/>
-                          </a:solidFill>
-                          <a:latin typeface="Arial"/>
-                        </a:rPr>
-                        <a:t>&gt; 8 %</a:t>
-                      </a:r>
-                    </a:p>
-                  </a:txBody>
-                  <a:tcPr/>
-                </a:tc>
-                <a:tc>
-                  <a:txBody>
-                    <a:bodyPr/>
-                    <a:lstStyle/>
-                    <a:p>
-                      <a:r>
-                        <a:rPr sz="1050">
-                          <a:solidFill>
-                            <a:srgbClr val="3D5466"/>
-                          </a:solidFill>
-                          <a:latin typeface="Arial"/>
-                        </a:rPr>
-                        <a:t>5–8 %</a:t>
-                      </a:r>
-                    </a:p>
-                  </a:txBody>
-                  <a:tcPr/>
-                </a:tc>
-                <a:tc>
-                  <a:txBody>
-                    <a:bodyPr/>
-                    <a:lstStyle/>
-                    <a:p>
-                      <a:r>
-                        <a:rPr sz="1050">
-                          <a:solidFill>
-                            <a:srgbClr val="3D5466"/>
-                          </a:solidFill>
-                          <a:latin typeface="Arial"/>
-                        </a:rPr>
-                        <a:t>&lt; 5 %</a:t>
-                      </a:r>
-                    </a:p>
-                  </a:txBody>
-                  <a:tcPr/>
-                </a:tc>
-              </a:tr>
-              <a:tr h="384048">
-                <a:tc>
-                  <a:txBody>
-                    <a:bodyPr/>
-                    <a:lstStyle/>
-                    <a:p>
-                      <a:r>
-                        <a:rPr sz="1050">
-                          <a:solidFill>
-                            <a:srgbClr val="3D5466"/>
-                          </a:solidFill>
-                          <a:latin typeface="Arial"/>
-                        </a:rPr>
-                        <a:t>Leverage (NFK/EBITDA)</a:t>
-                      </a:r>
-                    </a:p>
-                  </a:txBody>
-                  <a:tcPr/>
-                </a:tc>
-                <a:tc>
-                  <a:txBody>
-                    <a:bodyPr/>
-                    <a:lstStyle/>
-                    <a:p>
-                      <a:r>
-                        <a:rPr sz="1050">
-                          <a:solidFill>
-                            <a:srgbClr val="3D5466"/>
-                          </a:solidFill>
-                          <a:latin typeface="Arial"/>
-                        </a:rPr>
-                        <a:t>Netto-Finanzverbindlichkeiten / EBITDA</a:t>
-                      </a:r>
-                    </a:p>
-                  </a:txBody>
-                  <a:tcPr/>
-                </a:tc>
-                <a:tc>
-                  <a:txBody>
-                    <a:bodyPr/>
-                    <a:lstStyle/>
-                    <a:p>
-                      <a:r>
-                        <a:rPr sz="1050">
-                          <a:solidFill>
-                            <a:srgbClr val="3D5466"/>
-                          </a:solidFill>
-                          <a:latin typeface="Arial"/>
-                        </a:rPr>
-                        <a:t>&lt; 3,0x</a:t>
-                      </a:r>
-                    </a:p>
-                  </a:txBody>
-                  <a:tcPr/>
-                </a:tc>
-                <a:tc>
-                  <a:txBody>
-                    <a:bodyPr/>
-                    <a:lstStyle/>
-                    <a:p>
-                      <a:r>
-                        <a:rPr sz="1050">
-                          <a:solidFill>
-                            <a:srgbClr val="3D5466"/>
-                          </a:solidFill>
-                          <a:latin typeface="Arial"/>
-                        </a:rPr>
-                        <a:t>3,0–4,0x</a:t>
-                      </a:r>
-                    </a:p>
-                  </a:txBody>
-                  <a:tcPr/>
-                </a:tc>
-                <a:tc>
-                  <a:txBody>
-                    <a:bodyPr/>
-                    <a:lstStyle/>
-                    <a:p>
-                      <a:r>
-                        <a:rPr sz="1050">
-                          <a:solidFill>
-                            <a:srgbClr val="3D5466"/>
-                          </a:solidFill>
-                          <a:latin typeface="Arial"/>
-                        </a:rPr>
-                        <a:t>&gt; 4,0x</a:t>
-                      </a:r>
-                    </a:p>
-                  </a:txBody>
-                  <a:tcPr/>
-                </a:tc>
-              </a:tr>
-              <a:tr h="384048">
-                <a:tc>
-                  <a:txBody>
-                    <a:bodyPr/>
-                    <a:lstStyle/>
-                    <a:p>
-                      <a:r>
-                        <a:rPr sz="1050">
-                          <a:solidFill>
-                            <a:srgbClr val="3D5466"/>
-                          </a:solidFill>
-                          <a:latin typeface="Arial"/>
-                        </a:rPr>
-                        <a:t>Eigenkapitalquote</a:t>
-                      </a:r>
-                    </a:p>
-                  </a:txBody>
-                  <a:tcPr/>
-                </a:tc>
-                <a:tc>
-                  <a:txBody>
-                    <a:bodyPr/>
-                    <a:lstStyle/>
-                    <a:p>
-                      <a:r>
-                        <a:rPr sz="1050">
-                          <a:solidFill>
-                            <a:srgbClr val="3D5466"/>
-                          </a:solidFill>
-                          <a:latin typeface="Arial"/>
-                        </a:rPr>
-                        <a:t>EK / Bilanzsumme × 100</a:t>
-                      </a:r>
-                    </a:p>
-                  </a:txBody>
-                  <a:tcPr/>
-                </a:tc>
-                <a:tc>
-                  <a:txBody>
-                    <a:bodyPr/>
-                    <a:lstStyle/>
-                    <a:p>
-                      <a:r>
-                        <a:rPr sz="1050">
-                          <a:solidFill>
-                            <a:srgbClr val="3D5466"/>
-                          </a:solidFill>
-                          <a:latin typeface="Arial"/>
-                        </a:rPr>
-                        <a:t>&gt; 20 %</a:t>
-                      </a:r>
-                    </a:p>
-                  </a:txBody>
-                  <a:tcPr/>
-                </a:tc>
-                <a:tc>
-                  <a:txBody>
-                    <a:bodyPr/>
-                    <a:lstStyle/>
-                    <a:p>
-                      <a:r>
-                        <a:rPr sz="1050">
-                          <a:solidFill>
-                            <a:srgbClr val="3D5466"/>
-                          </a:solidFill>
-                          <a:latin typeface="Arial"/>
-                        </a:rPr>
-                        <a:t>10–20 %</a:t>
-                      </a:r>
-                    </a:p>
-                  </a:txBody>
-                  <a:tcPr/>
-                </a:tc>
-                <a:tc>
-                  <a:txBody>
-                    <a:bodyPr/>
-                    <a:lstStyle/>
-                    <a:p>
-                      <a:r>
-                        <a:rPr sz="1050">
-                          <a:solidFill>
-                            <a:srgbClr val="3D5466"/>
-                          </a:solidFill>
-                          <a:latin typeface="Arial"/>
-                        </a:rPr>
-                        <a:t>&lt; 10 %</a:t>
-                      </a:r>
-                    </a:p>
-                  </a:txBody>
-                  <a:tcPr/>
-                </a:tc>
-              </a:tr>
-              <a:tr h="384048">
-                <a:tc>
-                  <a:txBody>
-                    <a:bodyPr/>
-                    <a:lstStyle/>
-                    <a:p>
-                      <a:r>
-                        <a:rPr sz="1050">
-                          <a:solidFill>
-                            <a:srgbClr val="3D5466"/>
-                          </a:solidFill>
-                          <a:latin typeface="Arial"/>
-                        </a:rPr>
-                        <a:t>KK-Inanspruchnahme (Ø)</a:t>
-                      </a:r>
-                    </a:p>
-                  </a:txBody>
-                  <a:tcPr/>
-                </a:tc>
-                <a:tc>
-                  <a:txBody>
-                    <a:bodyPr/>
-                    <a:lstStyle/>
-                    <a:p>
-                      <a:r>
-                        <a:rPr sz="1050">
-                          <a:solidFill>
-                            <a:srgbClr val="3D5466"/>
-                          </a:solidFill>
-                          <a:latin typeface="Arial"/>
-                        </a:rPr>
-                        <a:t>Ø-Inanspruchnahme / Limit × 100</a:t>
-                      </a:r>
-                    </a:p>
-                  </a:txBody>
-                  <a:tcPr/>
-                </a:tc>
-                <a:tc>
-                  <a:txBody>
-                    <a:bodyPr/>
-                    <a:lstStyle/>
-                    <a:p>
-                      <a:r>
-                        <a:rPr sz="1050">
-                          <a:solidFill>
-                            <a:srgbClr val="3D5466"/>
-                          </a:solidFill>
-                          <a:latin typeface="Arial"/>
-                        </a:rPr>
-                        <a:t>&lt; 60 %</a:t>
-                      </a:r>
-                    </a:p>
-                  </a:txBody>
-                  <a:tcPr/>
-                </a:tc>
-                <a:tc>
-                  <a:txBody>
-                    <a:bodyPr/>
-                    <a:lstStyle/>
-                    <a:p>
-                      <a:r>
-                        <a:rPr sz="1050">
-                          <a:solidFill>
-                            <a:srgbClr val="3D5466"/>
-                          </a:solidFill>
-                          <a:latin typeface="Arial"/>
-                        </a:rPr>
-                        <a:t>60–85 %</a:t>
-                      </a:r>
-                    </a:p>
-                  </a:txBody>
-                  <a:tcPr/>
-                </a:tc>
-                <a:tc>
-                  <a:txBody>
-                    <a:bodyPr/>
-                    <a:lstStyle/>
-                    <a:p>
-                      <a:r>
-                        <a:rPr sz="1050">
-                          <a:solidFill>
-                            <a:srgbClr val="3D5466"/>
-                          </a:solidFill>
-                          <a:latin typeface="Arial"/>
-                        </a:rPr>
-                        <a:t>&gt; 85 %</a:t>
-                      </a:r>
-                    </a:p>
-                  </a:txBody>
-                  <a:tcPr/>
-                </a:tc>
-              </a:tr>
-              <a:tr h="384048">
-                <a:tc>
-                  <a:txBody>
-                    <a:bodyPr/>
-                    <a:lstStyle/>
-                    <a:p>
-                      <a:r>
-                        <a:rPr sz="1050">
-                          <a:solidFill>
-                            <a:srgbClr val="3D5466"/>
-                          </a:solidFill>
-                          <a:latin typeface="Arial"/>
-                        </a:rPr>
-                        <a:t>Jahresabschluss-Vorlage</a:t>
-                      </a:r>
-                    </a:p>
-                  </a:txBody>
-                  <a:tcPr/>
-                </a:tc>
-                <a:tc>
-                  <a:txBody>
-                    <a:bodyPr/>
-                    <a:lstStyle/>
-                    <a:p>
-                      <a:r>
-                        <a:rPr sz="1050">
-                          <a:solidFill>
-                            <a:srgbClr val="3D5466"/>
-                          </a:solidFill>
-                          <a:latin typeface="Arial"/>
-                        </a:rPr>
-                        <a:t>Monate nach Geschäftsjahresende</a:t>
-                      </a:r>
-                    </a:p>
-                  </a:txBody>
-                  <a:tcPr/>
-                </a:tc>
-                <a:tc>
-                  <a:txBody>
-                    <a:bodyPr/>
-                    <a:lstStyle/>
-                    <a:p>
-                      <a:r>
-                        <a:rPr sz="1050">
-                          <a:solidFill>
-                            <a:srgbClr val="3D5466"/>
-                          </a:solidFill>
-                          <a:latin typeface="Arial"/>
-                        </a:rPr>
-                        <a:t>&lt; 6</a:t>
-                      </a:r>
-                    </a:p>
-                  </a:txBody>
-                  <a:tcPr/>
-                </a:tc>
-                <a:tc>
-                  <a:txBody>
-                    <a:bodyPr/>
-                    <a:lstStyle/>
-                    <a:p>
-                      <a:r>
-                        <a:rPr sz="1050">
-                          <a:solidFill>
-                            <a:srgbClr val="3D5466"/>
-                          </a:solidFill>
-                          <a:latin typeface="Arial"/>
-                        </a:rPr>
-                        <a:t>6–9</a:t>
-                      </a:r>
-                    </a:p>
-                  </a:txBody>
-                  <a:tcPr/>
-                </a:tc>
-                <a:tc>
-                  <a:txBody>
-                    <a:bodyPr/>
-                    <a:lstStyle/>
-                    <a:p>
-                      <a:r>
-                        <a:rPr sz="1050">
-                          <a:solidFill>
-                            <a:srgbClr val="3D5466"/>
-                          </a:solidFill>
-                          <a:latin typeface="Arial"/>
-                        </a:rPr>
-                        <a:t>&gt; 9 / Verweigerung</a:t>
-                      </a:r>
-                    </a:p>
-                  </a:txBody>
-                  <a:tcPr/>
-                </a:tc>
-              </a:tr>
-            </a:tbl>
-          </a:graphicData>
-        </a:graphic>
-      </p:graphicFrame>
+      <p:pic>
+        <p:nvPicPr>
+          <p:cNvPr id="7" name="Picture 6" descr="image.png"/>
+          <p:cNvPicPr>
+            <a:picLocks noChangeAspect="1"/>
+          </p:cNvPicPr>
+          <p:nvPr/>
+        </p:nvPicPr>
+        <p:blipFill>
+          <a:blip r:embed="rId2"/>
+          <a:stretch>
+            <a:fillRect/>
+          </a:stretch>
+        </p:blipFill>
+        <p:spPr>
+          <a:xfrm>
+            <a:off x="2163921" y="1325880"/>
+            <a:ext cx="7861110" cy="4937760"/>
+          </a:xfrm>
+          <a:prstGeom prst="rect">
+            <a:avLst/>
+          </a:prstGeom>
+        </p:spPr>
+      </p:pic>
       <p:sp>
         <p:nvSpPr>
           <p:cNvPr id="8" name="Rectangle 7"/>
@@ -9723,7 +9461,7 @@
                 </a:solidFill>
                 <a:latin typeface="Consolas"/>
               </a:rPr>
-              <a:t>Übersicht</a:t>
+              <a:t>Schaubild</a:t>
             </a:r>
           </a:p>
         </p:txBody>
@@ -9983,7 +9721,7 @@
                 </a:solidFill>
                 <a:latin typeface="Arial"/>
               </a:rPr>
-              <a:t>Ampel-Checkliste: Gesamtbewertung Kreditrisiko</a:t>
+              <a:t>Eskalationspfade: wer handelt wann?</a:t>
             </a:r>
           </a:p>
         </p:txBody>
@@ -10009,6 +9747,25 @@
             <a:spAutoFit/>
           </a:bodyPr>
           <a:lstStyle/>
+          <a:p>
+            <a:pPr marL="177800" indent="-177800">
+              <a:spcBef>
+                <a:spcPts val="600"/>
+              </a:spcBef>
+              <a:spcAft>
+                <a:spcPts val="200"/>
+              </a:spcAft>
+            </a:pPr>
+            <a:r>
+              <a:rPr sz="1200" i="1">
+                <a:solidFill>
+                  <a:srgbClr val="3D5466"/>
+                </a:solidFill>
+                <a:latin typeface="Arial"/>
+              </a:rPr>
+              <a:t>→  Ein erkanntes Signal ist wertlos ohne klaren Eskalationspfad – wer wird wann informiert?</a:t>
+            </a:r>
+          </a:p>
           <a:p>
             <a:pPr marL="190500" indent="-190500">
               <a:spcBef>
@@ -10025,26 +9782,45 @@
                 </a:solidFill>
                 <a:latin typeface="Arial"/>
               </a:rPr>
-              <a:t>▸  Anleitung: Bewerten Sie jeden Indikator mit Grün (0 Punkte), Gelb (1 Punkt) oder Rot (2 Punkte).</a:t>
-            </a:r>
-          </a:p>
-          <a:p>
-            <a:pPr marL="177800" indent="-177800">
+              <a:t>▸  Gelb: Beobachtung intensivieren, Risikovermerk in agree, Gespräch suchen.</a:t>
+            </a:r>
+          </a:p>
+          <a:p>
+            <a:pPr marL="190500" indent="-190500">
               <a:spcBef>
-                <a:spcPts val="600"/>
+                <a:spcPts val="400"/>
               </a:spcBef>
               <a:spcAft>
                 <a:spcPts val="200"/>
               </a:spcAft>
             </a:pPr>
             <a:r>
-              <a:rPr sz="1200" i="1">
+              <a:rPr sz="1300">
                 <a:solidFill>
                   <a:srgbClr val="3D5466"/>
                 </a:solidFill>
                 <a:latin typeface="Arial"/>
               </a:rPr>
-              <a:t>→  Einzel-Rot-Trigger: Bei Jahresabschluss-Verweigerung, laufendem Zinsverzug oder Kenntnis eines Insolvenzantrags → unabhängig vom Gesamtscore sofort eskalieren.</a:t>
+              <a:t>▸  Rot: Teamleiter und Marktfolge informieren, keine eigenständigen Zusagen.</a:t>
+            </a:r>
+          </a:p>
+          <a:p>
+            <a:pPr marL="190500" indent="-190500">
+              <a:spcBef>
+                <a:spcPts val="400"/>
+              </a:spcBef>
+              <a:spcAft>
+                <a:spcPts val="200"/>
+              </a:spcAft>
+            </a:pPr>
+            <a:r>
+              <a:rPr sz="1300">
+                <a:solidFill>
+                  <a:srgbClr val="3D5466"/>
+                </a:solidFill>
+                <a:latin typeface="Arial"/>
+              </a:rPr>
+              <a:t>▸  Bei Insolvenzantrag: umgehend die Problemkreditabteilung.</a:t>
             </a:r>
           </a:p>
         </p:txBody>
